--- a/documents/slide_soutenance/V2soutenance_m2_mmt_alpha.pptx
+++ b/documents/slide_soutenance/V2soutenance_m2_mmt_alpha.pptx
@@ -5,29 +5,29 @@
     <p:sldMasterId id="2147483648" r:id="rId1"/>
   </p:sldMasterIdLst>
   <p:sldIdLst>
-    <p:sldId id="256" r:id="rId7"/>
-    <p:sldId id="257" r:id="rId8"/>
-    <p:sldId id="258" r:id="rId9"/>
-    <p:sldId id="259" r:id="rId10"/>
-    <p:sldId id="260" r:id="rId11"/>
-    <p:sldId id="261" r:id="rId12"/>
-    <p:sldId id="262" r:id="rId13"/>
-    <p:sldId id="263" r:id="rId14"/>
-    <p:sldId id="264" r:id="rId15"/>
-    <p:sldId id="265" r:id="rId16"/>
-    <p:sldId id="266" r:id="rId17"/>
-    <p:sldId id="267" r:id="rId18"/>
-    <p:sldId id="268" r:id="rId19"/>
-    <p:sldId id="269" r:id="rId20"/>
-    <p:sldId id="270" r:id="rId21"/>
-    <p:sldId id="271" r:id="rId22"/>
-    <p:sldId id="272" r:id="rId23"/>
-    <p:sldId id="273" r:id="rId24"/>
-    <p:sldId id="274" r:id="rId25"/>
-    <p:sldId id="275" r:id="rId26"/>
-    <p:sldId id="276" r:id="rId27"/>
+    <p:sldId id="256" r:id="rId2"/>
+    <p:sldId id="257" r:id="rId3"/>
+    <p:sldId id="258" r:id="rId4"/>
+    <p:sldId id="259" r:id="rId5"/>
+    <p:sldId id="260" r:id="rId6"/>
+    <p:sldId id="261" r:id="rId7"/>
+    <p:sldId id="287" r:id="rId8"/>
+    <p:sldId id="278" r:id="rId9"/>
+    <p:sldId id="279" r:id="rId10"/>
+    <p:sldId id="280" r:id="rId11"/>
+    <p:sldId id="281" r:id="rId12"/>
+    <p:sldId id="295" r:id="rId13"/>
+    <p:sldId id="288" r:id="rId14"/>
+    <p:sldId id="294" r:id="rId15"/>
+    <p:sldId id="284" r:id="rId16"/>
+    <p:sldId id="285" r:id="rId17"/>
+    <p:sldId id="286" r:id="rId18"/>
+    <p:sldId id="273" r:id="rId19"/>
+    <p:sldId id="274" r:id="rId20"/>
+    <p:sldId id="275" r:id="rId21"/>
+    <p:sldId id="276" r:id="rId22"/>
   </p:sldIdLst>
-  <p:sldSz cx="14630400" cy="8229600" type="screen4x3"/>
+  <p:sldSz cx="14630400" cy="8229600"/>
   <p:notesSz cx="6858000" cy="9144000"/>
   <p:defaultTextStyle>
     <a:defPPr>
@@ -124,6 +124,22 @@
       </a:defRPr>
     </a:lvl9pPr>
   </p:defaultTextStyle>
+  <p:extLst>
+    <p:ext uri="{EFAFB233-063F-42B5-8137-9DF3F51BA10A}">
+      <p15:sldGuideLst xmlns:p15="http://schemas.microsoft.com/office/powerpoint/2012/main">
+        <p15:guide id="1" orient="horz" pos="2160">
+          <p15:clr>
+            <a:srgbClr val="A4A3A4"/>
+          </p15:clr>
+        </p15:guide>
+        <p15:guide id="2" pos="2880">
+          <p15:clr>
+            <a:srgbClr val="A4A3A4"/>
+          </p15:clr>
+        </p15:guide>
+      </p15:sldGuideLst>
+    </p:ext>
+  </p:extLst>
 </p:presentation>
 </file>
 
@@ -165,10 +181,9 @@
           <a:lstStyle/>
           <a:p>
             <a:r>
-              <a:rPr lang="en-US" smtClean="0"/>
+              <a:rPr lang="en-US"/>
               <a:t>Click to edit Master title style</a:t>
             </a:r>
-            <a:endParaRPr lang="en-US"/>
           </a:p>
         </p:txBody>
       </p:sp>
@@ -284,10 +299,9 @@
           </a:lstStyle>
           <a:p>
             <a:r>
-              <a:rPr lang="en-US" smtClean="0"/>
+              <a:rPr lang="en-US"/>
               <a:t>Click to edit Master subtitle style</a:t>
             </a:r>
-            <a:endParaRPr lang="en-US"/>
           </a:p>
         </p:txBody>
       </p:sp>
@@ -308,7 +322,7 @@
           <a:p>
             <a:fld id="{5BCAD085-E8A6-8845-BD4E-CB4CCA059FC4}" type="datetimeFigureOut">
               <a:rPr lang="en-US" smtClean="0"/>
-              <a:t>1/27/13</a:t>
+              <a:t>9/28/2026</a:t>
             </a:fld>
             <a:endParaRPr lang="en-US"/>
           </a:p>
@@ -402,10 +416,9 @@
           <a:lstStyle/>
           <a:p>
             <a:r>
-              <a:rPr lang="en-US" smtClean="0"/>
+              <a:rPr lang="en-US"/>
               <a:t>Click to edit Master title style</a:t>
             </a:r>
-            <a:endParaRPr lang="en-US"/>
           </a:p>
         </p:txBody>
       </p:sp>
@@ -426,38 +439,37 @@
           <a:p>
             <a:pPr lvl="0"/>
             <a:r>
-              <a:rPr lang="en-US" smtClean="0"/>
+              <a:rPr lang="en-US"/>
               <a:t>Click to edit Master text styles</a:t>
             </a:r>
           </a:p>
           <a:p>
             <a:pPr lvl="1"/>
             <a:r>
-              <a:rPr lang="en-US" smtClean="0"/>
+              <a:rPr lang="en-US"/>
               <a:t>Second level</a:t>
             </a:r>
           </a:p>
           <a:p>
             <a:pPr lvl="2"/>
             <a:r>
-              <a:rPr lang="en-US" smtClean="0"/>
+              <a:rPr lang="en-US"/>
               <a:t>Third level</a:t>
             </a:r>
           </a:p>
           <a:p>
             <a:pPr lvl="3"/>
             <a:r>
-              <a:rPr lang="en-US" smtClean="0"/>
+              <a:rPr lang="en-US"/>
               <a:t>Fourth level</a:t>
             </a:r>
           </a:p>
           <a:p>
             <a:pPr lvl="4"/>
             <a:r>
-              <a:rPr lang="en-US" smtClean="0"/>
+              <a:rPr lang="en-US"/>
               <a:t>Fifth level</a:t>
             </a:r>
-            <a:endParaRPr lang="en-US"/>
           </a:p>
         </p:txBody>
       </p:sp>
@@ -478,7 +490,7 @@
           <a:p>
             <a:fld id="{5BCAD085-E8A6-8845-BD4E-CB4CCA059FC4}" type="datetimeFigureOut">
               <a:rPr lang="en-US" smtClean="0"/>
-              <a:t>1/27/13</a:t>
+              <a:t>9/28/2026</a:t>
             </a:fld>
             <a:endParaRPr lang="en-US"/>
           </a:p>
@@ -577,10 +589,9 @@
           <a:lstStyle/>
           <a:p>
             <a:r>
-              <a:rPr lang="en-US" smtClean="0"/>
+              <a:rPr lang="en-US"/>
               <a:t>Click to edit Master title style</a:t>
             </a:r>
-            <a:endParaRPr lang="en-US"/>
           </a:p>
         </p:txBody>
       </p:sp>
@@ -606,38 +617,37 @@
           <a:p>
             <a:pPr lvl="0"/>
             <a:r>
-              <a:rPr lang="en-US" smtClean="0"/>
+              <a:rPr lang="en-US"/>
               <a:t>Click to edit Master text styles</a:t>
             </a:r>
           </a:p>
           <a:p>
             <a:pPr lvl="1"/>
             <a:r>
-              <a:rPr lang="en-US" smtClean="0"/>
+              <a:rPr lang="en-US"/>
               <a:t>Second level</a:t>
             </a:r>
           </a:p>
           <a:p>
             <a:pPr lvl="2"/>
             <a:r>
-              <a:rPr lang="en-US" smtClean="0"/>
+              <a:rPr lang="en-US"/>
               <a:t>Third level</a:t>
             </a:r>
           </a:p>
           <a:p>
             <a:pPr lvl="3"/>
             <a:r>
-              <a:rPr lang="en-US" smtClean="0"/>
+              <a:rPr lang="en-US"/>
               <a:t>Fourth level</a:t>
             </a:r>
           </a:p>
           <a:p>
             <a:pPr lvl="4"/>
             <a:r>
-              <a:rPr lang="en-US" smtClean="0"/>
+              <a:rPr lang="en-US"/>
               <a:t>Fifth level</a:t>
             </a:r>
-            <a:endParaRPr lang="en-US"/>
           </a:p>
         </p:txBody>
       </p:sp>
@@ -658,7 +668,7 @@
           <a:p>
             <a:fld id="{5BCAD085-E8A6-8845-BD4E-CB4CCA059FC4}" type="datetimeFigureOut">
               <a:rPr lang="en-US" smtClean="0"/>
-              <a:t>1/27/13</a:t>
+              <a:t>9/28/2026</a:t>
             </a:fld>
             <a:endParaRPr lang="en-US"/>
           </a:p>
@@ -752,10 +762,9 @@
           <a:lstStyle/>
           <a:p>
             <a:r>
-              <a:rPr lang="en-US" smtClean="0"/>
+              <a:rPr lang="en-US"/>
               <a:t>Click to edit Master title style</a:t>
             </a:r>
-            <a:endParaRPr lang="en-US"/>
           </a:p>
         </p:txBody>
       </p:sp>
@@ -776,38 +785,37 @@
           <a:p>
             <a:pPr lvl="0"/>
             <a:r>
-              <a:rPr lang="en-US" smtClean="0"/>
+              <a:rPr lang="en-US"/>
               <a:t>Click to edit Master text styles</a:t>
             </a:r>
           </a:p>
           <a:p>
             <a:pPr lvl="1"/>
             <a:r>
-              <a:rPr lang="en-US" smtClean="0"/>
+              <a:rPr lang="en-US"/>
               <a:t>Second level</a:t>
             </a:r>
           </a:p>
           <a:p>
             <a:pPr lvl="2"/>
             <a:r>
-              <a:rPr lang="en-US" smtClean="0"/>
+              <a:rPr lang="en-US"/>
               <a:t>Third level</a:t>
             </a:r>
           </a:p>
           <a:p>
             <a:pPr lvl="3"/>
             <a:r>
-              <a:rPr lang="en-US" smtClean="0"/>
+              <a:rPr lang="en-US"/>
               <a:t>Fourth level</a:t>
             </a:r>
           </a:p>
           <a:p>
             <a:pPr lvl="4"/>
             <a:r>
-              <a:rPr lang="en-US" smtClean="0"/>
+              <a:rPr lang="en-US"/>
               <a:t>Fifth level</a:t>
             </a:r>
-            <a:endParaRPr lang="en-US"/>
           </a:p>
         </p:txBody>
       </p:sp>
@@ -828,7 +836,7 @@
           <a:p>
             <a:fld id="{5BCAD085-E8A6-8845-BD4E-CB4CCA059FC4}" type="datetimeFigureOut">
               <a:rPr lang="en-US" smtClean="0"/>
-              <a:t>1/27/13</a:t>
+              <a:t>9/28/2026</a:t>
             </a:fld>
             <a:endParaRPr lang="en-US"/>
           </a:p>
@@ -931,10 +939,9 @@
           </a:lstStyle>
           <a:p>
             <a:r>
-              <a:rPr lang="en-US" smtClean="0"/>
+              <a:rPr lang="en-US"/>
               <a:t>Click to edit Master title style</a:t>
             </a:r>
-            <a:endParaRPr lang="en-US"/>
           </a:p>
         </p:txBody>
       </p:sp>
@@ -1051,7 +1058,7 @@
           <a:p>
             <a:pPr lvl="0"/>
             <a:r>
-              <a:rPr lang="en-US" smtClean="0"/>
+              <a:rPr lang="en-US"/>
               <a:t>Click to edit Master text styles</a:t>
             </a:r>
           </a:p>
@@ -1074,7 +1081,7 @@
           <a:p>
             <a:fld id="{5BCAD085-E8A6-8845-BD4E-CB4CCA059FC4}" type="datetimeFigureOut">
               <a:rPr lang="en-US" smtClean="0"/>
-              <a:t>1/27/13</a:t>
+              <a:t>9/28/2026</a:t>
             </a:fld>
             <a:endParaRPr lang="en-US"/>
           </a:p>
@@ -1168,10 +1175,9 @@
           <a:lstStyle/>
           <a:p>
             <a:r>
-              <a:rPr lang="en-US" smtClean="0"/>
+              <a:rPr lang="en-US"/>
               <a:t>Click to edit Master title style</a:t>
             </a:r>
-            <a:endParaRPr lang="en-US"/>
           </a:p>
         </p:txBody>
       </p:sp>
@@ -1225,38 +1231,37 @@
           <a:p>
             <a:pPr lvl="0"/>
             <a:r>
-              <a:rPr lang="en-US" smtClean="0"/>
+              <a:rPr lang="en-US"/>
               <a:t>Click to edit Master text styles</a:t>
             </a:r>
           </a:p>
           <a:p>
             <a:pPr lvl="1"/>
             <a:r>
-              <a:rPr lang="en-US" smtClean="0"/>
+              <a:rPr lang="en-US"/>
               <a:t>Second level</a:t>
             </a:r>
           </a:p>
           <a:p>
             <a:pPr lvl="2"/>
             <a:r>
-              <a:rPr lang="en-US" smtClean="0"/>
+              <a:rPr lang="en-US"/>
               <a:t>Third level</a:t>
             </a:r>
           </a:p>
           <a:p>
             <a:pPr lvl="3"/>
             <a:r>
-              <a:rPr lang="en-US" smtClean="0"/>
+              <a:rPr lang="en-US"/>
               <a:t>Fourth level</a:t>
             </a:r>
           </a:p>
           <a:p>
             <a:pPr lvl="4"/>
             <a:r>
-              <a:rPr lang="en-US" smtClean="0"/>
+              <a:rPr lang="en-US"/>
               <a:t>Fifth level</a:t>
             </a:r>
-            <a:endParaRPr lang="en-US"/>
           </a:p>
         </p:txBody>
       </p:sp>
@@ -1310,38 +1315,37 @@
           <a:p>
             <a:pPr lvl="0"/>
             <a:r>
-              <a:rPr lang="en-US" smtClean="0"/>
+              <a:rPr lang="en-US"/>
               <a:t>Click to edit Master text styles</a:t>
             </a:r>
           </a:p>
           <a:p>
             <a:pPr lvl="1"/>
             <a:r>
-              <a:rPr lang="en-US" smtClean="0"/>
+              <a:rPr lang="en-US"/>
               <a:t>Second level</a:t>
             </a:r>
           </a:p>
           <a:p>
             <a:pPr lvl="2"/>
             <a:r>
-              <a:rPr lang="en-US" smtClean="0"/>
+              <a:rPr lang="en-US"/>
               <a:t>Third level</a:t>
             </a:r>
           </a:p>
           <a:p>
             <a:pPr lvl="3"/>
             <a:r>
-              <a:rPr lang="en-US" smtClean="0"/>
+              <a:rPr lang="en-US"/>
               <a:t>Fourth level</a:t>
             </a:r>
           </a:p>
           <a:p>
             <a:pPr lvl="4"/>
             <a:r>
-              <a:rPr lang="en-US" smtClean="0"/>
+              <a:rPr lang="en-US"/>
               <a:t>Fifth level</a:t>
             </a:r>
-            <a:endParaRPr lang="en-US"/>
           </a:p>
         </p:txBody>
       </p:sp>
@@ -1362,7 +1366,7 @@
           <a:p>
             <a:fld id="{5BCAD085-E8A6-8845-BD4E-CB4CCA059FC4}" type="datetimeFigureOut">
               <a:rPr lang="en-US" smtClean="0"/>
-              <a:t>1/27/13</a:t>
+              <a:t>9/28/2026</a:t>
             </a:fld>
             <a:endParaRPr lang="en-US"/>
           </a:p>
@@ -1460,10 +1464,9 @@
           </a:lstStyle>
           <a:p>
             <a:r>
-              <a:rPr lang="en-US" smtClean="0"/>
+              <a:rPr lang="en-US"/>
               <a:t>Click to edit Master title style</a:t>
             </a:r>
-            <a:endParaRPr lang="en-US"/>
           </a:p>
         </p:txBody>
       </p:sp>
@@ -1526,7 +1529,7 @@
           <a:p>
             <a:pPr lvl="0"/>
             <a:r>
-              <a:rPr lang="en-US" smtClean="0"/>
+              <a:rPr lang="en-US"/>
               <a:t>Click to edit Master text styles</a:t>
             </a:r>
           </a:p>
@@ -1582,38 +1585,37 @@
           <a:p>
             <a:pPr lvl="0"/>
             <a:r>
-              <a:rPr lang="en-US" smtClean="0"/>
+              <a:rPr lang="en-US"/>
               <a:t>Click to edit Master text styles</a:t>
             </a:r>
           </a:p>
           <a:p>
             <a:pPr lvl="1"/>
             <a:r>
-              <a:rPr lang="en-US" smtClean="0"/>
+              <a:rPr lang="en-US"/>
               <a:t>Second level</a:t>
             </a:r>
           </a:p>
           <a:p>
             <a:pPr lvl="2"/>
             <a:r>
-              <a:rPr lang="en-US" smtClean="0"/>
+              <a:rPr lang="en-US"/>
               <a:t>Third level</a:t>
             </a:r>
           </a:p>
           <a:p>
             <a:pPr lvl="3"/>
             <a:r>
-              <a:rPr lang="en-US" smtClean="0"/>
+              <a:rPr lang="en-US"/>
               <a:t>Fourth level</a:t>
             </a:r>
           </a:p>
           <a:p>
             <a:pPr lvl="4"/>
             <a:r>
-              <a:rPr lang="en-US" smtClean="0"/>
+              <a:rPr lang="en-US"/>
               <a:t>Fifth level</a:t>
             </a:r>
-            <a:endParaRPr lang="en-US"/>
           </a:p>
         </p:txBody>
       </p:sp>
@@ -1676,7 +1678,7 @@
           <a:p>
             <a:pPr lvl="0"/>
             <a:r>
-              <a:rPr lang="en-US" smtClean="0"/>
+              <a:rPr lang="en-US"/>
               <a:t>Click to edit Master text styles</a:t>
             </a:r>
           </a:p>
@@ -1732,38 +1734,37 @@
           <a:p>
             <a:pPr lvl="0"/>
             <a:r>
-              <a:rPr lang="en-US" smtClean="0"/>
+              <a:rPr lang="en-US"/>
               <a:t>Click to edit Master text styles</a:t>
             </a:r>
           </a:p>
           <a:p>
             <a:pPr lvl="1"/>
             <a:r>
-              <a:rPr lang="en-US" smtClean="0"/>
+              <a:rPr lang="en-US"/>
               <a:t>Second level</a:t>
             </a:r>
           </a:p>
           <a:p>
             <a:pPr lvl="2"/>
             <a:r>
-              <a:rPr lang="en-US" smtClean="0"/>
+              <a:rPr lang="en-US"/>
               <a:t>Third level</a:t>
             </a:r>
           </a:p>
           <a:p>
             <a:pPr lvl="3"/>
             <a:r>
-              <a:rPr lang="en-US" smtClean="0"/>
+              <a:rPr lang="en-US"/>
               <a:t>Fourth level</a:t>
             </a:r>
           </a:p>
           <a:p>
             <a:pPr lvl="4"/>
             <a:r>
-              <a:rPr lang="en-US" smtClean="0"/>
+              <a:rPr lang="en-US"/>
               <a:t>Fifth level</a:t>
             </a:r>
-            <a:endParaRPr lang="en-US"/>
           </a:p>
         </p:txBody>
       </p:sp>
@@ -1784,7 +1785,7 @@
           <a:p>
             <a:fld id="{5BCAD085-E8A6-8845-BD4E-CB4CCA059FC4}" type="datetimeFigureOut">
               <a:rPr lang="en-US" smtClean="0"/>
-              <a:t>1/27/13</a:t>
+              <a:t>9/28/2026</a:t>
             </a:fld>
             <a:endParaRPr lang="en-US"/>
           </a:p>
@@ -1878,10 +1879,9 @@
           <a:lstStyle/>
           <a:p>
             <a:r>
-              <a:rPr lang="en-US" smtClean="0"/>
+              <a:rPr lang="en-US"/>
               <a:t>Click to edit Master title style</a:t>
             </a:r>
-            <a:endParaRPr lang="en-US"/>
           </a:p>
         </p:txBody>
       </p:sp>
@@ -1902,7 +1902,7 @@
           <a:p>
             <a:fld id="{5BCAD085-E8A6-8845-BD4E-CB4CCA059FC4}" type="datetimeFigureOut">
               <a:rPr lang="en-US" smtClean="0"/>
-              <a:t>1/27/13</a:t>
+              <a:t>9/28/2026</a:t>
             </a:fld>
             <a:endParaRPr lang="en-US"/>
           </a:p>
@@ -1997,7 +1997,7 @@
           <a:p>
             <a:fld id="{5BCAD085-E8A6-8845-BD4E-CB4CCA059FC4}" type="datetimeFigureOut">
               <a:rPr lang="en-US" smtClean="0"/>
-              <a:t>1/27/13</a:t>
+              <a:t>9/28/2026</a:t>
             </a:fld>
             <a:endParaRPr lang="en-US"/>
           </a:p>
@@ -2100,10 +2100,9 @@
           </a:lstStyle>
           <a:p>
             <a:r>
-              <a:rPr lang="en-US" smtClean="0"/>
+              <a:rPr lang="en-US"/>
               <a:t>Click to edit Master title style</a:t>
             </a:r>
-            <a:endParaRPr lang="en-US"/>
           </a:p>
         </p:txBody>
       </p:sp>
@@ -2157,38 +2156,37 @@
           <a:p>
             <a:pPr lvl="0"/>
             <a:r>
-              <a:rPr lang="en-US" smtClean="0"/>
+              <a:rPr lang="en-US"/>
               <a:t>Click to edit Master text styles</a:t>
             </a:r>
           </a:p>
           <a:p>
             <a:pPr lvl="1"/>
             <a:r>
-              <a:rPr lang="en-US" smtClean="0"/>
+              <a:rPr lang="en-US"/>
               <a:t>Second level</a:t>
             </a:r>
           </a:p>
           <a:p>
             <a:pPr lvl="2"/>
             <a:r>
-              <a:rPr lang="en-US" smtClean="0"/>
+              <a:rPr lang="en-US"/>
               <a:t>Third level</a:t>
             </a:r>
           </a:p>
           <a:p>
             <a:pPr lvl="3"/>
             <a:r>
-              <a:rPr lang="en-US" smtClean="0"/>
+              <a:rPr lang="en-US"/>
               <a:t>Fourth level</a:t>
             </a:r>
           </a:p>
           <a:p>
             <a:pPr lvl="4"/>
             <a:r>
-              <a:rPr lang="en-US" smtClean="0"/>
+              <a:rPr lang="en-US"/>
               <a:t>Fifth level</a:t>
             </a:r>
-            <a:endParaRPr lang="en-US"/>
           </a:p>
         </p:txBody>
       </p:sp>
@@ -2251,7 +2249,7 @@
           <a:p>
             <a:pPr lvl="0"/>
             <a:r>
-              <a:rPr lang="en-US" smtClean="0"/>
+              <a:rPr lang="en-US"/>
               <a:t>Click to edit Master text styles</a:t>
             </a:r>
           </a:p>
@@ -2274,7 +2272,7 @@
           <a:p>
             <a:fld id="{5BCAD085-E8A6-8845-BD4E-CB4CCA059FC4}" type="datetimeFigureOut">
               <a:rPr lang="en-US" smtClean="0"/>
-              <a:t>1/27/13</a:t>
+              <a:t>9/28/2026</a:t>
             </a:fld>
             <a:endParaRPr lang="en-US"/>
           </a:p>
@@ -2377,10 +2375,9 @@
           </a:lstStyle>
           <a:p>
             <a:r>
-              <a:rPr lang="en-US" smtClean="0"/>
+              <a:rPr lang="en-US"/>
               <a:t>Click to edit Master title style</a:t>
             </a:r>
-            <a:endParaRPr lang="en-US"/>
           </a:p>
         </p:txBody>
       </p:sp>
@@ -2504,7 +2501,7 @@
           <a:p>
             <a:pPr lvl="0"/>
             <a:r>
-              <a:rPr lang="en-US" smtClean="0"/>
+              <a:rPr lang="en-US"/>
               <a:t>Click to edit Master text styles</a:t>
             </a:r>
           </a:p>
@@ -2527,7 +2524,7 @@
           <a:p>
             <a:fld id="{5BCAD085-E8A6-8845-BD4E-CB4CCA059FC4}" type="datetimeFigureOut">
               <a:rPr lang="en-US" smtClean="0"/>
-              <a:t>1/27/13</a:t>
+              <a:t>9/28/2026</a:t>
             </a:fld>
             <a:endParaRPr lang="en-US"/>
           </a:p>
@@ -2636,10 +2633,9 @@
           <a:lstStyle/>
           <a:p>
             <a:r>
-              <a:rPr lang="en-US" smtClean="0"/>
+              <a:rPr lang="en-US"/>
               <a:t>Click to edit Master title style</a:t>
             </a:r>
-            <a:endParaRPr lang="en-US"/>
           </a:p>
         </p:txBody>
       </p:sp>
@@ -2670,38 +2666,37 @@
           <a:p>
             <a:pPr lvl="0"/>
             <a:r>
-              <a:rPr lang="en-US" smtClean="0"/>
+              <a:rPr lang="en-US"/>
               <a:t>Click to edit Master text styles</a:t>
             </a:r>
           </a:p>
           <a:p>
             <a:pPr lvl="1"/>
             <a:r>
-              <a:rPr lang="en-US" smtClean="0"/>
+              <a:rPr lang="en-US"/>
               <a:t>Second level</a:t>
             </a:r>
           </a:p>
           <a:p>
             <a:pPr lvl="2"/>
             <a:r>
-              <a:rPr lang="en-US" smtClean="0"/>
+              <a:rPr lang="en-US"/>
               <a:t>Third level</a:t>
             </a:r>
           </a:p>
           <a:p>
             <a:pPr lvl="3"/>
             <a:r>
-              <a:rPr lang="en-US" smtClean="0"/>
+              <a:rPr lang="en-US"/>
               <a:t>Fourth level</a:t>
             </a:r>
           </a:p>
           <a:p>
             <a:pPr lvl="4"/>
             <a:r>
-              <a:rPr lang="en-US" smtClean="0"/>
+              <a:rPr lang="en-US"/>
               <a:t>Fifth level</a:t>
             </a:r>
-            <a:endParaRPr lang="en-US"/>
           </a:p>
         </p:txBody>
       </p:sp>
@@ -2740,7 +2735,7 @@
           <a:p>
             <a:fld id="{5BCAD085-E8A6-8845-BD4E-CB4CCA059FC4}" type="datetimeFigureOut">
               <a:rPr lang="en-US" smtClean="0"/>
-              <a:t>1/27/13</a:t>
+              <a:t>9/28/2026</a:t>
             </a:fld>
             <a:endParaRPr lang="en-US"/>
           </a:p>
@@ -3099,7 +3094,7 @@
 </file>
 
 <file path=ppt/slides/slide1.xml><?xml version="1.0" encoding="utf-8"?>
-<p:sld xmlns:a="http://schemas.openxmlformats.org/drawingml/2006/main" xmlns:p="http://schemas.openxmlformats.org/presentationml/2006/main" xmlns:r="http://schemas.openxmlformats.org/officeDocument/2006/relationships">
+<p:sld xmlns:a="http://schemas.openxmlformats.org/drawingml/2006/main" xmlns:r="http://schemas.openxmlformats.org/officeDocument/2006/relationships" xmlns:p="http://schemas.openxmlformats.org/presentationml/2006/main">
   <p:cSld>
     <p:spTree>
       <p:nvGrpSpPr>
@@ -3107,7 +3102,14 @@
         <p:cNvGrpSpPr/>
         <p:nvPr/>
       </p:nvGrpSpPr>
-      <p:grpSpPr/>
+      <p:grpSpPr>
+        <a:xfrm>
+          <a:off x="0" y="0"/>
+          <a:ext cx="0" cy="0"/>
+          <a:chOff x="0" y="0"/>
+          <a:chExt cx="0" cy="0"/>
+        </a:xfrm>
+      </p:grpSpPr>
       <p:pic>
         <p:nvPicPr>
           <p:cNvPr id="2" name="Picture 1" descr="logo-ituniversity.png"/>
@@ -3221,7 +3223,7 @@
           <a:noFill/>
         </p:spPr>
         <p:txBody>
-          <a:bodyPr wrap="square" anchor="t" lIns="0" rIns="0" tIns="0" bIns="0">
+          <a:bodyPr wrap="square" lIns="0" tIns="0" rIns="0" bIns="0" anchor="t">
             <a:spAutoFit/>
           </a:bodyPr>
           <a:lstStyle/>
@@ -3232,7 +3234,7 @@
               </a:spcAft>
             </a:pPr>
             <a:r>
-              <a:rPr b="0" sz="4400" i="1">
+              <a:rPr sz="4400" b="0" i="1">
                 <a:solidFill>
                   <a:srgbClr val="106D8E"/>
                 </a:solidFill>
@@ -3260,7 +3262,7 @@
           <a:noFill/>
         </p:spPr>
         <p:txBody>
-          <a:bodyPr wrap="square" anchor="t" lIns="0" rIns="0" tIns="0" bIns="0">
+          <a:bodyPr wrap="square" lIns="0" tIns="0" rIns="0" bIns="0" anchor="t">
             <a:spAutoFit/>
           </a:bodyPr>
           <a:lstStyle/>
@@ -3271,7 +3273,7 @@
               </a:spcAft>
             </a:pPr>
             <a:r>
-              <a:rPr b="0" sz="4400" i="1">
+              <a:rPr sz="4400" b="0" i="1">
                 <a:solidFill>
                   <a:srgbClr val="106D8E"/>
                 </a:solidFill>
@@ -3299,7 +3301,7 @@
           <a:noFill/>
         </p:spPr>
         <p:txBody>
-          <a:bodyPr wrap="square" anchor="t" lIns="0" rIns="0" tIns="0" bIns="0">
+          <a:bodyPr wrap="square" lIns="0" tIns="0" rIns="0" bIns="0" anchor="t">
             <a:spAutoFit/>
           </a:bodyPr>
           <a:lstStyle/>
@@ -3310,7 +3312,7 @@
               </a:spcAft>
             </a:pPr>
             <a:r>
-              <a:rPr b="0" sz="2200" i="0">
+              <a:rPr sz="2200" b="0" i="0">
                 <a:solidFill>
                   <a:srgbClr val="0B2E4F"/>
                 </a:solidFill>
@@ -3338,7 +3340,7 @@
           <a:noFill/>
         </p:spPr>
         <p:txBody>
-          <a:bodyPr wrap="square" anchor="t" lIns="0" rIns="0" tIns="0" bIns="0">
+          <a:bodyPr wrap="square" lIns="0" tIns="0" rIns="0" bIns="0" anchor="t">
             <a:spAutoFit/>
           </a:bodyPr>
           <a:lstStyle/>
@@ -3349,7 +3351,7 @@
               </a:spcAft>
             </a:pPr>
             <a:r>
-              <a:rPr b="0" sz="2000" i="1">
+              <a:rPr sz="2000" b="0" i="1">
                 <a:solidFill>
                   <a:srgbClr val="20303C"/>
                 </a:solidFill>
@@ -3377,7 +3379,7 @@
           <a:noFill/>
         </p:spPr>
         <p:txBody>
-          <a:bodyPr wrap="square" anchor="t" lIns="0" rIns="0" tIns="0" bIns="0">
+          <a:bodyPr wrap="square" lIns="0" tIns="0" rIns="0" bIns="0" anchor="t">
             <a:spAutoFit/>
           </a:bodyPr>
           <a:lstStyle/>
@@ -3388,7 +3390,7 @@
               </a:spcAft>
             </a:pPr>
             <a:r>
-              <a:rPr b="0" sz="2000" i="0">
+              <a:rPr sz="2000" b="0" i="0">
                 <a:solidFill>
                   <a:srgbClr val="20303C"/>
                 </a:solidFill>
@@ -3397,7 +3399,7 @@
               <a:t>Présenté par : </a:t>
             </a:r>
             <a:r>
-              <a:rPr b="1" sz="2000" i="0">
+              <a:rPr sz="2000" b="1" i="0">
                 <a:solidFill>
                   <a:srgbClr val="20303C"/>
                 </a:solidFill>
@@ -3425,7 +3427,7 @@
           <a:noFill/>
         </p:spPr>
         <p:txBody>
-          <a:bodyPr wrap="square" anchor="t" lIns="0" rIns="0" tIns="0" bIns="0">
+          <a:bodyPr wrap="square" lIns="0" tIns="0" rIns="0" bIns="0" anchor="t">
             <a:spAutoFit/>
           </a:bodyPr>
           <a:lstStyle/>
@@ -3436,7 +3438,7 @@
               </a:spcAft>
             </a:pPr>
             <a:r>
-              <a:rPr b="0" sz="1500" i="0">
+              <a:rPr sz="1500" b="0" i="0">
                 <a:solidFill>
                   <a:srgbClr val="5A6B79"/>
                 </a:solidFill>
@@ -3452,7 +3454,7 @@
               </a:spcAft>
             </a:pPr>
             <a:r>
-              <a:rPr b="0" sz="1500" i="0">
+              <a:rPr sz="1500" b="0" i="0">
                 <a:solidFill>
                   <a:srgbClr val="5A6B79"/>
                 </a:solidFill>
@@ -3472,7 +3474,7 @@
 </file>
 
 <file path=ppt/slides/slide10.xml><?xml version="1.0" encoding="utf-8"?>
-<p:sld xmlns:a="http://schemas.openxmlformats.org/drawingml/2006/main" xmlns:p="http://schemas.openxmlformats.org/presentationml/2006/main" xmlns:r="http://schemas.openxmlformats.org/officeDocument/2006/relationships">
+<p:sld xmlns:a="http://schemas.openxmlformats.org/drawingml/2006/main" xmlns:r="http://schemas.openxmlformats.org/officeDocument/2006/relationships" xmlns:p="http://schemas.openxmlformats.org/presentationml/2006/main">
   <p:cSld>
     <p:spTree>
       <p:nvGrpSpPr>
@@ -3480,7 +3482,14 @@
         <p:cNvGrpSpPr/>
         <p:nvPr/>
       </p:nvGrpSpPr>
-      <p:grpSpPr/>
+      <p:grpSpPr>
+        <a:xfrm>
+          <a:off x="0" y="0"/>
+          <a:ext cx="0" cy="0"/>
+          <a:chOff x="0" y="0"/>
+          <a:chExt cx="0" cy="0"/>
+        </a:xfrm>
+      </p:grpSpPr>
       <p:pic>
         <p:nvPicPr>
           <p:cNvPr id="2" name="Picture 1" descr="logo-ituniversity.png"/>
@@ -3629,7 +3638,7 @@
           <a:noFill/>
         </p:spPr>
         <p:txBody>
-          <a:bodyPr wrap="square" anchor="t" lIns="0" rIns="0" tIns="0" bIns="0">
+          <a:bodyPr wrap="square" lIns="0" tIns="0" rIns="0" bIns="0" anchor="t">
             <a:spAutoFit/>
           </a:bodyPr>
           <a:lstStyle/>
@@ -3640,7 +3649,7 @@
               </a:spcAft>
             </a:pPr>
             <a:r>
-              <a:rPr b="0" sz="3200" i="0">
+              <a:rPr sz="3200" b="0" i="0">
                 <a:solidFill>
                   <a:srgbClr val="106D8E"/>
                 </a:solidFill>
@@ -3660,7 +3669,7 @@
         <p:spPr>
           <a:xfrm>
             <a:off x="685800" y="1554480"/>
-            <a:ext cx="13258800" cy="457200"/>
+            <a:ext cx="13258800" cy="307777"/>
           </a:xfrm>
           <a:prstGeom prst="rect">
             <a:avLst/>
@@ -3668,7 +3677,7 @@
           <a:noFill/>
         </p:spPr>
         <p:txBody>
-          <a:bodyPr wrap="square" anchor="t" lIns="0" rIns="0" tIns="0" bIns="0">
+          <a:bodyPr wrap="square" lIns="0" tIns="0" rIns="0" bIns="0" anchor="t">
             <a:spAutoFit/>
           </a:bodyPr>
           <a:lstStyle/>
@@ -3679,13 +3688,13 @@
               </a:spcAft>
             </a:pPr>
             <a:r>
-              <a:rPr b="0" sz="2000" i="0">
+              <a:rPr sz="2000" b="0" i="0">
                 <a:solidFill>
                   <a:srgbClr val="5A6B79"/>
                 </a:solidFill>
                 <a:latin typeface="Calibri"/>
               </a:rPr>
-              <a:t>Les systèmes d'information en place</a:t>
+              <a:t>Quatre sources de données, aucun référentiel patient commun</a:t>
             </a:r>
           </a:p>
         </p:txBody>
@@ -3742,7 +3751,7 @@
           <a:noFill/>
         </p:spPr>
         <p:txBody>
-          <a:bodyPr wrap="square" anchor="t" lIns="0" rIns="0" tIns="0" bIns="0">
+          <a:bodyPr wrap="square" lIns="0" tIns="0" rIns="0" bIns="0" anchor="t">
             <a:spAutoFit/>
           </a:bodyPr>
           <a:lstStyle/>
@@ -3753,7 +3762,7 @@
               </a:spcAft>
             </a:pPr>
             <a:r>
-              <a:rPr b="0" sz="1100" i="0">
+              <a:rPr sz="1100" b="0" i="0">
                 <a:solidFill>
                   <a:srgbClr val="106D8E"/>
                 </a:solidFill>
@@ -3781,7 +3790,7 @@
           <a:noFill/>
         </p:spPr>
         <p:txBody>
-          <a:bodyPr wrap="square" anchor="t" lIns="0" rIns="0" tIns="0" bIns="0">
+          <a:bodyPr wrap="square" lIns="0" tIns="0" rIns="0" bIns="0" anchor="t">
             <a:spAutoFit/>
           </a:bodyPr>
           <a:lstStyle/>
@@ -3792,7 +3801,7 @@
               </a:spcAft>
             </a:pPr>
             <a:r>
-              <a:rPr b="0" sz="1100" i="0">
+              <a:rPr sz="1100" b="0" i="0">
                 <a:solidFill>
                   <a:srgbClr val="106D8E"/>
                 </a:solidFill>
@@ -3846,6 +3855,7 @@
           <a:lstStyle/>
           <a:p>
             <a:pPr algn="ctr"/>
+            <a:endParaRPr/>
           </a:p>
         </p:txBody>
       </p:sp>
@@ -3866,7 +3876,7 @@
           <a:noFill/>
         </p:spPr>
         <p:txBody>
-          <a:bodyPr wrap="square" anchor="t" lIns="0" rIns="0" tIns="0" bIns="0">
+          <a:bodyPr wrap="square" lIns="0" tIns="0" rIns="0" bIns="0" anchor="t">
             <a:spAutoFit/>
           </a:bodyPr>
           <a:lstStyle/>
@@ -3877,7 +3887,7 @@
               </a:spcAft>
             </a:pPr>
             <a:r>
-              <a:rPr b="1" sz="1900" i="0">
+              <a:rPr sz="1900" b="1" i="0">
                 <a:solidFill>
                   <a:srgbClr val="0B2E4F"/>
                 </a:solidFill>
@@ -3905,19 +3915,19 @@
           <a:noFill/>
         </p:spPr>
         <p:txBody>
-          <a:bodyPr wrap="square" anchor="t" lIns="0" rIns="0" tIns="0" bIns="0">
+          <a:bodyPr wrap="square" lIns="0" tIns="0" rIns="0" bIns="0" anchor="t">
             <a:spAutoFit/>
           </a:bodyPr>
           <a:lstStyle/>
           <a:p>
-            <a:pPr algn="l" marL="223520" indent="-223520">
+            <a:pPr marL="223520" indent="-223520" algn="l">
               <a:spcAft>
                 <a:spcPts val="400"/>
               </a:spcAft>
               <a:buChar char="•"/>
             </a:pPr>
             <a:r>
-              <a:rPr b="0" sz="1600" i="0">
+              <a:rPr sz="1600" b="0" i="0">
                 <a:solidFill>
                   <a:srgbClr val="20303C"/>
                 </a:solidFill>
@@ -3927,14 +3937,14 @@
             </a:r>
           </a:p>
           <a:p>
-            <a:pPr algn="l" marL="223520" indent="-223520">
+            <a:pPr marL="223520" indent="-223520" algn="l">
               <a:spcAft>
                 <a:spcPts val="400"/>
               </a:spcAft>
               <a:buChar char="•"/>
             </a:pPr>
             <a:r>
-              <a:rPr b="0" sz="1600" i="0">
+              <a:rPr sz="1600" b="0" i="0">
                 <a:solidFill>
                   <a:srgbClr val="20303C"/>
                 </a:solidFill>
@@ -3943,7 +3953,7 @@
               <a:t>PostgreSQL </a:t>
             </a:r>
             <a:r>
-              <a:rPr b="1" sz="1600" i="0">
+              <a:rPr sz="1600" b="1" i="0">
                 <a:solidFill>
                   <a:srgbClr val="20303C"/>
                 </a:solidFill>
@@ -3952,7 +3962,7 @@
               <a:t>distant</a:t>
             </a:r>
             <a:r>
-              <a:rPr b="0" sz="1600" i="0">
+              <a:rPr sz="1600" b="0" i="0">
                 <a:solidFill>
                   <a:srgbClr val="20303C"/>
                 </a:solidFill>
@@ -3962,14 +3972,14 @@
             </a:r>
           </a:p>
           <a:p>
-            <a:pPr algn="l" marL="223520" indent="-223520">
+            <a:pPr marL="223520" indent="-223520" algn="l">
               <a:spcAft>
                 <a:spcPts val="400"/>
               </a:spcAft>
               <a:buChar char="•"/>
             </a:pPr>
             <a:r>
-              <a:rPr b="0" sz="1600" i="0">
+              <a:rPr sz="1600" b="0" i="0">
                 <a:solidFill>
                   <a:srgbClr val="20303C"/>
                 </a:solidFill>
@@ -3978,7 +3988,7 @@
               <a:t>1 260 tables détectées, </a:t>
             </a:r>
             <a:r>
-              <a:rPr b="1" sz="1600" i="0">
+              <a:rPr sz="1600" b="1" i="0">
                 <a:solidFill>
                   <a:srgbClr val="20303C"/>
                 </a:solidFill>
@@ -3988,14 +3998,14 @@
             </a:r>
           </a:p>
           <a:p>
-            <a:pPr algn="l" marL="223520" indent="-223520">
+            <a:pPr marL="223520" indent="-223520" algn="l">
               <a:spcAft>
                 <a:spcPts val="400"/>
               </a:spcAft>
               <a:buChar char="•"/>
             </a:pPr>
             <a:r>
-              <a:rPr b="0" sz="1600" i="0">
+              <a:rPr sz="1600" b="0" i="0">
                 <a:solidFill>
                   <a:srgbClr val="20303C"/>
                 </a:solidFill>
@@ -4049,6 +4059,7 @@
           <a:lstStyle/>
           <a:p>
             <a:pPr algn="ctr"/>
+            <a:endParaRPr/>
           </a:p>
         </p:txBody>
       </p:sp>
@@ -4069,7 +4080,7 @@
           <a:noFill/>
         </p:spPr>
         <p:txBody>
-          <a:bodyPr wrap="square" anchor="t" lIns="0" rIns="0" tIns="0" bIns="0">
+          <a:bodyPr wrap="square" lIns="0" tIns="0" rIns="0" bIns="0" anchor="t">
             <a:spAutoFit/>
           </a:bodyPr>
           <a:lstStyle/>
@@ -4080,7 +4091,7 @@
               </a:spcAft>
             </a:pPr>
             <a:r>
-              <a:rPr b="1" sz="1900" i="0">
+              <a:rPr sz="1900" b="1" i="0">
                 <a:solidFill>
                   <a:srgbClr val="0B2E4F"/>
                 </a:solidFill>
@@ -4108,19 +4119,19 @@
           <a:noFill/>
         </p:spPr>
         <p:txBody>
-          <a:bodyPr wrap="square" anchor="t" lIns="0" rIns="0" tIns="0" bIns="0">
+          <a:bodyPr wrap="square" lIns="0" tIns="0" rIns="0" bIns="0" anchor="t">
             <a:spAutoFit/>
           </a:bodyPr>
           <a:lstStyle/>
           <a:p>
-            <a:pPr algn="l" marL="223520" indent="-223520">
+            <a:pPr marL="223520" indent="-223520" algn="l">
               <a:spcAft>
                 <a:spcPts val="400"/>
               </a:spcAft>
               <a:buChar char="•"/>
             </a:pPr>
             <a:r>
-              <a:rPr b="0" sz="1600" i="0">
+              <a:rPr sz="1600" b="0" i="0">
                 <a:solidFill>
                   <a:srgbClr val="20303C"/>
                 </a:solidFill>
@@ -4130,14 +4141,14 @@
             </a:r>
           </a:p>
           <a:p>
-            <a:pPr algn="l" marL="223520" indent="-223520">
+            <a:pPr marL="223520" indent="-223520" algn="l">
               <a:spcAft>
                 <a:spcPts val="400"/>
               </a:spcAft>
               <a:buChar char="•"/>
             </a:pPr>
             <a:r>
-              <a:rPr b="0" sz="1600" i="0">
+              <a:rPr sz="1600" b="0" i="0">
                 <a:solidFill>
                   <a:srgbClr val="20303C"/>
                 </a:solidFill>
@@ -4147,14 +4158,14 @@
             </a:r>
           </a:p>
           <a:p>
-            <a:pPr algn="l" marL="223520" indent="-223520">
+            <a:pPr marL="223520" indent="-223520" algn="l">
               <a:spcAft>
                 <a:spcPts val="400"/>
               </a:spcAft>
               <a:buChar char="•"/>
             </a:pPr>
             <a:r>
-              <a:rPr b="0" sz="1600" i="0">
+              <a:rPr sz="1600" b="0" i="0">
                 <a:solidFill>
                   <a:srgbClr val="20303C"/>
                 </a:solidFill>
@@ -4163,7 +4174,7 @@
               <a:t>9 tables, </a:t>
             </a:r>
             <a:r>
-              <a:rPr b="1" sz="1600" i="0">
+              <a:rPr sz="1600" b="1" i="0">
                 <a:solidFill>
                   <a:srgbClr val="20303C"/>
                 </a:solidFill>
@@ -4173,14 +4184,14 @@
             </a:r>
           </a:p>
           <a:p>
-            <a:pPr algn="l" marL="223520" indent="-223520">
+            <a:pPr marL="223520" indent="-223520" algn="l">
               <a:spcAft>
                 <a:spcPts val="400"/>
               </a:spcAft>
               <a:buChar char="•"/>
             </a:pPr>
             <a:r>
-              <a:rPr b="0" sz="1600" i="0">
+              <a:rPr sz="1600" b="0" i="0">
                 <a:solidFill>
                   <a:srgbClr val="20303C"/>
                 </a:solidFill>
@@ -4234,6 +4245,7 @@
           <a:lstStyle/>
           <a:p>
             <a:pPr algn="ctr"/>
+            <a:endParaRPr/>
           </a:p>
         </p:txBody>
       </p:sp>
@@ -4254,7 +4266,7 @@
           <a:noFill/>
         </p:spPr>
         <p:txBody>
-          <a:bodyPr wrap="square" anchor="t" lIns="0" rIns="0" tIns="0" bIns="0">
+          <a:bodyPr wrap="square" lIns="0" tIns="0" rIns="0" bIns="0" anchor="t">
             <a:spAutoFit/>
           </a:bodyPr>
           <a:lstStyle/>
@@ -4265,7 +4277,7 @@
               </a:spcAft>
             </a:pPr>
             <a:r>
-              <a:rPr b="1" sz="1900" i="0">
+              <a:rPr sz="1900" b="1" i="0">
                 <a:solidFill>
                   <a:srgbClr val="0B2E4F"/>
                 </a:solidFill>
@@ -4293,19 +4305,19 @@
           <a:noFill/>
         </p:spPr>
         <p:txBody>
-          <a:bodyPr wrap="square" anchor="t" lIns="0" rIns="0" tIns="0" bIns="0">
+          <a:bodyPr wrap="square" lIns="0" tIns="0" rIns="0" bIns="0" anchor="t">
             <a:spAutoFit/>
           </a:bodyPr>
           <a:lstStyle/>
           <a:p>
-            <a:pPr algn="l" marL="223520" indent="-223520">
+            <a:pPr marL="223520" indent="-223520" algn="l">
               <a:spcAft>
                 <a:spcPts val="400"/>
               </a:spcAft>
               <a:buChar char="•"/>
             </a:pPr>
             <a:r>
-              <a:rPr b="0" sz="1600" i="0">
+              <a:rPr sz="1600" b="0" i="0">
                 <a:solidFill>
                   <a:srgbClr val="20303C"/>
                 </a:solidFill>
@@ -4315,14 +4327,14 @@
             </a:r>
           </a:p>
           <a:p>
-            <a:pPr algn="l" marL="223520" indent="-223520">
+            <a:pPr marL="223520" indent="-223520" algn="l">
               <a:spcAft>
                 <a:spcPts val="400"/>
               </a:spcAft>
               <a:buChar char="•"/>
             </a:pPr>
             <a:r>
-              <a:rPr b="0" sz="1600" i="0">
+              <a:rPr sz="1600" b="0" i="0">
                 <a:solidFill>
                   <a:srgbClr val="20303C"/>
                 </a:solidFill>
@@ -4332,14 +4344,14 @@
             </a:r>
           </a:p>
           <a:p>
-            <a:pPr algn="l" marL="223520" indent="-223520">
+            <a:pPr marL="223520" indent="-223520" algn="l">
               <a:spcAft>
                 <a:spcPts val="400"/>
               </a:spcAft>
               <a:buChar char="•"/>
             </a:pPr>
             <a:r>
-              <a:rPr b="1" sz="1600" i="0">
+              <a:rPr sz="1600" b="1" i="0">
                 <a:solidFill>
                   <a:srgbClr val="20303C"/>
                 </a:solidFill>
@@ -4349,14 +4361,14 @@
             </a:r>
           </a:p>
           <a:p>
-            <a:pPr algn="l" marL="223520" indent="-223520">
+            <a:pPr marL="223520" indent="-223520" algn="l">
               <a:spcAft>
                 <a:spcPts val="400"/>
               </a:spcAft>
               <a:buChar char="•"/>
             </a:pPr>
             <a:r>
-              <a:rPr b="0" sz="1600" i="0">
+              <a:rPr sz="1600" b="0" i="0">
                 <a:solidFill>
                   <a:srgbClr val="20303C"/>
                 </a:solidFill>
@@ -4410,6 +4422,7 @@
           <a:lstStyle/>
           <a:p>
             <a:pPr algn="ctr"/>
+            <a:endParaRPr/>
           </a:p>
         </p:txBody>
       </p:sp>
@@ -4430,7 +4443,7 @@
           <a:noFill/>
         </p:spPr>
         <p:txBody>
-          <a:bodyPr wrap="square" anchor="t" lIns="0" rIns="0" tIns="0" bIns="0">
+          <a:bodyPr wrap="square" lIns="0" tIns="0" rIns="0" bIns="0" anchor="t">
             <a:spAutoFit/>
           </a:bodyPr>
           <a:lstStyle/>
@@ -4441,7 +4454,7 @@
               </a:spcAft>
             </a:pPr>
             <a:r>
-              <a:rPr b="1" sz="1900" i="0">
+              <a:rPr sz="1900" b="1" i="0">
                 <a:solidFill>
                   <a:srgbClr val="0B2E4F"/>
                 </a:solidFill>
@@ -4469,19 +4482,19 @@
           <a:noFill/>
         </p:spPr>
         <p:txBody>
-          <a:bodyPr wrap="square" anchor="t" lIns="0" rIns="0" tIns="0" bIns="0">
+          <a:bodyPr wrap="square" lIns="0" tIns="0" rIns="0" bIns="0" anchor="t">
             <a:spAutoFit/>
           </a:bodyPr>
           <a:lstStyle/>
           <a:p>
-            <a:pPr algn="l" marL="223520" indent="-223520">
+            <a:pPr marL="223520" indent="-223520" algn="l">
               <a:spcAft>
                 <a:spcPts val="400"/>
               </a:spcAft>
               <a:buChar char="•"/>
             </a:pPr>
             <a:r>
-              <a:rPr b="0" sz="1600" i="0">
+              <a:rPr sz="1600" b="0" i="0">
                 <a:solidFill>
                   <a:srgbClr val="20303C"/>
                 </a:solidFill>
@@ -4491,14 +4504,14 @@
             </a:r>
           </a:p>
           <a:p>
-            <a:pPr algn="l" marL="223520" indent="-223520">
+            <a:pPr marL="223520" indent="-223520" algn="l">
               <a:spcAft>
                 <a:spcPts val="400"/>
               </a:spcAft>
               <a:buChar char="•"/>
             </a:pPr>
             <a:r>
-              <a:rPr b="0" sz="1600" i="0">
+              <a:rPr sz="1600" b="0" i="0">
                 <a:solidFill>
                   <a:srgbClr val="20303C"/>
                 </a:solidFill>
@@ -4508,14 +4521,14 @@
             </a:r>
           </a:p>
           <a:p>
-            <a:pPr algn="l" marL="223520" indent="-223520">
+            <a:pPr marL="223520" indent="-223520" algn="l">
               <a:spcAft>
                 <a:spcPts val="400"/>
               </a:spcAft>
               <a:buChar char="•"/>
             </a:pPr>
             <a:r>
-              <a:rPr b="1" sz="1600" i="0">
+              <a:rPr sz="1600" b="1" i="0">
                 <a:solidFill>
                   <a:srgbClr val="20303C"/>
                 </a:solidFill>
@@ -4524,7 +4537,7 @@
               <a:t>76 / 76 / 62</a:t>
             </a:r>
             <a:r>
-              <a:rPr b="0" sz="1600" i="0">
+              <a:rPr sz="1600" b="0" i="0">
                 <a:solidFill>
                   <a:srgbClr val="20303C"/>
                 </a:solidFill>
@@ -4552,7 +4565,7 @@
           <a:noFill/>
         </p:spPr>
         <p:txBody>
-          <a:bodyPr wrap="square" anchor="t" lIns="0" rIns="0" tIns="0" bIns="0">
+          <a:bodyPr wrap="square" lIns="0" tIns="0" rIns="0" bIns="0" anchor="t">
             <a:spAutoFit/>
           </a:bodyPr>
           <a:lstStyle/>
@@ -4563,7 +4576,7 @@
               </a:spcAft>
             </a:pPr>
             <a:r>
-              <a:rPr b="0" sz="1600" i="0">
+              <a:rPr sz="1600" b="0" i="0">
                 <a:solidFill>
                   <a:srgbClr val="5A6B79"/>
                 </a:solidFill>
@@ -4572,7 +4585,7 @@
               <a:t>Chaque logiciel est </a:t>
             </a:r>
             <a:r>
-              <a:rPr b="1" sz="1600" i="0">
+              <a:rPr sz="1600" b="1" i="0">
                 <a:solidFill>
                   <a:srgbClr val="5A6B79"/>
                 </a:solidFill>
@@ -4581,7 +4594,7 @@
               <a:t>complet dans son périmètre</a:t>
             </a:r>
             <a:r>
-              <a:rPr b="0" sz="1600" i="0">
+              <a:rPr sz="1600" b="0" i="0">
                 <a:solidFill>
                   <a:srgbClr val="5A6B79"/>
                 </a:solidFill>
@@ -4593,6 +4606,11 @@
         </p:txBody>
       </p:sp>
     </p:spTree>
+    <p:extLst>
+      <p:ext uri="{BB962C8B-B14F-4D97-AF65-F5344CB8AC3E}">
+        <p14:creationId xmlns:p14="http://schemas.microsoft.com/office/powerpoint/2010/main" val="3255553717"/>
+      </p:ext>
+    </p:extLst>
   </p:cSld>
   <p:clrMapOvr>
     <a:masterClrMapping/>
@@ -4601,7 +4619,7 @@
 </file>
 
 <file path=ppt/slides/slide11.xml><?xml version="1.0" encoding="utf-8"?>
-<p:sld xmlns:a="http://schemas.openxmlformats.org/drawingml/2006/main" xmlns:p="http://schemas.openxmlformats.org/presentationml/2006/main" xmlns:r="http://schemas.openxmlformats.org/officeDocument/2006/relationships">
+<p:sld xmlns:a="http://schemas.openxmlformats.org/drawingml/2006/main" xmlns:r="http://schemas.openxmlformats.org/officeDocument/2006/relationships" xmlns:p="http://schemas.openxmlformats.org/presentationml/2006/main">
   <p:cSld>
     <p:spTree>
       <p:nvGrpSpPr>
@@ -4609,7 +4627,14 @@
         <p:cNvGrpSpPr/>
         <p:nvPr/>
       </p:nvGrpSpPr>
-      <p:grpSpPr/>
+      <p:grpSpPr>
+        <a:xfrm>
+          <a:off x="0" y="0"/>
+          <a:ext cx="0" cy="0"/>
+          <a:chOff x="0" y="0"/>
+          <a:chExt cx="0" cy="0"/>
+        </a:xfrm>
+      </p:grpSpPr>
       <p:pic>
         <p:nvPicPr>
           <p:cNvPr id="2" name="Picture 1" descr="logo-ituniversity.png"/>
@@ -4758,7 +4783,7 @@
           <a:noFill/>
         </p:spPr>
         <p:txBody>
-          <a:bodyPr wrap="square" anchor="t" lIns="0" rIns="0" tIns="0" bIns="0">
+          <a:bodyPr wrap="square" lIns="0" tIns="0" rIns="0" bIns="0" anchor="t">
             <a:spAutoFit/>
           </a:bodyPr>
           <a:lstStyle/>
@@ -4769,7 +4794,7 @@
               </a:spcAft>
             </a:pPr>
             <a:r>
-              <a:rPr b="0" sz="3200" i="0">
+              <a:rPr sz="3200" b="0" i="0">
                 <a:solidFill>
                   <a:srgbClr val="106D8E"/>
                 </a:solidFill>
@@ -4789,7 +4814,7 @@
         <p:spPr>
           <a:xfrm>
             <a:off x="685800" y="1554480"/>
-            <a:ext cx="13258800" cy="457200"/>
+            <a:ext cx="13258800" cy="307777"/>
           </a:xfrm>
           <a:prstGeom prst="rect">
             <a:avLst/>
@@ -4797,7 +4822,7 @@
           <a:noFill/>
         </p:spPr>
         <p:txBody>
-          <a:bodyPr wrap="square" anchor="t" lIns="0" rIns="0" tIns="0" bIns="0">
+          <a:bodyPr wrap="square" lIns="0" tIns="0" rIns="0" bIns="0" anchor="t">
             <a:spAutoFit/>
           </a:bodyPr>
           <a:lstStyle/>
@@ -4808,13 +4833,13 @@
               </a:spcAft>
             </a:pPr>
             <a:r>
-              <a:rPr b="0" sz="2000" i="0">
+              <a:rPr sz="2000" b="0" i="0">
                 <a:solidFill>
                   <a:srgbClr val="5A6B79"/>
                 </a:solidFill>
                 <a:latin typeface="Calibri"/>
               </a:rPr>
-              <a:t>Points forts</a:t>
+              <a:t>Chaque base est intègre ; il manque le pont entre elles</a:t>
             </a:r>
           </a:p>
         </p:txBody>
@@ -4871,7 +4896,7 @@
           <a:noFill/>
         </p:spPr>
         <p:txBody>
-          <a:bodyPr wrap="square" anchor="t" lIns="0" rIns="0" tIns="0" bIns="0">
+          <a:bodyPr wrap="square" lIns="0" tIns="0" rIns="0" bIns="0" anchor="t">
             <a:spAutoFit/>
           </a:bodyPr>
           <a:lstStyle/>
@@ -4882,7 +4907,7 @@
               </a:spcAft>
             </a:pPr>
             <a:r>
-              <a:rPr b="0" sz="1100" i="0">
+              <a:rPr sz="1100" b="0" i="0">
                 <a:solidFill>
                   <a:srgbClr val="106D8E"/>
                 </a:solidFill>
@@ -4910,7 +4935,7 @@
           <a:noFill/>
         </p:spPr>
         <p:txBody>
-          <a:bodyPr wrap="square" anchor="t" lIns="0" rIns="0" tIns="0" bIns="0">
+          <a:bodyPr wrap="square" lIns="0" tIns="0" rIns="0" bIns="0" anchor="t">
             <a:spAutoFit/>
           </a:bodyPr>
           <a:lstStyle/>
@@ -4921,7 +4946,7 @@
               </a:spcAft>
             </a:pPr>
             <a:r>
-              <a:rPr b="0" sz="1100" i="0">
+              <a:rPr sz="1100" b="0" i="0">
                 <a:solidFill>
                   <a:srgbClr val="106D8E"/>
                 </a:solidFill>
@@ -4975,6 +5000,7 @@
           <a:lstStyle/>
           <a:p>
             <a:pPr algn="ctr"/>
+            <a:endParaRPr/>
           </a:p>
         </p:txBody>
       </p:sp>
@@ -4995,7 +5021,7 @@
           <a:noFill/>
         </p:spPr>
         <p:txBody>
-          <a:bodyPr wrap="square" anchor="t" lIns="0" rIns="0" tIns="0" bIns="0">
+          <a:bodyPr wrap="square" lIns="0" tIns="0" rIns="0" bIns="0" anchor="t">
             <a:spAutoFit/>
           </a:bodyPr>
           <a:lstStyle/>
@@ -5006,7 +5032,7 @@
               </a:spcAft>
             </a:pPr>
             <a:r>
-              <a:rPr b="1" sz="4400" i="0">
+              <a:rPr sz="4400" b="1" i="0">
                 <a:solidFill>
                   <a:srgbClr val="106D8E"/>
                 </a:solidFill>
@@ -5034,7 +5060,7 @@
           <a:noFill/>
         </p:spPr>
         <p:txBody>
-          <a:bodyPr wrap="square" anchor="t" lIns="0" rIns="0" tIns="0" bIns="0">
+          <a:bodyPr wrap="square" lIns="0" tIns="0" rIns="0" bIns="0" anchor="t">
             <a:spAutoFit/>
           </a:bodyPr>
           <a:lstStyle/>
@@ -5045,7 +5071,7 @@
               </a:spcAft>
             </a:pPr>
             <a:r>
-              <a:rPr b="0" sz="1500" i="0">
+              <a:rPr sz="1500" b="0" i="0">
                 <a:solidFill>
                   <a:srgbClr val="20303C"/>
                 </a:solidFill>
@@ -5054,7 +5080,7 @@
               <a:t>jointure </a:t>
             </a:r>
             <a:r>
-              <a:rPr b="0" sz="1380" i="0">
+              <a:rPr sz="1380" b="0" i="0">
                 <a:solidFill>
                   <a:srgbClr val="20303C"/>
                 </a:solidFill>
@@ -5063,7 +5089,7 @@
               <a:t>hms_patient</a:t>
             </a:r>
             <a:r>
-              <a:rPr b="0" sz="1500" i="0">
+              <a:rPr sz="1500" b="0" i="0">
                 <a:solidFill>
                   <a:srgbClr val="20303C"/>
                 </a:solidFill>
@@ -5072,7 +5098,7 @@
               <a:t> ↔ </a:t>
             </a:r>
             <a:r>
-              <a:rPr b="0" sz="1380" i="0">
+              <a:rPr sz="1380" b="0" i="0">
                 <a:solidFill>
                   <a:srgbClr val="20303C"/>
                 </a:solidFill>
@@ -5081,7 +5107,7 @@
               <a:t>res_partner</a:t>
             </a:r>
             <a:r>
-              <a:rPr b="0" sz="1500" i="0">
+              <a:rPr sz="1500" b="0" i="0">
                 <a:solidFill>
                   <a:srgbClr val="20303C"/>
                 </a:solidFill>
@@ -5135,6 +5161,7 @@
           <a:lstStyle/>
           <a:p>
             <a:pPr algn="ctr"/>
+            <a:endParaRPr/>
           </a:p>
         </p:txBody>
       </p:sp>
@@ -5155,7 +5182,7 @@
           <a:noFill/>
         </p:spPr>
         <p:txBody>
-          <a:bodyPr wrap="square" anchor="t" lIns="0" rIns="0" tIns="0" bIns="0">
+          <a:bodyPr wrap="square" lIns="0" tIns="0" rIns="0" bIns="0" anchor="t">
             <a:spAutoFit/>
           </a:bodyPr>
           <a:lstStyle/>
@@ -5166,7 +5193,7 @@
               </a:spcAft>
             </a:pPr>
             <a:r>
-              <a:rPr b="1" sz="4400" i="0">
+              <a:rPr sz="4400" b="1" i="0">
                 <a:solidFill>
                   <a:srgbClr val="106D8E"/>
                 </a:solidFill>
@@ -5194,7 +5221,7 @@
           <a:noFill/>
         </p:spPr>
         <p:txBody>
-          <a:bodyPr wrap="square" anchor="t" lIns="0" rIns="0" tIns="0" bIns="0">
+          <a:bodyPr wrap="square" lIns="0" tIns="0" rIns="0" bIns="0" anchor="t">
             <a:spAutoFit/>
           </a:bodyPr>
           <a:lstStyle/>
@@ -5205,7 +5232,7 @@
               </a:spcAft>
             </a:pPr>
             <a:r>
-              <a:rPr b="0" sz="1500" i="0">
+              <a:rPr sz="1500" b="0" i="0">
                 <a:solidFill>
                   <a:srgbClr val="20303C"/>
                 </a:solidFill>
@@ -5259,6 +5286,7 @@
           <a:lstStyle/>
           <a:p>
             <a:pPr algn="ctr"/>
+            <a:endParaRPr/>
           </a:p>
         </p:txBody>
       </p:sp>
@@ -5279,7 +5307,7 @@
           <a:noFill/>
         </p:spPr>
         <p:txBody>
-          <a:bodyPr wrap="square" anchor="t" lIns="0" rIns="0" tIns="0" bIns="0">
+          <a:bodyPr wrap="square" lIns="0" tIns="0" rIns="0" bIns="0" anchor="t">
             <a:spAutoFit/>
           </a:bodyPr>
           <a:lstStyle/>
@@ -5290,7 +5318,7 @@
               </a:spcAft>
             </a:pPr>
             <a:r>
-              <a:rPr b="1" sz="4400" i="0">
+              <a:rPr sz="4400" b="1" i="0">
                 <a:solidFill>
                   <a:srgbClr val="106D8E"/>
                 </a:solidFill>
@@ -5318,7 +5346,7 @@
           <a:noFill/>
         </p:spPr>
         <p:txBody>
-          <a:bodyPr wrap="square" anchor="t" lIns="0" rIns="0" tIns="0" bIns="0">
+          <a:bodyPr wrap="square" lIns="0" tIns="0" rIns="0" bIns="0" anchor="t">
             <a:spAutoFit/>
           </a:bodyPr>
           <a:lstStyle/>
@@ -5329,7 +5357,7 @@
               </a:spcAft>
             </a:pPr>
             <a:r>
-              <a:rPr b="0" sz="1500" i="0">
+              <a:rPr sz="1500" b="0" i="0">
                 <a:solidFill>
                   <a:srgbClr val="20303C"/>
                 </a:solidFill>
@@ -5379,12 +5407,12 @@
           </a:fontRef>
         </p:style>
         <p:txBody>
-          <a:bodyPr rtlCol="0" anchor="ctr" wrap="square" lIns="274320" rIns="274320" tIns="274320" bIns="274320"/>
+          <a:bodyPr wrap="square" lIns="274320" tIns="274320" rIns="274320" bIns="274320" rtlCol="0" anchor="ctr"/>
           <a:lstStyle/>
           <a:p>
             <a:pPr algn="ctr"/>
             <a:r>
-              <a:rPr b="0" sz="1800" i="0">
+              <a:rPr sz="1800" b="0" i="0">
                 <a:solidFill>
                   <a:srgbClr val="0B2E4F"/>
                 </a:solidFill>
@@ -5393,7 +5421,7 @@
               <a:t>Chaque base est </a:t>
             </a:r>
             <a:r>
-              <a:rPr b="1" sz="1800" i="0">
+              <a:rPr sz="1800" b="1" i="0">
                 <a:solidFill>
                   <a:srgbClr val="0B2E4F"/>
                 </a:solidFill>
@@ -5402,7 +5430,7 @@
               <a:t>intègre avec elle-même</a:t>
             </a:r>
             <a:r>
-              <a:rPr b="0" sz="1800" i="0">
+              <a:rPr sz="1800" b="0" i="0">
                 <a:solidFill>
                   <a:srgbClr val="0B2E4F"/>
                 </a:solidFill>
@@ -5411,7 +5439,7 @@
               <a:t> : le défi n'est pas la qualité d'une base, c'est l'</a:t>
             </a:r>
             <a:r>
-              <a:rPr b="1" sz="1800" i="0">
+              <a:rPr sz="1800" b="1" i="0">
                 <a:solidFill>
                   <a:srgbClr val="0B2E4F"/>
                 </a:solidFill>
@@ -5420,7 +5448,7 @@
               <a:t>absence de pont entre elles</a:t>
             </a:r>
             <a:r>
-              <a:rPr b="0" sz="1800" i="0">
+              <a:rPr sz="1800" b="0" i="0">
                 <a:solidFill>
                   <a:srgbClr val="0B2E4F"/>
                 </a:solidFill>
@@ -5432,6 +5460,11 @@
         </p:txBody>
       </p:sp>
     </p:spTree>
+    <p:extLst>
+      <p:ext uri="{BB962C8B-B14F-4D97-AF65-F5344CB8AC3E}">
+        <p14:creationId xmlns:p14="http://schemas.microsoft.com/office/powerpoint/2010/main" val="2018590410"/>
+      </p:ext>
+    </p:extLst>
   </p:cSld>
   <p:clrMapOvr>
     <a:masterClrMapping/>
@@ -5440,7 +5473,7 @@
 </file>
 
 <file path=ppt/slides/slide12.xml><?xml version="1.0" encoding="utf-8"?>
-<p:sld xmlns:a="http://schemas.openxmlformats.org/drawingml/2006/main" xmlns:p="http://schemas.openxmlformats.org/presentationml/2006/main" xmlns:r="http://schemas.openxmlformats.org/officeDocument/2006/relationships">
+<p:sld xmlns:a="http://schemas.openxmlformats.org/drawingml/2006/main" xmlns:r="http://schemas.openxmlformats.org/officeDocument/2006/relationships" xmlns:p="http://schemas.openxmlformats.org/presentationml/2006/main">
   <p:cSld>
     <p:spTree>
       <p:nvGrpSpPr>
@@ -5448,7 +5481,14 @@
         <p:cNvGrpSpPr/>
         <p:nvPr/>
       </p:nvGrpSpPr>
-      <p:grpSpPr/>
+      <p:grpSpPr>
+        <a:xfrm>
+          <a:off x="0" y="0"/>
+          <a:ext cx="0" cy="0"/>
+          <a:chOff x="0" y="0"/>
+          <a:chExt cx="0" cy="0"/>
+        </a:xfrm>
+      </p:grpSpPr>
       <p:pic>
         <p:nvPicPr>
           <p:cNvPr id="2" name="Picture 1" descr="logo-ituniversity.png"/>
@@ -5597,7 +5637,7 @@
           <a:noFill/>
         </p:spPr>
         <p:txBody>
-          <a:bodyPr wrap="square" anchor="t" lIns="0" rIns="0" tIns="0" bIns="0">
+          <a:bodyPr wrap="square" lIns="0" tIns="0" rIns="0" bIns="0" anchor="t">
             <a:spAutoFit/>
           </a:bodyPr>
           <a:lstStyle/>
@@ -5608,7 +5648,7 @@
               </a:spcAft>
             </a:pPr>
             <a:r>
-              <a:rPr b="0" sz="3200" i="0">
+              <a:rPr sz="3200" b="0" i="0">
                 <a:solidFill>
                   <a:srgbClr val="106D8E"/>
                 </a:solidFill>
@@ -5628,7 +5668,7 @@
         <p:spPr>
           <a:xfrm>
             <a:off x="685800" y="1554480"/>
-            <a:ext cx="13258800" cy="457200"/>
+            <a:ext cx="13258800" cy="307777"/>
           </a:xfrm>
           <a:prstGeom prst="rect">
             <a:avLst/>
@@ -5636,7 +5676,7 @@
           <a:noFill/>
         </p:spPr>
         <p:txBody>
-          <a:bodyPr wrap="square" anchor="t" lIns="0" rIns="0" tIns="0" bIns="0">
+          <a:bodyPr wrap="square" lIns="0" tIns="0" rIns="0" bIns="0" anchor="t">
             <a:spAutoFit/>
           </a:bodyPr>
           <a:lstStyle/>
@@ -5647,13 +5687,13 @@
               </a:spcAft>
             </a:pPr>
             <a:r>
-              <a:rPr b="0" sz="2000" i="0">
+              <a:rPr sz="2000" b="0" i="0">
                 <a:solidFill>
                   <a:srgbClr val="5A6B79"/>
                 </a:solidFill>
                 <a:latin typeface="Calibri"/>
               </a:rPr>
-              <a:t>Limitations identifiées</a:t>
+              <a:t>Six manques empêchent de reconnaître un même patient d'un système à l'autre</a:t>
             </a:r>
           </a:p>
         </p:txBody>
@@ -5710,7 +5750,7 @@
           <a:noFill/>
         </p:spPr>
         <p:txBody>
-          <a:bodyPr wrap="square" anchor="t" lIns="0" rIns="0" tIns="0" bIns="0">
+          <a:bodyPr wrap="square" lIns="0" tIns="0" rIns="0" bIns="0" anchor="t">
             <a:spAutoFit/>
           </a:bodyPr>
           <a:lstStyle/>
@@ -5721,7 +5761,7 @@
               </a:spcAft>
             </a:pPr>
             <a:r>
-              <a:rPr b="0" sz="1100" i="0">
+              <a:rPr sz="1100" b="0" i="0">
                 <a:solidFill>
                   <a:srgbClr val="106D8E"/>
                 </a:solidFill>
@@ -5749,7 +5789,7 @@
           <a:noFill/>
         </p:spPr>
         <p:txBody>
-          <a:bodyPr wrap="square" anchor="t" lIns="0" rIns="0" tIns="0" bIns="0">
+          <a:bodyPr wrap="square" lIns="0" tIns="0" rIns="0" bIns="0" anchor="t">
             <a:spAutoFit/>
           </a:bodyPr>
           <a:lstStyle/>
@@ -5760,7 +5800,7 @@
               </a:spcAft>
             </a:pPr>
             <a:r>
-              <a:rPr b="0" sz="1100" i="0">
+              <a:rPr sz="1100" b="0" i="0">
                 <a:solidFill>
                   <a:srgbClr val="106D8E"/>
                 </a:solidFill>
@@ -5810,12 +5850,12 @@
           </a:fontRef>
         </p:style>
         <p:txBody>
-          <a:bodyPr rtlCol="0" anchor="ctr" wrap="square" lIns="109728" rIns="109728" tIns="109728" bIns="109728"/>
+          <a:bodyPr wrap="square" lIns="109728" tIns="109728" rIns="109728" bIns="109728" rtlCol="0" anchor="ctr"/>
           <a:lstStyle/>
           <a:p>
             <a:pPr algn="ctr"/>
             <a:r>
-              <a:rPr b="1" sz="1800" i="0">
+              <a:rPr sz="1800" b="1" i="0">
                 <a:solidFill>
                   <a:srgbClr val="0B2E4F"/>
                 </a:solidFill>
@@ -5865,12 +5905,12 @@
           </a:fontRef>
         </p:style>
         <p:txBody>
-          <a:bodyPr rtlCol="0" anchor="ctr" wrap="square" lIns="109728" rIns="109728" tIns="109728" bIns="109728"/>
+          <a:bodyPr wrap="square" lIns="109728" tIns="109728" rIns="109728" bIns="109728" rtlCol="0" anchor="ctr"/>
           <a:lstStyle/>
           <a:p>
             <a:pPr algn="ctr"/>
             <a:r>
-              <a:rPr b="1" sz="1800" i="0">
+              <a:rPr sz="1800" b="1" i="0">
                 <a:solidFill>
                   <a:srgbClr val="0B2E4F"/>
                 </a:solidFill>
@@ -5920,19 +5960,43 @@
           </a:fontRef>
         </p:style>
         <p:txBody>
-          <a:bodyPr rtlCol="0" anchor="ctr" wrap="square" lIns="109728" rIns="109728" tIns="109728" bIns="109728"/>
+          <a:bodyPr wrap="square" lIns="109728" tIns="109728" rIns="109728" bIns="109728" rtlCol="0" anchor="ctr"/>
           <a:lstStyle/>
           <a:p>
             <a:pPr algn="ctr"/>
             <a:r>
-              <a:rPr b="1" sz="1800" i="0">
+              <a:rPr sz="1800" b="1" i="0" dirty="0" err="1">
                 <a:solidFill>
                   <a:srgbClr val="0B2E4F"/>
                 </a:solidFill>
                 <a:latin typeface="Calibri"/>
               </a:rPr>
-              <a:t>Aucun rapprochement d'identité</a:t>
-            </a:r>
+              <a:t>Aucun</a:t>
+            </a:r>
+            <a:r>
+              <a:rPr sz="1800" b="1" i="0" dirty="0">
+                <a:solidFill>
+                  <a:srgbClr val="0B2E4F"/>
+                </a:solidFill>
+                <a:latin typeface="Calibri"/>
+              </a:rPr>
+              <a:t> rapprochement </a:t>
+            </a:r>
+            <a:r>
+              <a:rPr sz="1800" b="1" i="0" dirty="0" err="1">
+                <a:solidFill>
+                  <a:srgbClr val="0B2E4F"/>
+                </a:solidFill>
+                <a:latin typeface="Calibri"/>
+              </a:rPr>
+              <a:t>d'identité</a:t>
+            </a:r>
+            <a:endParaRPr sz="1800" b="1" i="0" dirty="0">
+              <a:solidFill>
+                <a:srgbClr val="0B2E4F"/>
+              </a:solidFill>
+              <a:latin typeface="Calibri"/>
+            </a:endParaRPr>
           </a:p>
         </p:txBody>
       </p:sp>
@@ -5975,12 +6039,12 @@
           </a:fontRef>
         </p:style>
         <p:txBody>
-          <a:bodyPr rtlCol="0" anchor="ctr" wrap="square" lIns="109728" rIns="109728" tIns="109728" bIns="109728"/>
+          <a:bodyPr wrap="square" lIns="109728" tIns="109728" rIns="109728" bIns="109728" rtlCol="0" anchor="ctr"/>
           <a:lstStyle/>
           <a:p>
             <a:pPr algn="ctr"/>
             <a:r>
-              <a:rPr b="1" sz="1800" i="0">
+              <a:rPr sz="1800" b="1" i="0">
                 <a:solidFill>
                   <a:srgbClr val="0B2E4F"/>
                 </a:solidFill>
@@ -6030,12 +6094,12 @@
           </a:fontRef>
         </p:style>
         <p:txBody>
-          <a:bodyPr rtlCol="0" anchor="ctr" wrap="square" lIns="109728" rIns="109728" tIns="109728" bIns="109728"/>
+          <a:bodyPr wrap="square" lIns="109728" tIns="109728" rIns="109728" bIns="109728" rtlCol="0" anchor="ctr"/>
           <a:lstStyle/>
           <a:p>
             <a:pPr algn="ctr"/>
             <a:r>
-              <a:rPr b="1" sz="1800" i="0">
+              <a:rPr sz="1800" b="1" i="0">
                 <a:solidFill>
                   <a:srgbClr val="0B2E4F"/>
                 </a:solidFill>
@@ -6085,12 +6149,12 @@
           </a:fontRef>
         </p:style>
         <p:txBody>
-          <a:bodyPr rtlCol="0" anchor="ctr" wrap="square" lIns="109728" rIns="109728" tIns="109728" bIns="109728"/>
+          <a:bodyPr wrap="square" lIns="109728" tIns="109728" rIns="109728" bIns="109728" rtlCol="0" anchor="ctr"/>
           <a:lstStyle/>
           <a:p>
             <a:pPr algn="ctr"/>
             <a:r>
-              <a:rPr b="1" sz="1800" i="0">
+              <a:rPr sz="1800" b="1" i="0">
                 <a:solidFill>
                   <a:srgbClr val="0B2E4F"/>
                 </a:solidFill>
@@ -6118,7 +6182,7 @@
           <a:noFill/>
         </p:spPr>
         <p:txBody>
-          <a:bodyPr wrap="square" anchor="t" lIns="0" rIns="0" tIns="0" bIns="0">
+          <a:bodyPr wrap="square" lIns="0" tIns="0" rIns="0" bIns="0" anchor="t">
             <a:spAutoFit/>
           </a:bodyPr>
           <a:lstStyle/>
@@ -6129,7 +6193,7 @@
               </a:spcAft>
             </a:pPr>
             <a:r>
-              <a:rPr b="0" sz="1600" i="1">
+              <a:rPr sz="1600" b="0" i="1">
                 <a:solidFill>
                   <a:srgbClr val="5A6B79"/>
                 </a:solidFill>
@@ -6138,7 +6202,7 @@
               <a:t>Mesure du problème : le PoC d'origine comptait </a:t>
             </a:r>
             <a:r>
-              <a:rPr b="1" sz="1600" i="1">
+              <a:rPr sz="1600" b="1" i="1">
                 <a:solidFill>
                   <a:srgbClr val="5A6B79"/>
                 </a:solidFill>
@@ -6147,7 +6211,7 @@
               <a:t>24 872 marqueurs de doublon</a:t>
             </a:r>
             <a:r>
-              <a:rPr b="0" sz="1600" i="1">
+              <a:rPr sz="1600" b="0" i="1">
                 <a:solidFill>
                   <a:srgbClr val="5A6B79"/>
                 </a:solidFill>
@@ -6159,6 +6223,11 @@
         </p:txBody>
       </p:sp>
     </p:spTree>
+    <p:extLst>
+      <p:ext uri="{BB962C8B-B14F-4D97-AF65-F5344CB8AC3E}">
+        <p14:creationId xmlns:p14="http://schemas.microsoft.com/office/powerpoint/2010/main" val="2006164079"/>
+      </p:ext>
+    </p:extLst>
   </p:cSld>
   <p:clrMapOvr>
     <a:masterClrMapping/>
@@ -6167,7 +6236,7 @@
 </file>
 
 <file path=ppt/slides/slide13.xml><?xml version="1.0" encoding="utf-8"?>
-<p:sld xmlns:a="http://schemas.openxmlformats.org/drawingml/2006/main" xmlns:p="http://schemas.openxmlformats.org/presentationml/2006/main" xmlns:r="http://schemas.openxmlformats.org/officeDocument/2006/relationships">
+<p:sld xmlns:a="http://schemas.openxmlformats.org/drawingml/2006/main" xmlns:r="http://schemas.openxmlformats.org/officeDocument/2006/relationships" xmlns:p="http://schemas.openxmlformats.org/presentationml/2006/main">
   <p:cSld>
     <p:spTree>
       <p:nvGrpSpPr>
@@ -6175,7 +6244,14 @@
         <p:cNvGrpSpPr/>
         <p:nvPr/>
       </p:nvGrpSpPr>
-      <p:grpSpPr/>
+      <p:grpSpPr>
+        <a:xfrm>
+          <a:off x="0" y="0"/>
+          <a:ext cx="0" cy="0"/>
+          <a:chOff x="0" y="0"/>
+          <a:chExt cx="0" cy="0"/>
+        </a:xfrm>
+      </p:grpSpPr>
       <p:pic>
         <p:nvPicPr>
           <p:cNvPr id="2" name="Picture 1" descr="logo-ituniversity.png"/>
@@ -6324,7 +6400,7 @@
           <a:noFill/>
         </p:spPr>
         <p:txBody>
-          <a:bodyPr wrap="square" anchor="t" lIns="0" rIns="0" tIns="0" bIns="0">
+          <a:bodyPr wrap="square" lIns="0" tIns="0" rIns="0" bIns="0" anchor="t">
             <a:spAutoFit/>
           </a:bodyPr>
           <a:lstStyle/>
@@ -6335,7 +6411,7 @@
               </a:spcAft>
             </a:pPr>
             <a:r>
-              <a:rPr b="0" sz="3200" i="0">
+              <a:rPr sz="3200" b="0" i="0">
                 <a:solidFill>
                   <a:srgbClr val="106D8E"/>
                 </a:solidFill>
@@ -6355,7 +6431,7 @@
         <p:spPr>
           <a:xfrm>
             <a:off x="685800" y="1554480"/>
-            <a:ext cx="13258800" cy="457200"/>
+            <a:ext cx="13258800" cy="307777"/>
           </a:xfrm>
           <a:prstGeom prst="rect">
             <a:avLst/>
@@ -6363,7 +6439,7 @@
           <a:noFill/>
         </p:spPr>
         <p:txBody>
-          <a:bodyPr wrap="square" anchor="t" lIns="0" rIns="0" tIns="0" bIns="0">
+          <a:bodyPr wrap="square" lIns="0" tIns="0" rIns="0" bIns="0" anchor="t">
             <a:spAutoFit/>
           </a:bodyPr>
           <a:lstStyle/>
@@ -6374,13 +6450,13 @@
               </a:spcAft>
             </a:pPr>
             <a:r>
-              <a:rPr b="0" sz="2000" i="0">
+              <a:rPr sz="2000" b="0" i="0">
                 <a:solidFill>
                   <a:srgbClr val="5A6B79"/>
                 </a:solidFill>
                 <a:latin typeface="Calibri"/>
               </a:rPr>
-              <a:t>Architecture du système — trois niveaux, une logique</a:t>
+              <a:t>Trois niveaux, du MVP au Big Data, portent le même moteur de déduplication</a:t>
             </a:r>
           </a:p>
         </p:txBody>
@@ -6437,7 +6513,7 @@
           <a:noFill/>
         </p:spPr>
         <p:txBody>
-          <a:bodyPr wrap="square" anchor="t" lIns="0" rIns="0" tIns="0" bIns="0">
+          <a:bodyPr wrap="square" lIns="0" tIns="0" rIns="0" bIns="0" anchor="t">
             <a:spAutoFit/>
           </a:bodyPr>
           <a:lstStyle/>
@@ -6448,7 +6524,7 @@
               </a:spcAft>
             </a:pPr>
             <a:r>
-              <a:rPr b="0" sz="1100" i="0">
+              <a:rPr sz="1100" b="0" i="0">
                 <a:solidFill>
                   <a:srgbClr val="106D8E"/>
                 </a:solidFill>
@@ -6476,7 +6552,7 @@
           <a:noFill/>
         </p:spPr>
         <p:txBody>
-          <a:bodyPr wrap="square" anchor="t" lIns="0" rIns="0" tIns="0" bIns="0">
+          <a:bodyPr wrap="square" lIns="0" tIns="0" rIns="0" bIns="0" anchor="t">
             <a:spAutoFit/>
           </a:bodyPr>
           <a:lstStyle/>
@@ -6487,7 +6563,7 @@
               </a:spcAft>
             </a:pPr>
             <a:r>
-              <a:rPr b="0" sz="1100" i="0">
+              <a:rPr sz="1100" b="0" i="0">
                 <a:solidFill>
                   <a:srgbClr val="106D8E"/>
                 </a:solidFill>
@@ -6506,7 +6582,7 @@
         </p:nvSpPr>
         <p:spPr>
           <a:xfrm>
-            <a:off x="685800" y="2267712"/>
+            <a:off x="685800" y="2286000"/>
             <a:ext cx="548640" cy="548640"/>
           </a:xfrm>
           <a:prstGeom prst="ellipse">
@@ -6535,12 +6611,12 @@
           </a:fontRef>
         </p:style>
         <p:txBody>
-          <a:bodyPr rtlCol="0" anchor="ctr" wrap="square" lIns="0" rIns="0" tIns="0" bIns="0"/>
+          <a:bodyPr wrap="square" lIns="0" tIns="0" rIns="0" bIns="0" rtlCol="0" anchor="ctr"/>
           <a:lstStyle/>
           <a:p>
             <a:pPr algn="ctr"/>
             <a:r>
-              <a:rPr b="1" sz="1700" i="0">
+              <a:rPr sz="1700" b="1" i="0">
                 <a:solidFill>
                   <a:srgbClr val="FFFFFF"/>
                 </a:solidFill>
@@ -6559,8 +6635,8 @@
         </p:nvSpPr>
         <p:spPr>
           <a:xfrm>
-            <a:off x="1417320" y="2194560"/>
-            <a:ext cx="5029200" cy="384048"/>
+            <a:off x="1371600" y="2235200"/>
+            <a:ext cx="4216400" cy="355600"/>
           </a:xfrm>
           <a:prstGeom prst="rect">
             <a:avLst/>
@@ -6568,7 +6644,7 @@
           <a:noFill/>
         </p:spPr>
         <p:txBody>
-          <a:bodyPr wrap="square" anchor="t" lIns="0" rIns="0" tIns="0" bIns="0">
+          <a:bodyPr wrap="square" lIns="0" tIns="0" rIns="0" bIns="0" anchor="t">
             <a:spAutoFit/>
           </a:bodyPr>
           <a:lstStyle/>
@@ -6579,7 +6655,7 @@
               </a:spcAft>
             </a:pPr>
             <a:r>
-              <a:rPr b="1" sz="1800" i="0">
+              <a:rPr sz="1800" b="1" i="0">
                 <a:solidFill>
                   <a:srgbClr val="0B2E4F"/>
                 </a:solidFill>
@@ -6598,8 +6674,8 @@
         </p:nvSpPr>
         <p:spPr>
           <a:xfrm>
-            <a:off x="1417320" y="2578608"/>
-            <a:ext cx="5029200" cy="411480"/>
+            <a:off x="1371600" y="2590800"/>
+            <a:ext cx="4216400" cy="558800"/>
           </a:xfrm>
           <a:prstGeom prst="rect">
             <a:avLst/>
@@ -6607,8 +6683,8 @@
           <a:noFill/>
         </p:spPr>
         <p:txBody>
-          <a:bodyPr wrap="square" anchor="t" lIns="0" rIns="0" tIns="0" bIns="0">
-            <a:spAutoFit/>
+          <a:bodyPr wrap="square" lIns="0" tIns="0" rIns="0" bIns="0" anchor="t" anchorCtr="0">
+            <a:noAutofit/>
           </a:bodyPr>
           <a:lstStyle/>
           <a:p>
@@ -6618,7 +6694,7 @@
               </a:spcAft>
             </a:pPr>
             <a:r>
-              <a:rPr b="0" sz="1400" i="0">
+              <a:rPr sz="1400" b="0" i="0">
                 <a:solidFill>
                   <a:srgbClr val="20303C"/>
                 </a:solidFill>
@@ -6637,7 +6713,7 @@
         </p:nvSpPr>
         <p:spPr>
           <a:xfrm>
-            <a:off x="685800" y="3200400"/>
+            <a:off x="685800" y="3352800"/>
             <a:ext cx="548640" cy="548640"/>
           </a:xfrm>
           <a:prstGeom prst="ellipse">
@@ -6666,12 +6742,12 @@
           </a:fontRef>
         </p:style>
         <p:txBody>
-          <a:bodyPr rtlCol="0" anchor="ctr" wrap="square" lIns="0" rIns="0" tIns="0" bIns="0"/>
+          <a:bodyPr wrap="square" lIns="0" tIns="0" rIns="0" bIns="0" rtlCol="0" anchor="ctr"/>
           <a:lstStyle/>
           <a:p>
             <a:pPr algn="ctr"/>
             <a:r>
-              <a:rPr b="1" sz="1700" i="0">
+              <a:rPr sz="1700" b="1" i="0">
                 <a:solidFill>
                   <a:srgbClr val="FFFFFF"/>
                 </a:solidFill>
@@ -6690,8 +6766,8 @@
         </p:nvSpPr>
         <p:spPr>
           <a:xfrm>
-            <a:off x="1417320" y="3127248"/>
-            <a:ext cx="5029200" cy="384048"/>
+            <a:off x="1371600" y="3302000"/>
+            <a:ext cx="4216400" cy="355600"/>
           </a:xfrm>
           <a:prstGeom prst="rect">
             <a:avLst/>
@@ -6699,7 +6775,7 @@
           <a:noFill/>
         </p:spPr>
         <p:txBody>
-          <a:bodyPr wrap="square" anchor="t" lIns="0" rIns="0" tIns="0" bIns="0">
+          <a:bodyPr wrap="square" lIns="0" tIns="0" rIns="0" bIns="0" anchor="t">
             <a:spAutoFit/>
           </a:bodyPr>
           <a:lstStyle/>
@@ -6710,22 +6786,13 @@
               </a:spcAft>
             </a:pPr>
             <a:r>
-              <a:rPr b="1" sz="1800" i="0">
+              <a:rPr sz="1800" b="1" i="0">
                 <a:solidFill>
                   <a:srgbClr val="0B2E4F"/>
                 </a:solidFill>
                 <a:latin typeface="Calibri"/>
               </a:rPr>
-              <a:t>Moteur </a:t>
-            </a:r>
-            <a:r>
-              <a:rPr b="1" sz="1656" i="0">
-                <a:solidFill>
-                  <a:srgbClr val="0B2E4F"/>
-                </a:solidFill>
-                <a:latin typeface="Consolas"/>
-              </a:rPr>
-              <a:t>engine/</a:t>
+              <a:t>Moteur de déduplication</a:t>
             </a:r>
           </a:p>
         </p:txBody>
@@ -6738,8 +6805,8 @@
         </p:nvSpPr>
         <p:spPr>
           <a:xfrm>
-            <a:off x="1417320" y="3511296"/>
-            <a:ext cx="5029200" cy="411480"/>
+            <a:off x="1371600" y="3657600"/>
+            <a:ext cx="4216400" cy="558800"/>
           </a:xfrm>
           <a:prstGeom prst="rect">
             <a:avLst/>
@@ -6747,8 +6814,8 @@
           <a:noFill/>
         </p:spPr>
         <p:txBody>
-          <a:bodyPr wrap="square" anchor="t" lIns="0" rIns="0" tIns="0" bIns="0">
-            <a:spAutoFit/>
+          <a:bodyPr wrap="square" lIns="0" tIns="0" rIns="0" bIns="0" anchor="t" anchorCtr="0">
+            <a:noAutofit/>
           </a:bodyPr>
           <a:lstStyle/>
           <a:p>
@@ -6758,13 +6825,13 @@
               </a:spcAft>
             </a:pPr>
             <a:r>
-              <a:rPr b="0" sz="1400" i="0">
+              <a:rPr sz="1400" b="0" i="0">
                 <a:solidFill>
                   <a:srgbClr val="20303C"/>
                 </a:solidFill>
                 <a:latin typeface="Calibri"/>
               </a:rPr>
-              <a:t>déduplication Pandas + Spark, parité stricte</a:t>
+              <a:t>Pandas et Spark, parité stricte entre les deux</a:t>
             </a:r>
           </a:p>
         </p:txBody>
@@ -6777,7 +6844,7 @@
         </p:nvSpPr>
         <p:spPr>
           <a:xfrm>
-            <a:off x="685800" y="4133087"/>
+            <a:off x="685800" y="4419600"/>
             <a:ext cx="548640" cy="548640"/>
           </a:xfrm>
           <a:prstGeom prst="ellipse">
@@ -6806,12 +6873,12 @@
           </a:fontRef>
         </p:style>
         <p:txBody>
-          <a:bodyPr rtlCol="0" anchor="ctr" wrap="square" lIns="0" rIns="0" tIns="0" bIns="0"/>
+          <a:bodyPr wrap="square" lIns="0" tIns="0" rIns="0" bIns="0" rtlCol="0" anchor="ctr"/>
           <a:lstStyle/>
           <a:p>
             <a:pPr algn="ctr"/>
             <a:r>
-              <a:rPr b="1" sz="1700" i="0">
+              <a:rPr sz="1700" b="1" i="0">
                 <a:solidFill>
                   <a:srgbClr val="FFFFFF"/>
                 </a:solidFill>
@@ -6830,8 +6897,8 @@
         </p:nvSpPr>
         <p:spPr>
           <a:xfrm>
-            <a:off x="1417320" y="4059935"/>
-            <a:ext cx="5029200" cy="384048"/>
+            <a:off x="1371600" y="4368800"/>
+            <a:ext cx="4216400" cy="355600"/>
           </a:xfrm>
           <a:prstGeom prst="rect">
             <a:avLst/>
@@ -6839,7 +6906,7 @@
           <a:noFill/>
         </p:spPr>
         <p:txBody>
-          <a:bodyPr wrap="square" anchor="t" lIns="0" rIns="0" tIns="0" bIns="0">
+          <a:bodyPr wrap="square" lIns="0" tIns="0" rIns="0" bIns="0" anchor="t">
             <a:spAutoFit/>
           </a:bodyPr>
           <a:lstStyle/>
@@ -6850,7 +6917,7 @@
               </a:spcAft>
             </a:pPr>
             <a:r>
-              <a:rPr b="1" sz="1800" i="0">
+              <a:rPr sz="1800" b="1" i="0">
                 <a:solidFill>
                   <a:srgbClr val="0B2E4F"/>
                 </a:solidFill>
@@ -6869,8 +6936,8 @@
         </p:nvSpPr>
         <p:spPr>
           <a:xfrm>
-            <a:off x="1417320" y="4443983"/>
-            <a:ext cx="5029200" cy="411480"/>
+            <a:off x="1371600" y="4724400"/>
+            <a:ext cx="4216400" cy="558800"/>
           </a:xfrm>
           <a:prstGeom prst="rect">
             <a:avLst/>
@@ -6878,8 +6945,8 @@
           <a:noFill/>
         </p:spPr>
         <p:txBody>
-          <a:bodyPr wrap="square" anchor="t" lIns="0" rIns="0" tIns="0" bIns="0">
-            <a:spAutoFit/>
+          <a:bodyPr wrap="square" lIns="0" tIns="0" rIns="0" bIns="0" anchor="t" anchorCtr="0">
+            <a:noAutofit/>
           </a:bodyPr>
           <a:lstStyle/>
           <a:p>
@@ -6889,7 +6956,7 @@
               </a:spcAft>
             </a:pPr>
             <a:r>
-              <a:rPr b="0" sz="1400" i="0">
+              <a:rPr sz="1400" b="0" i="0">
                 <a:solidFill>
                   <a:srgbClr val="20303C"/>
                 </a:solidFill>
@@ -6908,7 +6975,7 @@
         </p:nvSpPr>
         <p:spPr>
           <a:xfrm>
-            <a:off x="685800" y="5065776"/>
+            <a:off x="685800" y="5486400"/>
             <a:ext cx="548640" cy="548640"/>
           </a:xfrm>
           <a:prstGeom prst="ellipse">
@@ -6937,12 +7004,12 @@
           </a:fontRef>
         </p:style>
         <p:txBody>
-          <a:bodyPr rtlCol="0" anchor="ctr" wrap="square" lIns="0" rIns="0" tIns="0" bIns="0"/>
+          <a:bodyPr wrap="square" lIns="0" tIns="0" rIns="0" bIns="0" rtlCol="0" anchor="ctr"/>
           <a:lstStyle/>
           <a:p>
             <a:pPr algn="ctr"/>
             <a:r>
-              <a:rPr b="1" sz="1700" i="0">
+              <a:rPr sz="1700" b="1" i="0">
                 <a:solidFill>
                   <a:srgbClr val="FFFFFF"/>
                 </a:solidFill>
@@ -6961,8 +7028,8 @@
         </p:nvSpPr>
         <p:spPr>
           <a:xfrm>
-            <a:off x="1417320" y="4992624"/>
-            <a:ext cx="5029200" cy="384048"/>
+            <a:off x="1371600" y="5435600"/>
+            <a:ext cx="4216400" cy="355600"/>
           </a:xfrm>
           <a:prstGeom prst="rect">
             <a:avLst/>
@@ -6970,7 +7037,7 @@
           <a:noFill/>
         </p:spPr>
         <p:txBody>
-          <a:bodyPr wrap="square" anchor="t" lIns="0" rIns="0" tIns="0" bIns="0">
+          <a:bodyPr wrap="square" lIns="0" tIns="0" rIns="0" bIns="0" anchor="t">
             <a:spAutoFit/>
           </a:bodyPr>
           <a:lstStyle/>
@@ -6981,7 +7048,7 @@
               </a:spcAft>
             </a:pPr>
             <a:r>
-              <a:rPr b="1" sz="1800" i="0">
+              <a:rPr sz="1800" b="1" i="0">
                 <a:solidFill>
                   <a:srgbClr val="0B2E4F"/>
                 </a:solidFill>
@@ -7000,8 +7067,8 @@
         </p:nvSpPr>
         <p:spPr>
           <a:xfrm>
-            <a:off x="1417320" y="5376672"/>
-            <a:ext cx="5029200" cy="411480"/>
+            <a:off x="1371600" y="5791200"/>
+            <a:ext cx="4216400" cy="558800"/>
           </a:xfrm>
           <a:prstGeom prst="rect">
             <a:avLst/>
@@ -7009,8 +7076,8 @@
           <a:noFill/>
         </p:spPr>
         <p:txBody>
-          <a:bodyPr wrap="square" anchor="t" lIns="0" rIns="0" tIns="0" bIns="0">
-            <a:spAutoFit/>
+          <a:bodyPr wrap="square" lIns="0" tIns="0" rIns="0" bIns="0" anchor="t" anchorCtr="0">
+            <a:noAutofit/>
           </a:bodyPr>
           <a:lstStyle/>
           <a:p>
@@ -7020,7 +7087,7 @@
               </a:spcAft>
             </a:pPr>
             <a:r>
-              <a:rPr b="0" sz="1400" i="0">
+              <a:rPr sz="1400" b="0" i="0">
                 <a:solidFill>
                   <a:srgbClr val="20303C"/>
                 </a:solidFill>
@@ -7039,7 +7106,7 @@
         </p:nvSpPr>
         <p:spPr>
           <a:xfrm>
-            <a:off x="685800" y="5998464"/>
+            <a:off x="685800" y="6553200"/>
             <a:ext cx="548640" cy="548640"/>
           </a:xfrm>
           <a:prstGeom prst="ellipse">
@@ -7068,12 +7135,12 @@
           </a:fontRef>
         </p:style>
         <p:txBody>
-          <a:bodyPr rtlCol="0" anchor="ctr" wrap="square" lIns="0" rIns="0" tIns="0" bIns="0"/>
+          <a:bodyPr wrap="square" lIns="0" tIns="0" rIns="0" bIns="0" rtlCol="0" anchor="ctr"/>
           <a:lstStyle/>
           <a:p>
             <a:pPr algn="ctr"/>
             <a:r>
-              <a:rPr b="1" sz="1700" i="0">
+              <a:rPr sz="1700" b="1" i="0">
                 <a:solidFill>
                   <a:srgbClr val="FFFFFF"/>
                 </a:solidFill>
@@ -7092,8 +7159,8 @@
         </p:nvSpPr>
         <p:spPr>
           <a:xfrm>
-            <a:off x="1417320" y="5925312"/>
-            <a:ext cx="5029200" cy="384048"/>
+            <a:off x="1371600" y="6502400"/>
+            <a:ext cx="4216400" cy="355600"/>
           </a:xfrm>
           <a:prstGeom prst="rect">
             <a:avLst/>
@@ -7101,7 +7168,7 @@
           <a:noFill/>
         </p:spPr>
         <p:txBody>
-          <a:bodyPr wrap="square" anchor="t" lIns="0" rIns="0" tIns="0" bIns="0">
+          <a:bodyPr wrap="square" lIns="0" tIns="0" rIns="0" bIns="0" anchor="t">
             <a:spAutoFit/>
           </a:bodyPr>
           <a:lstStyle/>
@@ -7112,7 +7179,7 @@
               </a:spcAft>
             </a:pPr>
             <a:r>
-              <a:rPr b="1" sz="1800" i="0">
+              <a:rPr sz="1800" b="1" i="0">
                 <a:solidFill>
                   <a:srgbClr val="0B2E4F"/>
                 </a:solidFill>
@@ -7131,8 +7198,8 @@
         </p:nvSpPr>
         <p:spPr>
           <a:xfrm>
-            <a:off x="1417320" y="6309360"/>
-            <a:ext cx="5029200" cy="411480"/>
+            <a:off x="1371600" y="6858000"/>
+            <a:ext cx="4216400" cy="558800"/>
           </a:xfrm>
           <a:prstGeom prst="rect">
             <a:avLst/>
@@ -7140,8 +7207,8 @@
           <a:noFill/>
         </p:spPr>
         <p:txBody>
-          <a:bodyPr wrap="square" anchor="t" lIns="0" rIns="0" tIns="0" bIns="0">
-            <a:spAutoFit/>
+          <a:bodyPr wrap="square" lIns="0" tIns="0" rIns="0" bIns="0" anchor="t" anchorCtr="0">
+            <a:noAutofit/>
           </a:bodyPr>
           <a:lstStyle/>
           <a:p>
@@ -7151,7 +7218,7 @@
               </a:spcAft>
             </a:pPr>
             <a:r>
-              <a:rPr b="0" sz="1400" i="0">
+              <a:rPr sz="1400" b="0" i="0">
                 <a:solidFill>
                   <a:srgbClr val="20303C"/>
                 </a:solidFill>
@@ -7178,8 +7245,8 @@
         </p:blipFill>
         <p:spPr>
           <a:xfrm>
-            <a:off x="6675120" y="2125424"/>
-            <a:ext cx="7269480" cy="4984591"/>
+            <a:off x="5791200" y="2082800"/>
+            <a:ext cx="8153400" cy="5588000"/>
           </a:xfrm>
           <a:prstGeom prst="rect">
             <a:avLst/>
@@ -7187,6 +7254,11 @@
         </p:spPr>
       </p:pic>
     </p:spTree>
+    <p:extLst>
+      <p:ext uri="{BB962C8B-B14F-4D97-AF65-F5344CB8AC3E}">
+        <p14:creationId xmlns:p14="http://schemas.microsoft.com/office/powerpoint/2010/main" val="206192874"/>
+      </p:ext>
+    </p:extLst>
   </p:cSld>
   <p:clrMapOvr>
     <a:masterClrMapping/>
@@ -7195,7 +7267,7 @@
 </file>
 
 <file path=ppt/slides/slide14.xml><?xml version="1.0" encoding="utf-8"?>
-<p:sld xmlns:a="http://schemas.openxmlformats.org/drawingml/2006/main" xmlns:p="http://schemas.openxmlformats.org/presentationml/2006/main" xmlns:r="http://schemas.openxmlformats.org/officeDocument/2006/relationships">
+<p:sld xmlns:a="http://schemas.openxmlformats.org/drawingml/2006/main" xmlns:r="http://schemas.openxmlformats.org/officeDocument/2006/relationships" xmlns:p="http://schemas.openxmlformats.org/presentationml/2006/main">
   <p:cSld>
     <p:spTree>
       <p:nvGrpSpPr>
@@ -7203,7 +7275,14 @@
         <p:cNvGrpSpPr/>
         <p:nvPr/>
       </p:nvGrpSpPr>
-      <p:grpSpPr/>
+      <p:grpSpPr>
+        <a:xfrm>
+          <a:off x="0" y="0"/>
+          <a:ext cx="0" cy="0"/>
+          <a:chOff x="0" y="0"/>
+          <a:chExt cx="0" cy="0"/>
+        </a:xfrm>
+      </p:grpSpPr>
       <p:pic>
         <p:nvPicPr>
           <p:cNvPr id="2" name="Picture 1" descr="logo-ituniversity.png"/>
@@ -7352,7 +7431,7 @@
           <a:noFill/>
         </p:spPr>
         <p:txBody>
-          <a:bodyPr wrap="square" anchor="t" lIns="0" rIns="0" tIns="0" bIns="0">
+          <a:bodyPr wrap="square" lIns="0" tIns="0" rIns="0" bIns="0" anchor="t">
             <a:spAutoFit/>
           </a:bodyPr>
           <a:lstStyle/>
@@ -7363,7 +7442,7 @@
               </a:spcAft>
             </a:pPr>
             <a:r>
-              <a:rPr b="0" sz="3200" i="0">
+              <a:rPr sz="3200" b="0" i="0">
                 <a:solidFill>
                   <a:srgbClr val="106D8E"/>
                 </a:solidFill>
@@ -7426,7 +7505,7 @@
           <a:noFill/>
         </p:spPr>
         <p:txBody>
-          <a:bodyPr wrap="square" anchor="t" lIns="0" rIns="0" tIns="0" bIns="0">
+          <a:bodyPr wrap="square" lIns="0" tIns="0" rIns="0" bIns="0" anchor="t">
             <a:spAutoFit/>
           </a:bodyPr>
           <a:lstStyle/>
@@ -7437,7 +7516,7 @@
               </a:spcAft>
             </a:pPr>
             <a:r>
-              <a:rPr b="0" sz="1100" i="0">
+              <a:rPr sz="1100" b="0" i="0">
                 <a:solidFill>
                   <a:srgbClr val="106D8E"/>
                 </a:solidFill>
@@ -7465,7 +7544,7 @@
           <a:noFill/>
         </p:spPr>
         <p:txBody>
-          <a:bodyPr wrap="square" anchor="t" lIns="0" rIns="0" tIns="0" bIns="0">
+          <a:bodyPr wrap="square" lIns="0" tIns="0" rIns="0" bIns="0" anchor="t">
             <a:spAutoFit/>
           </a:bodyPr>
           <a:lstStyle/>
@@ -7476,7 +7555,7 @@
               </a:spcAft>
             </a:pPr>
             <a:r>
-              <a:rPr b="0" sz="1100" i="0">
+              <a:rPr sz="1100" b="0" i="0">
                 <a:solidFill>
                   <a:srgbClr val="106D8E"/>
                 </a:solidFill>
@@ -7495,8 +7574,8 @@
         </p:nvSpPr>
         <p:spPr>
           <a:xfrm>
-            <a:off x="685800" y="1783080"/>
-            <a:ext cx="4297680" cy="2423160"/>
+            <a:off x="685800" y="2235200"/>
+            <a:ext cx="2514600" cy="3251200"/>
           </a:xfrm>
           <a:prstGeom prst="roundRect">
             <a:avLst>
@@ -7530,6 +7609,7 @@
           <a:lstStyle/>
           <a:p>
             <a:pPr algn="ctr"/>
+            <a:endParaRPr/>
           </a:p>
         </p:txBody>
       </p:sp>
@@ -7541,8 +7621,8 @@
         </p:nvSpPr>
         <p:spPr>
           <a:xfrm>
-            <a:off x="914400" y="2002536"/>
-            <a:ext cx="3886200" cy="457200"/>
+            <a:off x="863600" y="3175000"/>
+            <a:ext cx="2159000" cy="711200"/>
           </a:xfrm>
           <a:prstGeom prst="rect">
             <a:avLst/>
@@ -7550,8 +7630,8 @@
           <a:noFill/>
         </p:spPr>
         <p:txBody>
-          <a:bodyPr wrap="square" anchor="t" lIns="0" rIns="0" tIns="0" bIns="0">
-            <a:spAutoFit/>
+          <a:bodyPr wrap="square" lIns="0" tIns="0" rIns="0" bIns="0" anchor="t" anchorCtr="0">
+            <a:noAutofit/>
           </a:bodyPr>
           <a:lstStyle/>
           <a:p>
@@ -7561,7 +7641,7 @@
               </a:spcAft>
             </a:pPr>
             <a:r>
-              <a:rPr b="1" sz="1900" i="0">
+              <a:rPr sz="1900" b="1" i="0">
                 <a:solidFill>
                   <a:srgbClr val="0B2E4F"/>
                 </a:solidFill>
@@ -7580,8 +7660,8 @@
         </p:nvSpPr>
         <p:spPr>
           <a:xfrm>
-            <a:off x="914400" y="2560320"/>
-            <a:ext cx="3886200" cy="1508760"/>
+            <a:off x="863600" y="3962400"/>
+            <a:ext cx="2159000" cy="1397000"/>
           </a:xfrm>
           <a:prstGeom prst="rect">
             <a:avLst/>
@@ -7589,8 +7669,8 @@
           <a:noFill/>
         </p:spPr>
         <p:txBody>
-          <a:bodyPr wrap="square" anchor="t" lIns="0" rIns="0" tIns="0" bIns="0">
-            <a:spAutoFit/>
+          <a:bodyPr wrap="square" lIns="0" tIns="0" rIns="0" bIns="0" anchor="t" anchorCtr="0">
+            <a:noAutofit/>
           </a:bodyPr>
           <a:lstStyle/>
           <a:p>
@@ -7600,7 +7680,7 @@
               </a:spcAft>
             </a:pPr>
             <a:r>
-              <a:rPr b="0" sz="1700" i="0">
+              <a:rPr sz="1700" b="0" i="0">
                 <a:solidFill>
                   <a:srgbClr val="20303C"/>
                 </a:solidFill>
@@ -7609,7 +7689,7 @@
               <a:t>Les sources arrivent </a:t>
             </a:r>
             <a:r>
-              <a:rPr b="1" sz="1700" i="0">
+              <a:rPr sz="1700" b="1" i="0">
                 <a:solidFill>
                   <a:srgbClr val="20303C"/>
                 </a:solidFill>
@@ -7618,7 +7698,7 @@
               <a:t>telles quelles</a:t>
             </a:r>
             <a:r>
-              <a:rPr b="0" sz="1700" i="0">
+              <a:rPr sz="1700" b="0" i="0">
                 <a:solidFill>
                   <a:srgbClr val="20303C"/>
                 </a:solidFill>
@@ -7637,8 +7717,8 @@
         </p:nvSpPr>
         <p:spPr>
           <a:xfrm>
-            <a:off x="5166360" y="1783080"/>
-            <a:ext cx="4297680" cy="2423160"/>
+            <a:off x="3371850" y="2235200"/>
+            <a:ext cx="2514600" cy="3251200"/>
           </a:xfrm>
           <a:prstGeom prst="roundRect">
             <a:avLst>
@@ -7672,6 +7752,7 @@
           <a:lstStyle/>
           <a:p>
             <a:pPr algn="ctr"/>
+            <a:endParaRPr/>
           </a:p>
         </p:txBody>
       </p:sp>
@@ -7683,8 +7764,8 @@
         </p:nvSpPr>
         <p:spPr>
           <a:xfrm>
-            <a:off x="5394960" y="2002536"/>
-            <a:ext cx="3886200" cy="457200"/>
+            <a:off x="3549650" y="3175000"/>
+            <a:ext cx="2159000" cy="711200"/>
           </a:xfrm>
           <a:prstGeom prst="rect">
             <a:avLst/>
@@ -7692,8 +7773,8 @@
           <a:noFill/>
         </p:spPr>
         <p:txBody>
-          <a:bodyPr wrap="square" anchor="t" lIns="0" rIns="0" tIns="0" bIns="0">
-            <a:spAutoFit/>
+          <a:bodyPr wrap="square" lIns="0" tIns="0" rIns="0" bIns="0" anchor="t" anchorCtr="0">
+            <a:noAutofit/>
           </a:bodyPr>
           <a:lstStyle/>
           <a:p>
@@ -7703,7 +7784,7 @@
               </a:spcAft>
             </a:pPr>
             <a:r>
-              <a:rPr b="1" sz="1900" i="0">
+              <a:rPr sz="1900" b="1" i="0">
                 <a:solidFill>
                   <a:srgbClr val="0B2E4F"/>
                 </a:solidFill>
@@ -7722,8 +7803,8 @@
         </p:nvSpPr>
         <p:spPr>
           <a:xfrm>
-            <a:off x="5394960" y="2560320"/>
-            <a:ext cx="3886200" cy="1508760"/>
+            <a:off x="3549650" y="3962400"/>
+            <a:ext cx="2159000" cy="1397000"/>
           </a:xfrm>
           <a:prstGeom prst="rect">
             <a:avLst/>
@@ -7731,8 +7812,8 @@
           <a:noFill/>
         </p:spPr>
         <p:txBody>
-          <a:bodyPr wrap="square" anchor="t" lIns="0" rIns="0" tIns="0" bIns="0">
-            <a:spAutoFit/>
+          <a:bodyPr wrap="square" lIns="0" tIns="0" rIns="0" bIns="0" anchor="t" anchorCtr="0">
+            <a:noAutofit/>
           </a:bodyPr>
           <a:lstStyle/>
           <a:p>
@@ -7742,7 +7823,7 @@
               </a:spcAft>
             </a:pPr>
             <a:r>
-              <a:rPr b="0" sz="1700" i="0">
+              <a:rPr sz="1700" b="0" i="0">
                 <a:solidFill>
                   <a:srgbClr val="20303C"/>
                 </a:solidFill>
@@ -7751,7 +7832,7 @@
               <a:t>Un champ → un format : genre </a:t>
             </a:r>
             <a:r>
-              <a:rPr b="0" sz="1564" i="0">
+              <a:rPr sz="1564" b="0" i="0">
                 <a:solidFill>
                   <a:srgbClr val="20303C"/>
                 </a:solidFill>
@@ -7760,7 +7841,7 @@
               <a:t>M/F</a:t>
             </a:r>
             <a:r>
-              <a:rPr b="0" sz="1700" i="0">
+              <a:rPr sz="1700" b="0" i="0">
                 <a:solidFill>
                   <a:srgbClr val="20303C"/>
                 </a:solidFill>
@@ -7779,8 +7860,8 @@
         </p:nvSpPr>
         <p:spPr>
           <a:xfrm>
-            <a:off x="9646920" y="1783080"/>
-            <a:ext cx="4297680" cy="2423160"/>
+            <a:off x="6057900" y="2235200"/>
+            <a:ext cx="2514600" cy="3251200"/>
           </a:xfrm>
           <a:prstGeom prst="roundRect">
             <a:avLst>
@@ -7814,6 +7895,7 @@
           <a:lstStyle/>
           <a:p>
             <a:pPr algn="ctr"/>
+            <a:endParaRPr/>
           </a:p>
         </p:txBody>
       </p:sp>
@@ -7825,8 +7907,8 @@
         </p:nvSpPr>
         <p:spPr>
           <a:xfrm>
-            <a:off x="9875520" y="2002536"/>
-            <a:ext cx="3886199" cy="457200"/>
+            <a:off x="6235700" y="3175000"/>
+            <a:ext cx="2159000" cy="711200"/>
           </a:xfrm>
           <a:prstGeom prst="rect">
             <a:avLst/>
@@ -7834,8 +7916,8 @@
           <a:noFill/>
         </p:spPr>
         <p:txBody>
-          <a:bodyPr wrap="square" anchor="t" lIns="0" rIns="0" tIns="0" bIns="0">
-            <a:spAutoFit/>
+          <a:bodyPr wrap="square" lIns="0" tIns="0" rIns="0" bIns="0" anchor="t" anchorCtr="0">
+            <a:noAutofit/>
           </a:bodyPr>
           <a:lstStyle/>
           <a:p>
@@ -7845,7 +7927,7 @@
               </a:spcAft>
             </a:pPr>
             <a:r>
-              <a:rPr b="1" sz="1900" i="0">
+              <a:rPr sz="1900" b="1" i="0">
                 <a:solidFill>
                   <a:srgbClr val="0B2E4F"/>
                 </a:solidFill>
@@ -7864,8 +7946,8 @@
         </p:nvSpPr>
         <p:spPr>
           <a:xfrm>
-            <a:off x="9875520" y="2560320"/>
-            <a:ext cx="3886200" cy="1508760"/>
+            <a:off x="6235700" y="3962400"/>
+            <a:ext cx="2159000" cy="1397000"/>
           </a:xfrm>
           <a:prstGeom prst="rect">
             <a:avLst/>
@@ -7873,8 +7955,8 @@
           <a:noFill/>
         </p:spPr>
         <p:txBody>
-          <a:bodyPr wrap="square" anchor="t" lIns="0" rIns="0" tIns="0" bIns="0">
-            <a:spAutoFit/>
+          <a:bodyPr wrap="square" lIns="0" tIns="0" rIns="0" bIns="0" anchor="t" anchorCtr="0">
+            <a:noAutofit/>
           </a:bodyPr>
           <a:lstStyle/>
           <a:p>
@@ -7884,7 +7966,7 @@
               </a:spcAft>
             </a:pPr>
             <a:r>
-              <a:rPr b="0" sz="1564" i="0">
+              <a:rPr sz="1564" b="0" i="0">
                 <a:solidFill>
                   <a:srgbClr val="20303C"/>
                 </a:solidFill>
@@ -7893,7 +7975,7 @@
               <a:t>master_patient_id</a:t>
             </a:r>
             <a:r>
-              <a:rPr b="0" sz="1700" i="0">
+              <a:rPr sz="1700" b="0" i="0">
                 <a:solidFill>
                   <a:srgbClr val="20303C"/>
                 </a:solidFill>
@@ -7912,8 +7994,8 @@
         </p:nvSpPr>
         <p:spPr>
           <a:xfrm>
-            <a:off x="2926080" y="4434840"/>
-            <a:ext cx="4297680" cy="2423160"/>
+            <a:off x="8743950" y="2235200"/>
+            <a:ext cx="2514600" cy="3251200"/>
           </a:xfrm>
           <a:prstGeom prst="roundRect">
             <a:avLst>
@@ -7947,6 +8029,7 @@
           <a:lstStyle/>
           <a:p>
             <a:pPr algn="ctr"/>
+            <a:endParaRPr/>
           </a:p>
         </p:txBody>
       </p:sp>
@@ -7958,8 +8041,8 @@
         </p:nvSpPr>
         <p:spPr>
           <a:xfrm>
-            <a:off x="3154680" y="4654296"/>
-            <a:ext cx="3886200" cy="457200"/>
+            <a:off x="8921750" y="3175000"/>
+            <a:ext cx="2159000" cy="711200"/>
           </a:xfrm>
           <a:prstGeom prst="rect">
             <a:avLst/>
@@ -7967,8 +8050,8 @@
           <a:noFill/>
         </p:spPr>
         <p:txBody>
-          <a:bodyPr wrap="square" anchor="t" lIns="0" rIns="0" tIns="0" bIns="0">
-            <a:spAutoFit/>
+          <a:bodyPr wrap="square" lIns="0" tIns="0" rIns="0" bIns="0" anchor="t" anchorCtr="0">
+            <a:noAutofit/>
           </a:bodyPr>
           <a:lstStyle/>
           <a:p>
@@ -7978,7 +8061,7 @@
               </a:spcAft>
             </a:pPr>
             <a:r>
-              <a:rPr b="1" sz="1900" i="0">
+              <a:rPr sz="1900" b="1" i="0">
                 <a:solidFill>
                   <a:srgbClr val="0B2E4F"/>
                 </a:solidFill>
@@ -7997,8 +8080,8 @@
         </p:nvSpPr>
         <p:spPr>
           <a:xfrm>
-            <a:off x="3154680" y="5212079"/>
-            <a:ext cx="3886200" cy="1508760"/>
+            <a:off x="8921750" y="3962400"/>
+            <a:ext cx="2159000" cy="1397000"/>
           </a:xfrm>
           <a:prstGeom prst="rect">
             <a:avLst/>
@@ -8006,8 +8089,8 @@
           <a:noFill/>
         </p:spPr>
         <p:txBody>
-          <a:bodyPr wrap="square" anchor="t" lIns="0" rIns="0" tIns="0" bIns="0">
-            <a:spAutoFit/>
+          <a:bodyPr wrap="square" lIns="0" tIns="0" rIns="0" bIns="0" anchor="t" anchorCtr="0">
+            <a:noAutofit/>
           </a:bodyPr>
           <a:lstStyle/>
           <a:p>
@@ -8017,7 +8100,7 @@
               </a:spcAft>
             </a:pPr>
             <a:r>
-              <a:rPr b="0" sz="1700" i="0">
+              <a:rPr sz="1700" b="0" i="0">
                 <a:solidFill>
                   <a:srgbClr val="20303C"/>
                 </a:solidFill>
@@ -8026,7 +8109,7 @@
               <a:t>Finalité obligatoire ; non consentie → </a:t>
             </a:r>
             <a:r>
-              <a:rPr b="1" sz="1700" i="0">
+              <a:rPr sz="1700" b="1" i="0">
                 <a:solidFill>
                   <a:srgbClr val="20303C"/>
                 </a:solidFill>
@@ -8035,7 +8118,7 @@
               <a:t>403</a:t>
             </a:r>
             <a:r>
-              <a:rPr b="0" sz="1700" i="0">
+              <a:rPr sz="1700" b="0" i="0">
                 <a:solidFill>
                   <a:srgbClr val="20303C"/>
                 </a:solidFill>
@@ -8054,8 +8137,8 @@
         </p:nvSpPr>
         <p:spPr>
           <a:xfrm>
-            <a:off x="7406640" y="4434840"/>
-            <a:ext cx="4297680" cy="2423160"/>
+            <a:off x="11430000" y="2235200"/>
+            <a:ext cx="2514600" cy="3251200"/>
           </a:xfrm>
           <a:prstGeom prst="roundRect">
             <a:avLst>
@@ -8089,6 +8172,7 @@
           <a:lstStyle/>
           <a:p>
             <a:pPr algn="ctr"/>
+            <a:endParaRPr/>
           </a:p>
         </p:txBody>
       </p:sp>
@@ -8100,8 +8184,8 @@
         </p:nvSpPr>
         <p:spPr>
           <a:xfrm>
-            <a:off x="7635240" y="4654296"/>
-            <a:ext cx="3886200" cy="457200"/>
+            <a:off x="11607800" y="3175000"/>
+            <a:ext cx="2159000" cy="711200"/>
           </a:xfrm>
           <a:prstGeom prst="rect">
             <a:avLst/>
@@ -8109,8 +8193,8 @@
           <a:noFill/>
         </p:spPr>
         <p:txBody>
-          <a:bodyPr wrap="square" anchor="t" lIns="0" rIns="0" tIns="0" bIns="0">
-            <a:spAutoFit/>
+          <a:bodyPr wrap="square" lIns="0" tIns="0" rIns="0" bIns="0" anchor="t" anchorCtr="0">
+            <a:noAutofit/>
           </a:bodyPr>
           <a:lstStyle/>
           <a:p>
@@ -8120,7 +8204,7 @@
               </a:spcAft>
             </a:pPr>
             <a:r>
-              <a:rPr b="1" sz="1900" i="0">
+              <a:rPr sz="1900" b="1" i="0">
                 <a:solidFill>
                   <a:srgbClr val="0B2E4F"/>
                 </a:solidFill>
@@ -8139,8 +8223,8 @@
         </p:nvSpPr>
         <p:spPr>
           <a:xfrm>
-            <a:off x="7635240" y="5212079"/>
-            <a:ext cx="3886200" cy="1508760"/>
+            <a:off x="11607800" y="3962400"/>
+            <a:ext cx="2159000" cy="1397000"/>
           </a:xfrm>
           <a:prstGeom prst="rect">
             <a:avLst/>
@@ -8148,8 +8232,8 @@
           <a:noFill/>
         </p:spPr>
         <p:txBody>
-          <a:bodyPr wrap="square" anchor="t" lIns="0" rIns="0" tIns="0" bIns="0">
-            <a:spAutoFit/>
+          <a:bodyPr wrap="square" lIns="0" tIns="0" rIns="0" bIns="0" anchor="t" anchorCtr="0">
+            <a:noAutofit/>
           </a:bodyPr>
           <a:lstStyle/>
           <a:p>
@@ -8159,7 +8243,7 @@
               </a:spcAft>
             </a:pPr>
             <a:r>
-              <a:rPr b="0" sz="1700" i="0">
+              <a:rPr sz="1700" b="0" i="0">
                 <a:solidFill>
                   <a:srgbClr val="20303C"/>
                 </a:solidFill>
@@ -8170,7 +8254,201 @@
           </a:p>
         </p:txBody>
       </p:sp>
+      <p:pic>
+        <p:nvPicPr>
+          <p:cNvPr id="26" name="Graphic 26" descr="Centralisation"/>
+          <p:cNvPicPr>
+            <a:picLocks noChangeAspect="1"/>
+          </p:cNvPicPr>
+          <p:nvPr/>
+        </p:nvPicPr>
+        <p:blipFill>
+          <a:blip>
+            <a:extLst>
+              <a:ext uri="{96DAC541-7B7A-43D3-8B79-37D633B846F1}">
+                <asvg:svgBlip xmlns:asvg="http://schemas.microsoft.com/office/drawing/2016/SVG/main" r:embed="rId6"/>
+              </a:ext>
+            </a:extLst>
+          </a:blip>
+          <a:stretch>
+            <a:fillRect/>
+          </a:stretch>
+        </p:blipFill>
+        <p:spPr>
+          <a:xfrm>
+            <a:off x="863600" y="2463800"/>
+            <a:ext cx="533400" cy="533400"/>
+          </a:xfrm>
+          <a:prstGeom prst="rect">
+            <a:avLst/>
+          </a:prstGeom>
+        </p:spPr>
+      </p:pic>
+      <p:pic>
+        <p:nvPicPr>
+          <p:cNvPr id="27" name="Graphic 27" descr="Normalisation"/>
+          <p:cNvPicPr>
+            <a:picLocks noChangeAspect="1"/>
+          </p:cNvPicPr>
+          <p:nvPr/>
+        </p:nvPicPr>
+        <p:blipFill>
+          <a:blip>
+            <a:extLst>
+              <a:ext uri="{96DAC541-7B7A-43D3-8B79-37D633B846F1}">
+                <asvg:svgBlip xmlns:asvg="http://schemas.microsoft.com/office/drawing/2016/SVG/main" r:embed="rId7"/>
+              </a:ext>
+            </a:extLst>
+          </a:blip>
+          <a:stretch>
+            <a:fillRect/>
+          </a:stretch>
+        </p:blipFill>
+        <p:spPr>
+          <a:xfrm>
+            <a:off x="3549650" y="2463800"/>
+            <a:ext cx="533400" cy="533400"/>
+          </a:xfrm>
+          <a:prstGeom prst="rect">
+            <a:avLst/>
+          </a:prstGeom>
+        </p:spPr>
+      </p:pic>
+      <p:pic>
+        <p:nvPicPr>
+          <p:cNvPr id="28" name="Graphic 28" descr="Déduplication explicable"/>
+          <p:cNvPicPr>
+            <a:picLocks noChangeAspect="1"/>
+          </p:cNvPicPr>
+          <p:nvPr/>
+        </p:nvPicPr>
+        <p:blipFill>
+          <a:blip>
+            <a:extLst>
+              <a:ext uri="{96DAC541-7B7A-43D3-8B79-37D633B846F1}">
+                <asvg:svgBlip xmlns:asvg="http://schemas.microsoft.com/office/drawing/2016/SVG/main" r:embed="rId8"/>
+              </a:ext>
+            </a:extLst>
+          </a:blip>
+          <a:stretch>
+            <a:fillRect/>
+          </a:stretch>
+        </p:blipFill>
+        <p:spPr>
+          <a:xfrm>
+            <a:off x="6235700" y="2463800"/>
+            <a:ext cx="533400" cy="533400"/>
+          </a:xfrm>
+          <a:prstGeom prst="rect">
+            <a:avLst/>
+          </a:prstGeom>
+        </p:spPr>
+      </p:pic>
+      <p:pic>
+        <p:nvPicPr>
+          <p:cNvPr id="29" name="Graphic 29" descr="Consentement par finalité"/>
+          <p:cNvPicPr>
+            <a:picLocks noChangeAspect="1"/>
+          </p:cNvPicPr>
+          <p:nvPr/>
+        </p:nvPicPr>
+        <p:blipFill>
+          <a:blip>
+            <a:extLst>
+              <a:ext uri="{96DAC541-7B7A-43D3-8B79-37D633B846F1}">
+                <asvg:svgBlip xmlns:asvg="http://schemas.microsoft.com/office/drawing/2016/SVG/main" r:embed="rId9"/>
+              </a:ext>
+            </a:extLst>
+          </a:blip>
+          <a:stretch>
+            <a:fillRect/>
+          </a:stretch>
+        </p:blipFill>
+        <p:spPr>
+          <a:xfrm>
+            <a:off x="8921750" y="2463800"/>
+            <a:ext cx="533400" cy="533400"/>
+          </a:xfrm>
+          <a:prstGeom prst="rect">
+            <a:avLst/>
+          </a:prstGeom>
+        </p:spPr>
+      </p:pic>
+      <p:pic>
+        <p:nvPicPr>
+          <p:cNvPr id="30" name="Graphic 30" descr="Pilotage du pipeline"/>
+          <p:cNvPicPr>
+            <a:picLocks noChangeAspect="1"/>
+          </p:cNvPicPr>
+          <p:nvPr/>
+        </p:nvPicPr>
+        <p:blipFill>
+          <a:blip>
+            <a:extLst>
+              <a:ext uri="{96DAC541-7B7A-43D3-8B79-37D633B846F1}">
+                <asvg:svgBlip xmlns:asvg="http://schemas.microsoft.com/office/drawing/2016/SVG/main" r:embed="rId10"/>
+              </a:ext>
+            </a:extLst>
+          </a:blip>
+          <a:stretch>
+            <a:fillRect/>
+          </a:stretch>
+        </p:blipFill>
+        <p:spPr>
+          <a:xfrm>
+            <a:off x="11607800" y="2463800"/>
+            <a:ext cx="533400" cy="533400"/>
+          </a:xfrm>
+          <a:prstGeom prst="rect">
+            <a:avLst/>
+          </a:prstGeom>
+        </p:spPr>
+      </p:pic>
+      <p:sp>
+        <p:nvSpPr>
+          <p:cNvPr id="40" name="TextBox 39"/>
+          <p:cNvSpPr txBox="1"/>
+          <p:nvPr/>
+        </p:nvSpPr>
+        <p:spPr>
+          <a:xfrm>
+            <a:off x="685800" y="1554480"/>
+            <a:ext cx="13258800" cy="307340"/>
+          </a:xfrm>
+          <a:prstGeom prst="rect">
+            <a:avLst/>
+          </a:prstGeom>
+          <a:noFill/>
+        </p:spPr>
+        <p:txBody>
+          <a:bodyPr wrap="square" lIns="0" tIns="0" rIns="0" bIns="0" rtlCol="0">
+            <a:noAutofit/>
+          </a:bodyPr>
+          <a:lstStyle/>
+          <a:p>
+            <a:pPr algn="l">
+              <a:spcAft>
+                <a:spcPts val="600"/>
+              </a:spcAft>
+            </a:pPr>
+            <a:r>
+              <a:rPr lang="fr-FR" sz="2000" b="0" i="0" dirty="0">
+                <a:solidFill>
+                  <a:srgbClr val="5A6B79"/>
+                </a:solidFill>
+                <a:latin typeface="Calibri"/>
+              </a:rPr>
+              <a:t>Cinq fonctions couvrent le cycle de la donnée, de l'arrivée brute au pilotage</a:t>
+            </a:r>
+          </a:p>
+        </p:txBody>
+      </p:sp>
     </p:spTree>
+    <p:extLst>
+      <p:ext uri="{BB962C8B-B14F-4D97-AF65-F5344CB8AC3E}">
+        <p14:creationId xmlns:p14="http://schemas.microsoft.com/office/powerpoint/2010/main" val="1301920630"/>
+      </p:ext>
+    </p:extLst>
   </p:cSld>
   <p:clrMapOvr>
     <a:masterClrMapping/>
@@ -8179,7 +8457,7 @@
 </file>
 
 <file path=ppt/slides/slide15.xml><?xml version="1.0" encoding="utf-8"?>
-<p:sld xmlns:a="http://schemas.openxmlformats.org/drawingml/2006/main" xmlns:p="http://schemas.openxmlformats.org/presentationml/2006/main" xmlns:r="http://schemas.openxmlformats.org/officeDocument/2006/relationships">
+<p:sld xmlns:a="http://schemas.openxmlformats.org/drawingml/2006/main" xmlns:r="http://schemas.openxmlformats.org/officeDocument/2006/relationships" xmlns:p="http://schemas.openxmlformats.org/presentationml/2006/main">
   <p:cSld>
     <p:spTree>
       <p:nvGrpSpPr>
@@ -8187,7 +8465,14 @@
         <p:cNvGrpSpPr/>
         <p:nvPr/>
       </p:nvGrpSpPr>
-      <p:grpSpPr/>
+      <p:grpSpPr>
+        <a:xfrm>
+          <a:off x="0" y="0"/>
+          <a:ext cx="0" cy="0"/>
+          <a:chOff x="0" y="0"/>
+          <a:chExt cx="0" cy="0"/>
+        </a:xfrm>
+      </p:grpSpPr>
       <p:pic>
         <p:nvPicPr>
           <p:cNvPr id="2" name="Picture 1" descr="logo-ituniversity.png"/>
@@ -8336,7 +8621,7 @@
           <a:noFill/>
         </p:spPr>
         <p:txBody>
-          <a:bodyPr wrap="square" anchor="t" lIns="0" rIns="0" tIns="0" bIns="0">
+          <a:bodyPr wrap="square" lIns="0" tIns="0" rIns="0" bIns="0" anchor="t">
             <a:spAutoFit/>
           </a:bodyPr>
           <a:lstStyle/>
@@ -8347,7 +8632,7 @@
               </a:spcAft>
             </a:pPr>
             <a:r>
-              <a:rPr b="0" sz="3200" i="0">
+              <a:rPr sz="3200" b="0" i="0">
                 <a:solidFill>
                   <a:srgbClr val="106D8E"/>
                 </a:solidFill>
@@ -8367,7 +8652,7 @@
         <p:spPr>
           <a:xfrm>
             <a:off x="685800" y="1554480"/>
-            <a:ext cx="13258800" cy="457200"/>
+            <a:ext cx="13258800" cy="307777"/>
           </a:xfrm>
           <a:prstGeom prst="rect">
             <a:avLst/>
@@ -8375,7 +8660,7 @@
           <a:noFill/>
         </p:spPr>
         <p:txBody>
-          <a:bodyPr wrap="square" anchor="t" lIns="0" rIns="0" tIns="0" bIns="0">
+          <a:bodyPr wrap="square" lIns="0" tIns="0" rIns="0" bIns="0" anchor="t">
             <a:spAutoFit/>
           </a:bodyPr>
           <a:lstStyle/>
@@ -8386,13 +8671,13 @@
               </a:spcAft>
             </a:pPr>
             <a:r>
-              <a:rPr b="0" sz="2000" i="0">
+              <a:rPr sz="2000" b="0" i="0">
                 <a:solidFill>
                   <a:srgbClr val="5A6B79"/>
                 </a:solidFill>
                 <a:latin typeface="Calibri"/>
               </a:rPr>
-              <a:t>Quatre étapes, huit cas d'utilisation</a:t>
+              <a:t>Huit cas d'utilisation, de l'intégration des sources à leur exploitation</a:t>
             </a:r>
           </a:p>
         </p:txBody>
@@ -8449,7 +8734,7 @@
           <a:noFill/>
         </p:spPr>
         <p:txBody>
-          <a:bodyPr wrap="square" anchor="t" lIns="0" rIns="0" tIns="0" bIns="0">
+          <a:bodyPr wrap="square" lIns="0" tIns="0" rIns="0" bIns="0" anchor="t">
             <a:spAutoFit/>
           </a:bodyPr>
           <a:lstStyle/>
@@ -8460,7 +8745,7 @@
               </a:spcAft>
             </a:pPr>
             <a:r>
-              <a:rPr b="0" sz="1100" i="0">
+              <a:rPr sz="1100" b="0" i="0">
                 <a:solidFill>
                   <a:srgbClr val="106D8E"/>
                 </a:solidFill>
@@ -8488,7 +8773,7 @@
           <a:noFill/>
         </p:spPr>
         <p:txBody>
-          <a:bodyPr wrap="square" anchor="t" lIns="0" rIns="0" tIns="0" bIns="0">
+          <a:bodyPr wrap="square" lIns="0" tIns="0" rIns="0" bIns="0" anchor="t">
             <a:spAutoFit/>
           </a:bodyPr>
           <a:lstStyle/>
@@ -8499,7 +8784,7 @@
               </a:spcAft>
             </a:pPr>
             <a:r>
-              <a:rPr b="0" sz="1100" i="0">
+              <a:rPr sz="1100" b="0" i="0">
                 <a:solidFill>
                   <a:srgbClr val="106D8E"/>
                 </a:solidFill>
@@ -8553,6 +8838,7 @@
           <a:lstStyle/>
           <a:p>
             <a:pPr algn="ctr"/>
+            <a:endParaRPr/>
           </a:p>
         </p:txBody>
       </p:sp>
@@ -8593,12 +8879,12 @@
           </a:fontRef>
         </p:style>
         <p:txBody>
-          <a:bodyPr rtlCol="0" anchor="ctr" wrap="square" lIns="0" rIns="0" tIns="0" bIns="0"/>
+          <a:bodyPr wrap="square" lIns="0" tIns="0" rIns="0" bIns="0" rtlCol="0" anchor="ctr"/>
           <a:lstStyle/>
           <a:p>
             <a:pPr algn="ctr"/>
             <a:r>
-              <a:rPr b="1" sz="1700" i="0">
+              <a:rPr sz="1700" b="1" i="0">
                 <a:solidFill>
                   <a:srgbClr val="FFFFFF"/>
                 </a:solidFill>
@@ -8626,7 +8912,7 @@
           <a:noFill/>
         </p:spPr>
         <p:txBody>
-          <a:bodyPr wrap="square" anchor="t" lIns="0" rIns="0" tIns="0" bIns="0">
+          <a:bodyPr wrap="square" lIns="0" tIns="0" rIns="0" bIns="0" anchor="t">
             <a:spAutoFit/>
           </a:bodyPr>
           <a:lstStyle/>
@@ -8637,7 +8923,7 @@
               </a:spcAft>
             </a:pPr>
             <a:r>
-              <a:rPr b="1" sz="2000" i="0">
+              <a:rPr sz="2000" b="1" i="0">
                 <a:solidFill>
                   <a:srgbClr val="0B2E4F"/>
                 </a:solidFill>
@@ -8665,7 +8951,7 @@
           <a:noFill/>
         </p:spPr>
         <p:txBody>
-          <a:bodyPr wrap="square" anchor="t" lIns="0" rIns="0" tIns="0" bIns="0">
+          <a:bodyPr wrap="square" lIns="0" tIns="0" rIns="0" bIns="0" anchor="t">
             <a:spAutoFit/>
           </a:bodyPr>
           <a:lstStyle/>
@@ -8676,7 +8962,7 @@
               </a:spcAft>
             </a:pPr>
             <a:r>
-              <a:rPr b="0" sz="1400" i="0">
+              <a:rPr sz="1400" b="0" i="0">
                 <a:solidFill>
                   <a:srgbClr val="20303C"/>
                 </a:solidFill>
@@ -8692,7 +8978,7 @@
               </a:spcAft>
             </a:pPr>
             <a:r>
-              <a:rPr b="0" sz="1400" i="0">
+              <a:rPr sz="1400" b="0" i="0">
                 <a:solidFill>
                   <a:srgbClr val="20303C"/>
                 </a:solidFill>
@@ -8744,6 +9030,7 @@
           <a:lstStyle/>
           <a:p>
             <a:pPr algn="ctr"/>
+            <a:endParaRPr/>
           </a:p>
         </p:txBody>
       </p:sp>
@@ -8790,6 +9077,7 @@
           <a:lstStyle/>
           <a:p>
             <a:pPr algn="ctr"/>
+            <a:endParaRPr/>
           </a:p>
         </p:txBody>
       </p:sp>
@@ -8830,12 +9118,12 @@
           </a:fontRef>
         </p:style>
         <p:txBody>
-          <a:bodyPr rtlCol="0" anchor="ctr" wrap="square" lIns="0" rIns="0" tIns="0" bIns="0"/>
+          <a:bodyPr wrap="square" lIns="0" tIns="0" rIns="0" bIns="0" rtlCol="0" anchor="ctr"/>
           <a:lstStyle/>
           <a:p>
             <a:pPr algn="ctr"/>
             <a:r>
-              <a:rPr b="1" sz="1700" i="0">
+              <a:rPr sz="1700" b="1" i="0">
                 <a:solidFill>
                   <a:srgbClr val="FFFFFF"/>
                 </a:solidFill>
@@ -8863,7 +9151,7 @@
           <a:noFill/>
         </p:spPr>
         <p:txBody>
-          <a:bodyPr wrap="square" anchor="t" lIns="0" rIns="0" tIns="0" bIns="0">
+          <a:bodyPr wrap="square" lIns="0" tIns="0" rIns="0" bIns="0" anchor="t">
             <a:spAutoFit/>
           </a:bodyPr>
           <a:lstStyle/>
@@ -8874,7 +9162,7 @@
               </a:spcAft>
             </a:pPr>
             <a:r>
-              <a:rPr b="1" sz="2000" i="0">
+              <a:rPr sz="2000" b="1" i="0">
                 <a:solidFill>
                   <a:srgbClr val="0B2E4F"/>
                 </a:solidFill>
@@ -8902,7 +9190,7 @@
           <a:noFill/>
         </p:spPr>
         <p:txBody>
-          <a:bodyPr wrap="square" anchor="t" lIns="0" rIns="0" tIns="0" bIns="0">
+          <a:bodyPr wrap="square" lIns="0" tIns="0" rIns="0" bIns="0" anchor="t">
             <a:spAutoFit/>
           </a:bodyPr>
           <a:lstStyle/>
@@ -8913,7 +9201,7 @@
               </a:spcAft>
             </a:pPr>
             <a:r>
-              <a:rPr b="0" sz="1400" i="0">
+              <a:rPr sz="1400" b="0" i="0">
                 <a:solidFill>
                   <a:srgbClr val="20303C"/>
                 </a:solidFill>
@@ -8929,7 +9217,7 @@
               </a:spcAft>
             </a:pPr>
             <a:r>
-              <a:rPr b="0" sz="1400" i="0">
+              <a:rPr sz="1400" b="0" i="0">
                 <a:solidFill>
                   <a:srgbClr val="20303C"/>
                 </a:solidFill>
@@ -8981,6 +9269,7 @@
           <a:lstStyle/>
           <a:p>
             <a:pPr algn="ctr"/>
+            <a:endParaRPr/>
           </a:p>
         </p:txBody>
       </p:sp>
@@ -9027,6 +9316,7 @@
           <a:lstStyle/>
           <a:p>
             <a:pPr algn="ctr"/>
+            <a:endParaRPr/>
           </a:p>
         </p:txBody>
       </p:sp>
@@ -9067,12 +9357,12 @@
           </a:fontRef>
         </p:style>
         <p:txBody>
-          <a:bodyPr rtlCol="0" anchor="ctr" wrap="square" lIns="0" rIns="0" tIns="0" bIns="0"/>
+          <a:bodyPr wrap="square" lIns="0" tIns="0" rIns="0" bIns="0" rtlCol="0" anchor="ctr"/>
           <a:lstStyle/>
           <a:p>
             <a:pPr algn="ctr"/>
             <a:r>
-              <a:rPr b="1" sz="1700" i="0">
+              <a:rPr sz="1700" b="1" i="0">
                 <a:solidFill>
                   <a:srgbClr val="FFFFFF"/>
                 </a:solidFill>
@@ -9100,7 +9390,7 @@
           <a:noFill/>
         </p:spPr>
         <p:txBody>
-          <a:bodyPr wrap="square" anchor="t" lIns="0" rIns="0" tIns="0" bIns="0">
+          <a:bodyPr wrap="square" lIns="0" tIns="0" rIns="0" bIns="0" anchor="t">
             <a:spAutoFit/>
           </a:bodyPr>
           <a:lstStyle/>
@@ -9111,7 +9401,7 @@
               </a:spcAft>
             </a:pPr>
             <a:r>
-              <a:rPr b="1" sz="2000" i="0">
+              <a:rPr sz="2000" b="1" i="0">
                 <a:solidFill>
                   <a:srgbClr val="0B2E4F"/>
                 </a:solidFill>
@@ -9139,7 +9429,7 @@
           <a:noFill/>
         </p:spPr>
         <p:txBody>
-          <a:bodyPr wrap="square" anchor="t" lIns="0" rIns="0" tIns="0" bIns="0">
+          <a:bodyPr wrap="square" lIns="0" tIns="0" rIns="0" bIns="0" anchor="t">
             <a:spAutoFit/>
           </a:bodyPr>
           <a:lstStyle/>
@@ -9150,7 +9440,7 @@
               </a:spcAft>
             </a:pPr>
             <a:r>
-              <a:rPr b="0" sz="1400" i="0">
+              <a:rPr sz="1400" b="0" i="0">
                 <a:solidFill>
                   <a:srgbClr val="20303C"/>
                 </a:solidFill>
@@ -9166,7 +9456,7 @@
               </a:spcAft>
             </a:pPr>
             <a:r>
-              <a:rPr b="0" sz="1400" i="0">
+              <a:rPr sz="1400" b="0" i="0">
                 <a:solidFill>
                   <a:srgbClr val="20303C"/>
                 </a:solidFill>
@@ -9218,6 +9508,7 @@
           <a:lstStyle/>
           <a:p>
             <a:pPr algn="ctr"/>
+            <a:endParaRPr/>
           </a:p>
         </p:txBody>
       </p:sp>
@@ -9264,6 +9555,7 @@
           <a:lstStyle/>
           <a:p>
             <a:pPr algn="ctr"/>
+            <a:endParaRPr/>
           </a:p>
         </p:txBody>
       </p:sp>
@@ -9304,12 +9596,12 @@
           </a:fontRef>
         </p:style>
         <p:txBody>
-          <a:bodyPr rtlCol="0" anchor="ctr" wrap="square" lIns="0" rIns="0" tIns="0" bIns="0"/>
+          <a:bodyPr wrap="square" lIns="0" tIns="0" rIns="0" bIns="0" rtlCol="0" anchor="ctr"/>
           <a:lstStyle/>
           <a:p>
             <a:pPr algn="ctr"/>
             <a:r>
-              <a:rPr b="1" sz="1700" i="0">
+              <a:rPr sz="1700" b="1" i="0">
                 <a:solidFill>
                   <a:srgbClr val="FFFFFF"/>
                 </a:solidFill>
@@ -9337,7 +9629,7 @@
           <a:noFill/>
         </p:spPr>
         <p:txBody>
-          <a:bodyPr wrap="square" anchor="t" lIns="0" rIns="0" tIns="0" bIns="0">
+          <a:bodyPr wrap="square" lIns="0" tIns="0" rIns="0" bIns="0" anchor="t">
             <a:spAutoFit/>
           </a:bodyPr>
           <a:lstStyle/>
@@ -9348,7 +9640,7 @@
               </a:spcAft>
             </a:pPr>
             <a:r>
-              <a:rPr b="1" sz="2000" i="0">
+              <a:rPr sz="2000" b="1" i="0">
                 <a:solidFill>
                   <a:srgbClr val="0B2E4F"/>
                 </a:solidFill>
@@ -9376,7 +9668,7 @@
           <a:noFill/>
         </p:spPr>
         <p:txBody>
-          <a:bodyPr wrap="square" anchor="t" lIns="0" rIns="0" tIns="0" bIns="0">
+          <a:bodyPr wrap="square" lIns="0" tIns="0" rIns="0" bIns="0" anchor="t">
             <a:spAutoFit/>
           </a:bodyPr>
           <a:lstStyle/>
@@ -9387,7 +9679,7 @@
               </a:spcAft>
             </a:pPr>
             <a:r>
-              <a:rPr b="0" sz="1400" i="0">
+              <a:rPr sz="1400" b="0" i="0">
                 <a:solidFill>
                   <a:srgbClr val="20303C"/>
                 </a:solidFill>
@@ -9403,7 +9695,7 @@
               </a:spcAft>
             </a:pPr>
             <a:r>
-              <a:rPr b="0" sz="1400" i="0">
+              <a:rPr sz="1400" b="0" i="0">
                 <a:solidFill>
                   <a:srgbClr val="20303C"/>
                 </a:solidFill>
@@ -9453,12 +9745,12 @@
           </a:fontRef>
         </p:style>
         <p:txBody>
-          <a:bodyPr rtlCol="0" anchor="ctr" wrap="square" lIns="274320" rIns="274320" tIns="274320" bIns="274320"/>
+          <a:bodyPr wrap="square" lIns="274320" tIns="274320" rIns="274320" bIns="274320" rtlCol="0" anchor="ctr"/>
           <a:lstStyle/>
           <a:p>
             <a:pPr algn="ctr"/>
             <a:r>
-              <a:rPr b="0" sz="1600" i="0">
+              <a:rPr sz="1600" b="0" i="0">
                 <a:solidFill>
                   <a:srgbClr val="0B2E4F"/>
                 </a:solidFill>
@@ -9467,7 +9759,7 @@
               <a:t>Cas limite : un </a:t>
             </a:r>
             <a:r>
-              <a:rPr b="1" sz="1600" i="0">
+              <a:rPr sz="1600" b="1" i="0">
                 <a:solidFill>
                   <a:srgbClr val="0B2E4F"/>
                 </a:solidFill>
@@ -9476,7 +9768,7 @@
               <a:t>refus de consentement</a:t>
             </a:r>
             <a:r>
-              <a:rPr b="0" sz="1600" i="0">
+              <a:rPr sz="1600" b="0" i="0">
                 <a:solidFill>
                   <a:srgbClr val="0B2E4F"/>
                 </a:solidFill>
@@ -9485,7 +9777,7 @@
               <a:t> n'est jamais silencieux — il renvoie un </a:t>
             </a:r>
             <a:r>
-              <a:rPr b="1" sz="1600" i="0">
+              <a:rPr sz="1600" b="1" i="0">
                 <a:solidFill>
                   <a:srgbClr val="0B2E4F"/>
                 </a:solidFill>
@@ -9494,7 +9786,7 @@
               <a:t>403</a:t>
             </a:r>
             <a:r>
-              <a:rPr b="0" sz="1600" i="0">
+              <a:rPr sz="1600" b="0" i="0">
                 <a:solidFill>
                   <a:srgbClr val="0B2E4F"/>
                 </a:solidFill>
@@ -9522,7 +9814,7 @@
           <a:noFill/>
         </p:spPr>
         <p:txBody>
-          <a:bodyPr wrap="square" anchor="t" lIns="0" rIns="0" tIns="0" bIns="0">
+          <a:bodyPr wrap="square" lIns="0" tIns="0" rIns="0" bIns="0" anchor="t">
             <a:spAutoFit/>
           </a:bodyPr>
           <a:lstStyle/>
@@ -9533,7 +9825,7 @@
               </a:spcAft>
             </a:pPr>
             <a:r>
-              <a:rPr b="0" sz="1500" i="1">
+              <a:rPr sz="1500" b="0" i="1">
                 <a:solidFill>
                   <a:srgbClr val="5A6B79"/>
                 </a:solidFill>
@@ -9545,6 +9837,11 @@
         </p:txBody>
       </p:sp>
     </p:spTree>
+    <p:extLst>
+      <p:ext uri="{BB962C8B-B14F-4D97-AF65-F5344CB8AC3E}">
+        <p14:creationId xmlns:p14="http://schemas.microsoft.com/office/powerpoint/2010/main" val="3306679187"/>
+      </p:ext>
+    </p:extLst>
   </p:cSld>
   <p:clrMapOvr>
     <a:masterClrMapping/>
@@ -9553,7 +9850,7 @@
 </file>
 
 <file path=ppt/slides/slide16.xml><?xml version="1.0" encoding="utf-8"?>
-<p:sld xmlns:a="http://schemas.openxmlformats.org/drawingml/2006/main" xmlns:p="http://schemas.openxmlformats.org/presentationml/2006/main" xmlns:r="http://schemas.openxmlformats.org/officeDocument/2006/relationships">
+<p:sld xmlns:a="http://schemas.openxmlformats.org/drawingml/2006/main" xmlns:r="http://schemas.openxmlformats.org/officeDocument/2006/relationships" xmlns:p="http://schemas.openxmlformats.org/presentationml/2006/main">
   <p:cSld>
     <p:spTree>
       <p:nvGrpSpPr>
@@ -9561,7 +9858,14 @@
         <p:cNvGrpSpPr/>
         <p:nvPr/>
       </p:nvGrpSpPr>
-      <p:grpSpPr/>
+      <p:grpSpPr>
+        <a:xfrm>
+          <a:off x="0" y="0"/>
+          <a:ext cx="0" cy="0"/>
+          <a:chOff x="0" y="0"/>
+          <a:chExt cx="0" cy="0"/>
+        </a:xfrm>
+      </p:grpSpPr>
       <p:pic>
         <p:nvPicPr>
           <p:cNvPr id="2" name="Picture 1" descr="logo-ituniversity.png"/>
@@ -9710,7 +10014,7 @@
           <a:noFill/>
         </p:spPr>
         <p:txBody>
-          <a:bodyPr wrap="square" anchor="t" lIns="0" rIns="0" tIns="0" bIns="0">
+          <a:bodyPr wrap="square" lIns="0" tIns="0" rIns="0" bIns="0" anchor="t">
             <a:spAutoFit/>
           </a:bodyPr>
           <a:lstStyle/>
@@ -9721,7 +10025,7 @@
               </a:spcAft>
             </a:pPr>
             <a:r>
-              <a:rPr b="0" sz="3200" i="0">
+              <a:rPr sz="3200" b="0" i="0">
                 <a:solidFill>
                   <a:srgbClr val="106D8E"/>
                 </a:solidFill>
@@ -9741,7 +10045,7 @@
         <p:spPr>
           <a:xfrm>
             <a:off x="685800" y="1554480"/>
-            <a:ext cx="13258800" cy="457200"/>
+            <a:ext cx="13258800" cy="307777"/>
           </a:xfrm>
           <a:prstGeom prst="rect">
             <a:avLst/>
@@ -9749,7 +10053,7 @@
           <a:noFill/>
         </p:spPr>
         <p:txBody>
-          <a:bodyPr wrap="square" anchor="t" lIns="0" rIns="0" tIns="0" bIns="0">
+          <a:bodyPr wrap="square" lIns="0" tIns="0" rIns="0" bIns="0" anchor="t">
             <a:spAutoFit/>
           </a:bodyPr>
           <a:lstStyle/>
@@ -9760,13 +10064,13 @@
               </a:spcAft>
             </a:pPr>
             <a:r>
-              <a:rPr b="0" sz="2000" i="0">
+              <a:rPr sz="2000" b="0" i="0">
                 <a:solidFill>
                   <a:srgbClr val="5A6B79"/>
                 </a:solidFill>
                 <a:latin typeface="Calibri"/>
               </a:rPr>
-              <a:t>Résultats mesurés au run de référence (07/09/2026)</a:t>
+              <a:t>Run du 07/09/2026 : 214 lignes sources ramenées à 145 patients maîtres</a:t>
             </a:r>
           </a:p>
         </p:txBody>
@@ -9823,7 +10127,7 @@
           <a:noFill/>
         </p:spPr>
         <p:txBody>
-          <a:bodyPr wrap="square" anchor="t" lIns="0" rIns="0" tIns="0" bIns="0">
+          <a:bodyPr wrap="square" lIns="0" tIns="0" rIns="0" bIns="0" anchor="t">
             <a:spAutoFit/>
           </a:bodyPr>
           <a:lstStyle/>
@@ -9834,7 +10138,7 @@
               </a:spcAft>
             </a:pPr>
             <a:r>
-              <a:rPr b="0" sz="1100" i="0">
+              <a:rPr sz="1100" b="0" i="0">
                 <a:solidFill>
                   <a:srgbClr val="106D8E"/>
                 </a:solidFill>
@@ -9862,7 +10166,7 @@
           <a:noFill/>
         </p:spPr>
         <p:txBody>
-          <a:bodyPr wrap="square" anchor="t" lIns="0" rIns="0" tIns="0" bIns="0">
+          <a:bodyPr wrap="square" lIns="0" tIns="0" rIns="0" bIns="0" anchor="t">
             <a:spAutoFit/>
           </a:bodyPr>
           <a:lstStyle/>
@@ -9873,7 +10177,7 @@
               </a:spcAft>
             </a:pPr>
             <a:r>
-              <a:rPr b="0" sz="1100" i="0">
+              <a:rPr sz="1100" b="0" i="0">
                 <a:solidFill>
                   <a:srgbClr val="106D8E"/>
                 </a:solidFill>
@@ -9927,6 +10231,7 @@
           <a:lstStyle/>
           <a:p>
             <a:pPr algn="ctr"/>
+            <a:endParaRPr/>
           </a:p>
         </p:txBody>
       </p:sp>
@@ -9947,7 +10252,7 @@
           <a:noFill/>
         </p:spPr>
         <p:txBody>
-          <a:bodyPr wrap="square" anchor="t" lIns="0" rIns="0" tIns="0" bIns="0">
+          <a:bodyPr wrap="square" lIns="0" tIns="0" rIns="0" bIns="0" anchor="t">
             <a:spAutoFit/>
           </a:bodyPr>
           <a:lstStyle/>
@@ -9958,7 +10263,7 @@
               </a:spcAft>
             </a:pPr>
             <a:r>
-              <a:rPr b="1" sz="4800" i="0">
+              <a:rPr sz="4800" b="1" i="0">
                 <a:solidFill>
                   <a:srgbClr val="106D8E"/>
                 </a:solidFill>
@@ -9986,7 +10291,7 @@
           <a:noFill/>
         </p:spPr>
         <p:txBody>
-          <a:bodyPr wrap="square" anchor="t" lIns="0" rIns="0" tIns="0" bIns="0">
+          <a:bodyPr wrap="square" lIns="0" tIns="0" rIns="0" bIns="0" anchor="t">
             <a:spAutoFit/>
           </a:bodyPr>
           <a:lstStyle/>
@@ -9997,7 +10302,7 @@
               </a:spcAft>
             </a:pPr>
             <a:r>
-              <a:rPr b="0" sz="1500" i="0">
+              <a:rPr sz="1500" b="0" i="0">
                 <a:solidFill>
                   <a:srgbClr val="20303C"/>
                 </a:solidFill>
@@ -10013,7 +10318,7 @@
               </a:spcAft>
             </a:pPr>
             <a:r>
-              <a:rPr b="0" sz="1500" i="0">
+              <a:rPr sz="1500" b="0" i="0">
                 <a:solidFill>
                   <a:srgbClr val="20303C"/>
                 </a:solidFill>
@@ -10067,6 +10372,7 @@
           <a:lstStyle/>
           <a:p>
             <a:pPr algn="ctr"/>
+            <a:endParaRPr/>
           </a:p>
         </p:txBody>
       </p:sp>
@@ -10087,7 +10393,7 @@
           <a:noFill/>
         </p:spPr>
         <p:txBody>
-          <a:bodyPr wrap="square" anchor="t" lIns="0" rIns="0" tIns="0" bIns="0">
+          <a:bodyPr wrap="square" lIns="0" tIns="0" rIns="0" bIns="0" anchor="t">
             <a:spAutoFit/>
           </a:bodyPr>
           <a:lstStyle/>
@@ -10098,7 +10404,7 @@
               </a:spcAft>
             </a:pPr>
             <a:r>
-              <a:rPr b="1" sz="4800" i="0">
+              <a:rPr sz="4800" b="1" i="0">
                 <a:solidFill>
                   <a:srgbClr val="106D8E"/>
                 </a:solidFill>
@@ -10126,7 +10432,7 @@
           <a:noFill/>
         </p:spPr>
         <p:txBody>
-          <a:bodyPr wrap="square" anchor="t" lIns="0" rIns="0" tIns="0" bIns="0">
+          <a:bodyPr wrap="square" lIns="0" tIns="0" rIns="0" bIns="0" anchor="t">
             <a:spAutoFit/>
           </a:bodyPr>
           <a:lstStyle/>
@@ -10137,7 +10443,7 @@
               </a:spcAft>
             </a:pPr>
             <a:r>
-              <a:rPr b="0" sz="1500" i="0">
+              <a:rPr sz="1500" b="0" i="0">
                 <a:solidFill>
                   <a:srgbClr val="20303C"/>
                 </a:solidFill>
@@ -10191,6 +10497,7 @@
           <a:lstStyle/>
           <a:p>
             <a:pPr algn="ctr"/>
+            <a:endParaRPr/>
           </a:p>
         </p:txBody>
       </p:sp>
@@ -10211,7 +10518,7 @@
           <a:noFill/>
         </p:spPr>
         <p:txBody>
-          <a:bodyPr wrap="square" anchor="t" lIns="0" rIns="0" tIns="0" bIns="0">
+          <a:bodyPr wrap="square" lIns="0" tIns="0" rIns="0" bIns="0" anchor="t">
             <a:spAutoFit/>
           </a:bodyPr>
           <a:lstStyle/>
@@ -10222,7 +10529,7 @@
               </a:spcAft>
             </a:pPr>
             <a:r>
-              <a:rPr b="1" sz="4800" i="0">
+              <a:rPr sz="4800" b="1" i="0">
                 <a:solidFill>
                   <a:srgbClr val="106D8E"/>
                 </a:solidFill>
@@ -10250,7 +10557,7 @@
           <a:noFill/>
         </p:spPr>
         <p:txBody>
-          <a:bodyPr wrap="square" anchor="t" lIns="0" rIns="0" tIns="0" bIns="0">
+          <a:bodyPr wrap="square" lIns="0" tIns="0" rIns="0" bIns="0" anchor="t">
             <a:spAutoFit/>
           </a:bodyPr>
           <a:lstStyle/>
@@ -10261,7 +10568,7 @@
               </a:spcAft>
             </a:pPr>
             <a:r>
-              <a:rPr b="0" sz="1500" i="0">
+              <a:rPr sz="1500" b="0" i="0">
                 <a:solidFill>
                   <a:srgbClr val="20303C"/>
                 </a:solidFill>
@@ -10277,7 +10584,7 @@
               </a:spcAft>
             </a:pPr>
             <a:r>
-              <a:rPr b="0" sz="1500" i="0">
+              <a:rPr sz="1500" b="0" i="0">
                 <a:solidFill>
                   <a:srgbClr val="20303C"/>
                 </a:solidFill>
@@ -10331,6 +10638,7 @@
           <a:lstStyle/>
           <a:p>
             <a:pPr algn="ctr"/>
+            <a:endParaRPr/>
           </a:p>
         </p:txBody>
       </p:sp>
@@ -10351,7 +10659,7 @@
           <a:noFill/>
         </p:spPr>
         <p:txBody>
-          <a:bodyPr wrap="square" anchor="t" lIns="0" rIns="0" tIns="0" bIns="0">
+          <a:bodyPr wrap="square" lIns="0" tIns="0" rIns="0" bIns="0" anchor="t">
             <a:spAutoFit/>
           </a:bodyPr>
           <a:lstStyle/>
@@ -10362,7 +10670,7 @@
               </a:spcAft>
             </a:pPr>
             <a:r>
-              <a:rPr b="1" sz="4800" i="0">
+              <a:rPr sz="4800" b="1" i="0">
                 <a:solidFill>
                   <a:srgbClr val="106D8E"/>
                 </a:solidFill>
@@ -10390,7 +10698,7 @@
           <a:noFill/>
         </p:spPr>
         <p:txBody>
-          <a:bodyPr wrap="square" anchor="t" lIns="0" rIns="0" tIns="0" bIns="0">
+          <a:bodyPr wrap="square" lIns="0" tIns="0" rIns="0" bIns="0" anchor="t">
             <a:spAutoFit/>
           </a:bodyPr>
           <a:lstStyle/>
@@ -10401,7 +10709,7 @@
               </a:spcAft>
             </a:pPr>
             <a:r>
-              <a:rPr b="0" sz="1500" i="0">
+              <a:rPr sz="1500" b="0" i="0">
                 <a:solidFill>
                   <a:srgbClr val="20303C"/>
                 </a:solidFill>
@@ -10417,7 +10725,7 @@
               </a:spcAft>
             </a:pPr>
             <a:r>
-              <a:rPr b="0" sz="1380" i="0">
+              <a:rPr sz="1380" b="0" i="0">
                 <a:solidFill>
                   <a:srgbClr val="20303C"/>
                 </a:solidFill>
@@ -10467,27 +10775,18 @@
           </a:fontRef>
         </p:style>
         <p:txBody>
-          <a:bodyPr rtlCol="0" anchor="ctr" wrap="square" lIns="109728" rIns="109728" tIns="109728" bIns="109728"/>
+          <a:bodyPr wrap="square" lIns="109728" tIns="109728" rIns="109728" bIns="109728" rtlCol="0" anchor="ctr"/>
           <a:lstStyle/>
           <a:p>
             <a:pPr algn="ctr"/>
             <a:r>
-              <a:rPr b="1" sz="1600" i="0">
+              <a:rPr sz="1600" b="1" i="0">
                 <a:solidFill>
                   <a:srgbClr val="0B2E4F"/>
                 </a:solidFill>
                 <a:latin typeface="Calibri"/>
               </a:rPr>
-              <a:t>Pipeline RAW → SILVER → GOLD : </a:t>
-            </a:r>
-            <a:r>
-              <a:rPr b="1" sz="1600" i="0">
-                <a:solidFill>
-                  <a:srgbClr val="0B2E4F"/>
-                </a:solidFill>
-                <a:latin typeface="Calibri"/>
-              </a:rPr>
-              <a:t>4/4</a:t>
+              <a:t>Pipeline RAW → SILVER → GOLD : 4/4</a:t>
             </a:r>
           </a:p>
         </p:txBody>
@@ -10531,27 +10830,18 @@
           </a:fontRef>
         </p:style>
         <p:txBody>
-          <a:bodyPr rtlCol="0" anchor="ctr" wrap="square" lIns="109728" rIns="109728" tIns="109728" bIns="109728"/>
+          <a:bodyPr wrap="square" lIns="109728" tIns="109728" rIns="109728" bIns="109728" rtlCol="0" anchor="ctr"/>
           <a:lstStyle/>
           <a:p>
             <a:pPr algn="ctr"/>
             <a:r>
-              <a:rPr b="1" sz="1600" i="0">
+              <a:rPr sz="1600" b="1" i="0">
                 <a:solidFill>
                   <a:srgbClr val="0B2E4F"/>
                 </a:solidFill>
                 <a:latin typeface="Calibri"/>
               </a:rPr>
-              <a:t>Tests : </a:t>
-            </a:r>
-            <a:r>
-              <a:rPr b="1" sz="1600" i="0">
-                <a:solidFill>
-                  <a:srgbClr val="0B2E4F"/>
-                </a:solidFill>
-                <a:latin typeface="Calibri"/>
-              </a:rPr>
-              <a:t>102/102</a:t>
+              <a:t>Tests : 102/102</a:t>
             </a:r>
           </a:p>
         </p:txBody>
@@ -10595,27 +10885,18 @@
           </a:fontRef>
         </p:style>
         <p:txBody>
-          <a:bodyPr rtlCol="0" anchor="ctr" wrap="square" lIns="109728" rIns="109728" tIns="109728" bIns="109728"/>
+          <a:bodyPr wrap="square" lIns="109728" tIns="109728" rIns="109728" bIns="109728" rtlCol="0" anchor="ctr"/>
           <a:lstStyle/>
           <a:p>
             <a:pPr algn="ctr"/>
             <a:r>
-              <a:rPr b="1" sz="1600" i="0">
+              <a:rPr sz="1600" b="1" i="0">
                 <a:solidFill>
                   <a:srgbClr val="0B2E4F"/>
                 </a:solidFill>
                 <a:latin typeface="Calibri"/>
               </a:rPr>
-              <a:t>API d'indicateurs : </a:t>
-            </a:r>
-            <a:r>
-              <a:rPr b="1" sz="1600" i="0">
-                <a:solidFill>
-                  <a:srgbClr val="0B2E4F"/>
-                </a:solidFill>
-                <a:latin typeface="Calibri"/>
-              </a:rPr>
-              <a:t>3/3</a:t>
+              <a:t>API d'indicateurs : 3/3</a:t>
             </a:r>
           </a:p>
         </p:txBody>
@@ -10637,7 +10918,7 @@
           <a:noFill/>
         </p:spPr>
         <p:txBody>
-          <a:bodyPr wrap="square" anchor="t" lIns="0" rIns="0" tIns="0" bIns="0">
+          <a:bodyPr wrap="square" lIns="0" tIns="0" rIns="0" bIns="0" anchor="t">
             <a:spAutoFit/>
           </a:bodyPr>
           <a:lstStyle/>
@@ -10648,7 +10929,7 @@
               </a:spcAft>
             </a:pPr>
             <a:r>
-              <a:rPr b="0" sz="1400" i="1">
+              <a:rPr sz="1400" b="0" i="1">
                 <a:solidFill>
                   <a:srgbClr val="5A6B79"/>
                 </a:solidFill>
@@ -10657,7 +10938,7 @@
               <a:t>Sources CSV synthétiques ; GOLD certifie l'identité, pas encore les événements de soin (</a:t>
             </a:r>
             <a:r>
-              <a:rPr b="0" sz="1288" i="1">
+              <a:rPr sz="1288" b="0" i="1">
                 <a:solidFill>
                   <a:srgbClr val="5A6B79"/>
                 </a:solidFill>
@@ -10666,7 +10947,7 @@
               <a:t>patient_events_gold</a:t>
             </a:r>
             <a:r>
-              <a:rPr b="0" sz="1400" i="1">
+              <a:rPr sz="1400" b="0" i="1">
                 <a:solidFill>
                   <a:srgbClr val="5A6B79"/>
                 </a:solidFill>
@@ -10678,6 +10959,11 @@
         </p:txBody>
       </p:sp>
     </p:spTree>
+    <p:extLst>
+      <p:ext uri="{BB962C8B-B14F-4D97-AF65-F5344CB8AC3E}">
+        <p14:creationId xmlns:p14="http://schemas.microsoft.com/office/powerpoint/2010/main" val="2628575027"/>
+      </p:ext>
+    </p:extLst>
   </p:cSld>
   <p:clrMapOvr>
     <a:masterClrMapping/>
@@ -10686,7 +10972,7 @@
 </file>
 
 <file path=ppt/slides/slide17.xml><?xml version="1.0" encoding="utf-8"?>
-<p:sld xmlns:a="http://schemas.openxmlformats.org/drawingml/2006/main" xmlns:p="http://schemas.openxmlformats.org/presentationml/2006/main" xmlns:r="http://schemas.openxmlformats.org/officeDocument/2006/relationships">
+<p:sld xmlns:a="http://schemas.openxmlformats.org/drawingml/2006/main" xmlns:r="http://schemas.openxmlformats.org/officeDocument/2006/relationships" xmlns:p="http://schemas.openxmlformats.org/presentationml/2006/main">
   <p:cSld>
     <p:spTree>
       <p:nvGrpSpPr>
@@ -10694,7 +10980,14 @@
         <p:cNvGrpSpPr/>
         <p:nvPr/>
       </p:nvGrpSpPr>
-      <p:grpSpPr/>
+      <p:grpSpPr>
+        <a:xfrm>
+          <a:off x="0" y="0"/>
+          <a:ext cx="0" cy="0"/>
+          <a:chOff x="0" y="0"/>
+          <a:chExt cx="0" cy="0"/>
+        </a:xfrm>
+      </p:grpSpPr>
       <p:pic>
         <p:nvPicPr>
           <p:cNvPr id="2" name="Picture 1" descr="logo-ituniversity.png"/>
@@ -10843,7 +11136,7 @@
           <a:noFill/>
         </p:spPr>
         <p:txBody>
-          <a:bodyPr wrap="square" anchor="t" lIns="0" rIns="0" tIns="0" bIns="0">
+          <a:bodyPr wrap="square" lIns="0" tIns="0" rIns="0" bIns="0" anchor="t">
             <a:spAutoFit/>
           </a:bodyPr>
           <a:lstStyle/>
@@ -10854,7 +11147,7 @@
               </a:spcAft>
             </a:pPr>
             <a:r>
-              <a:rPr b="0" sz="3200" i="0">
+              <a:rPr sz="3200" b="0" i="0">
                 <a:solidFill>
                   <a:srgbClr val="106D8E"/>
                 </a:solidFill>
@@ -10874,7 +11167,7 @@
         <p:spPr>
           <a:xfrm>
             <a:off x="685800" y="1554480"/>
-            <a:ext cx="13258800" cy="457200"/>
+            <a:ext cx="13258800" cy="307777"/>
           </a:xfrm>
           <a:prstGeom prst="rect">
             <a:avLst/>
@@ -10882,7 +11175,7 @@
           <a:noFill/>
         </p:spPr>
         <p:txBody>
-          <a:bodyPr wrap="square" anchor="t" lIns="0" rIns="0" tIns="0" bIns="0">
+          <a:bodyPr wrap="square" lIns="0" tIns="0" rIns="0" bIns="0" anchor="t">
             <a:spAutoFit/>
           </a:bodyPr>
           <a:lstStyle/>
@@ -10893,13 +11186,13 @@
               </a:spcAft>
             </a:pPr>
             <a:r>
-              <a:rPr b="0" sz="2000" i="0">
+              <a:rPr sz="2000" b="0" i="0">
                 <a:solidFill>
                   <a:srgbClr val="5A6B79"/>
                 </a:solidFill>
                 <a:latin typeface="Calibri"/>
               </a:rPr>
-              <a:t>Avant / après</a:t>
+              <a:t>Du recoupement manuel à un pipeline tracé et audité</a:t>
             </a:r>
           </a:p>
         </p:txBody>
@@ -10956,7 +11249,7 @@
           <a:noFill/>
         </p:spPr>
         <p:txBody>
-          <a:bodyPr wrap="square" anchor="t" lIns="0" rIns="0" tIns="0" bIns="0">
+          <a:bodyPr wrap="square" lIns="0" tIns="0" rIns="0" bIns="0" anchor="t">
             <a:spAutoFit/>
           </a:bodyPr>
           <a:lstStyle/>
@@ -10967,7 +11260,7 @@
               </a:spcAft>
             </a:pPr>
             <a:r>
-              <a:rPr b="0" sz="1100" i="0">
+              <a:rPr sz="1100" b="0" i="0">
                 <a:solidFill>
                   <a:srgbClr val="106D8E"/>
                 </a:solidFill>
@@ -10995,7 +11288,7 @@
           <a:noFill/>
         </p:spPr>
         <p:txBody>
-          <a:bodyPr wrap="square" anchor="t" lIns="0" rIns="0" tIns="0" bIns="0">
+          <a:bodyPr wrap="square" lIns="0" tIns="0" rIns="0" bIns="0" anchor="t">
             <a:spAutoFit/>
           </a:bodyPr>
           <a:lstStyle/>
@@ -11006,7 +11299,7 @@
               </a:spcAft>
             </a:pPr>
             <a:r>
-              <a:rPr b="0" sz="1100" i="0">
+              <a:rPr sz="1100" b="0" i="0">
                 <a:solidFill>
                   <a:srgbClr val="106D8E"/>
                 </a:solidFill>
@@ -11060,6 +11353,7 @@
           <a:lstStyle/>
           <a:p>
             <a:pPr algn="ctr"/>
+            <a:endParaRPr/>
           </a:p>
         </p:txBody>
       </p:sp>
@@ -11080,7 +11374,7 @@
           <a:noFill/>
         </p:spPr>
         <p:txBody>
-          <a:bodyPr wrap="square" anchor="t" lIns="0" rIns="0" tIns="0" bIns="0">
+          <a:bodyPr wrap="square" lIns="0" tIns="0" rIns="0" bIns="0" anchor="t">
             <a:spAutoFit/>
           </a:bodyPr>
           <a:lstStyle/>
@@ -11091,7 +11385,7 @@
               </a:spcAft>
             </a:pPr>
             <a:r>
-              <a:rPr b="1" sz="2200" i="0">
+              <a:rPr sz="2200" b="1" i="0">
                 <a:solidFill>
                   <a:srgbClr val="C0392B"/>
                 </a:solidFill>
@@ -11119,19 +11413,19 @@
           <a:noFill/>
         </p:spPr>
         <p:txBody>
-          <a:bodyPr wrap="square" anchor="t" lIns="0" rIns="0" tIns="0" bIns="0">
+          <a:bodyPr wrap="square" lIns="0" tIns="0" rIns="0" bIns="0" anchor="t">
             <a:spAutoFit/>
           </a:bodyPr>
           <a:lstStyle/>
           <a:p>
-            <a:pPr algn="l" marL="223520" indent="-223520">
+            <a:pPr marL="223520" indent="-223520" algn="l">
               <a:spcAft>
                 <a:spcPts val="600"/>
               </a:spcAft>
               <a:buChar char="•"/>
             </a:pPr>
             <a:r>
-              <a:rPr b="0" sz="1600" i="0">
+              <a:rPr sz="1600" b="0" i="0">
                 <a:solidFill>
                   <a:srgbClr val="20303C"/>
                 </a:solidFill>
@@ -11141,14 +11435,14 @@
             </a:r>
           </a:p>
           <a:p>
-            <a:pPr algn="l" marL="223520" indent="-223520">
+            <a:pPr marL="223520" indent="-223520" algn="l">
               <a:spcAft>
                 <a:spcPts val="600"/>
               </a:spcAft>
               <a:buChar char="•"/>
             </a:pPr>
             <a:r>
-              <a:rPr b="0" sz="1600" i="0">
+              <a:rPr sz="1600" b="0" i="0">
                 <a:solidFill>
                   <a:srgbClr val="20303C"/>
                 </a:solidFill>
@@ -11158,14 +11452,14 @@
             </a:r>
           </a:p>
           <a:p>
-            <a:pPr algn="l" marL="223520" indent="-223520">
+            <a:pPr marL="223520" indent="-223520" algn="l">
               <a:spcAft>
                 <a:spcPts val="600"/>
               </a:spcAft>
               <a:buChar char="•"/>
             </a:pPr>
             <a:r>
-              <a:rPr b="0" sz="1600" i="0">
+              <a:rPr sz="1600" b="0" i="0">
                 <a:solidFill>
                   <a:srgbClr val="20303C"/>
                 </a:solidFill>
@@ -11217,6 +11511,7 @@
           <a:lstStyle/>
           <a:p>
             <a:pPr algn="ctr"/>
+            <a:endParaRPr/>
           </a:p>
         </p:txBody>
       </p:sp>
@@ -11263,6 +11558,7 @@
           <a:lstStyle/>
           <a:p>
             <a:pPr algn="ctr"/>
+            <a:endParaRPr/>
           </a:p>
         </p:txBody>
       </p:sp>
@@ -11283,7 +11579,7 @@
           <a:noFill/>
         </p:spPr>
         <p:txBody>
-          <a:bodyPr wrap="square" anchor="t" lIns="0" rIns="0" tIns="0" bIns="0">
+          <a:bodyPr wrap="square" lIns="0" tIns="0" rIns="0" bIns="0" anchor="t">
             <a:spAutoFit/>
           </a:bodyPr>
           <a:lstStyle/>
@@ -11294,7 +11590,7 @@
               </a:spcAft>
             </a:pPr>
             <a:r>
-              <a:rPr b="1" sz="2200" i="0">
+              <a:rPr sz="2200" b="1" i="0">
                 <a:solidFill>
                   <a:srgbClr val="2E8B57"/>
                 </a:solidFill>
@@ -11322,19 +11618,19 @@
           <a:noFill/>
         </p:spPr>
         <p:txBody>
-          <a:bodyPr wrap="square" anchor="t" lIns="0" rIns="0" tIns="0" bIns="0">
+          <a:bodyPr wrap="square" lIns="0" tIns="0" rIns="0" bIns="0" anchor="t">
             <a:spAutoFit/>
           </a:bodyPr>
           <a:lstStyle/>
           <a:p>
-            <a:pPr algn="l" marL="223520" indent="-223520">
+            <a:pPr marL="223520" indent="-223520" algn="l">
               <a:spcAft>
                 <a:spcPts val="600"/>
               </a:spcAft>
               <a:buChar char="•"/>
             </a:pPr>
             <a:r>
-              <a:rPr b="0" sz="1600" i="0">
+              <a:rPr sz="1600" b="0" i="0">
                 <a:solidFill>
                   <a:srgbClr val="20303C"/>
                 </a:solidFill>
@@ -11344,14 +11640,14 @@
             </a:r>
           </a:p>
           <a:p>
-            <a:pPr algn="l" marL="223520" indent="-223520">
+            <a:pPr marL="223520" indent="-223520" algn="l">
               <a:spcAft>
                 <a:spcPts val="600"/>
               </a:spcAft>
               <a:buChar char="•"/>
             </a:pPr>
             <a:r>
-              <a:rPr b="0" sz="1600" i="0">
+              <a:rPr sz="1600" b="0" i="0">
                 <a:solidFill>
                   <a:srgbClr val="20303C"/>
                 </a:solidFill>
@@ -11361,14 +11657,14 @@
             </a:r>
           </a:p>
           <a:p>
-            <a:pPr algn="l" marL="223520" indent="-223520">
+            <a:pPr marL="223520" indent="-223520" algn="l">
               <a:spcAft>
                 <a:spcPts val="600"/>
               </a:spcAft>
               <a:buChar char="•"/>
             </a:pPr>
             <a:r>
-              <a:rPr b="0" sz="1600" i="0">
+              <a:rPr sz="1600" b="0" i="0">
                 <a:solidFill>
                   <a:srgbClr val="20303C"/>
                 </a:solidFill>
@@ -11396,7 +11692,7 @@
           <a:noFill/>
         </p:spPr>
         <p:txBody>
-          <a:bodyPr wrap="square" anchor="t" lIns="0" rIns="0" tIns="0" bIns="0">
+          <a:bodyPr wrap="square" lIns="0" tIns="0" rIns="0" bIns="0" anchor="t">
             <a:spAutoFit/>
           </a:bodyPr>
           <a:lstStyle/>
@@ -11407,7 +11703,7 @@
               </a:spcAft>
             </a:pPr>
             <a:r>
-              <a:rPr b="1" sz="3600" i="0">
+              <a:rPr sz="3600" b="1" i="0">
                 <a:solidFill>
                   <a:srgbClr val="106D8E"/>
                 </a:solidFill>
@@ -11435,7 +11731,7 @@
           <a:noFill/>
         </p:spPr>
         <p:txBody>
-          <a:bodyPr wrap="square" anchor="t" lIns="0" rIns="0" tIns="0" bIns="0">
+          <a:bodyPr wrap="square" lIns="0" tIns="0" rIns="0" bIns="0" anchor="t">
             <a:spAutoFit/>
           </a:bodyPr>
           <a:lstStyle/>
@@ -11446,7 +11742,7 @@
               </a:spcAft>
             </a:pPr>
             <a:r>
-              <a:rPr b="0" sz="1400" i="0">
+              <a:rPr sz="1400" b="0" i="0">
                 <a:solidFill>
                   <a:srgbClr val="20303C"/>
                 </a:solidFill>
@@ -11462,7 +11758,7 @@
               </a:spcAft>
             </a:pPr>
             <a:r>
-              <a:rPr b="0" sz="1400" i="0">
+              <a:rPr sz="1400" b="0" i="0">
                 <a:solidFill>
                   <a:srgbClr val="20303C"/>
                 </a:solidFill>
@@ -11490,7 +11786,7 @@
           <a:noFill/>
         </p:spPr>
         <p:txBody>
-          <a:bodyPr wrap="square" anchor="t" lIns="0" rIns="0" tIns="0" bIns="0">
+          <a:bodyPr wrap="square" lIns="0" tIns="0" rIns="0" bIns="0" anchor="t">
             <a:spAutoFit/>
           </a:bodyPr>
           <a:lstStyle/>
@@ -11501,7 +11797,7 @@
               </a:spcAft>
             </a:pPr>
             <a:r>
-              <a:rPr b="1" sz="3600" i="0">
+              <a:rPr sz="3600" b="1" i="0">
                 <a:solidFill>
                   <a:srgbClr val="106D8E"/>
                 </a:solidFill>
@@ -11529,7 +11825,7 @@
           <a:noFill/>
         </p:spPr>
         <p:txBody>
-          <a:bodyPr wrap="square" anchor="t" lIns="0" rIns="0" tIns="0" bIns="0">
+          <a:bodyPr wrap="square" lIns="0" tIns="0" rIns="0" bIns="0" anchor="t">
             <a:spAutoFit/>
           </a:bodyPr>
           <a:lstStyle/>
@@ -11540,7 +11836,7 @@
               </a:spcAft>
             </a:pPr>
             <a:r>
-              <a:rPr b="0" sz="1400" i="0">
+              <a:rPr sz="1400" b="0" i="0">
                 <a:solidFill>
                   <a:srgbClr val="20303C"/>
                 </a:solidFill>
@@ -11556,7 +11852,7 @@
               </a:spcAft>
             </a:pPr>
             <a:r>
-              <a:rPr b="0" sz="1400" i="0">
+              <a:rPr sz="1400" b="0" i="0">
                 <a:solidFill>
                   <a:srgbClr val="20303C"/>
                 </a:solidFill>
@@ -11584,7 +11880,7 @@
           <a:noFill/>
         </p:spPr>
         <p:txBody>
-          <a:bodyPr wrap="square" anchor="t" lIns="0" rIns="0" tIns="0" bIns="0">
+          <a:bodyPr wrap="square" lIns="0" tIns="0" rIns="0" bIns="0" anchor="t">
             <a:spAutoFit/>
           </a:bodyPr>
           <a:lstStyle/>
@@ -11595,7 +11891,7 @@
               </a:spcAft>
             </a:pPr>
             <a:r>
-              <a:rPr b="1" sz="3600" i="0">
+              <a:rPr sz="3600" b="1" i="0">
                 <a:solidFill>
                   <a:srgbClr val="106D8E"/>
                 </a:solidFill>
@@ -11623,7 +11919,7 @@
           <a:noFill/>
         </p:spPr>
         <p:txBody>
-          <a:bodyPr wrap="square" anchor="t" lIns="0" rIns="0" tIns="0" bIns="0">
+          <a:bodyPr wrap="square" lIns="0" tIns="0" rIns="0" bIns="0" anchor="t">
             <a:spAutoFit/>
           </a:bodyPr>
           <a:lstStyle/>
@@ -11634,7 +11930,7 @@
               </a:spcAft>
             </a:pPr>
             <a:r>
-              <a:rPr b="0" sz="1400" i="0">
+              <a:rPr sz="1400" b="0" i="0">
                 <a:solidFill>
                   <a:srgbClr val="20303C"/>
                 </a:solidFill>
@@ -11650,7 +11946,7 @@
               </a:spcAft>
             </a:pPr>
             <a:r>
-              <a:rPr b="0" sz="1400" i="0">
+              <a:rPr sz="1400" b="0" i="0">
                 <a:solidFill>
                   <a:srgbClr val="20303C"/>
                 </a:solidFill>
@@ -11662,6 +11958,11 @@
         </p:txBody>
       </p:sp>
     </p:spTree>
+    <p:extLst>
+      <p:ext uri="{BB962C8B-B14F-4D97-AF65-F5344CB8AC3E}">
+        <p14:creationId xmlns:p14="http://schemas.microsoft.com/office/powerpoint/2010/main" val="2672862123"/>
+      </p:ext>
+    </p:extLst>
   </p:cSld>
   <p:clrMapOvr>
     <a:masterClrMapping/>
@@ -11670,7 +11971,7 @@
 </file>
 
 <file path=ppt/slides/slide18.xml><?xml version="1.0" encoding="utf-8"?>
-<p:sld xmlns:a="http://schemas.openxmlformats.org/drawingml/2006/main" xmlns:p="http://schemas.openxmlformats.org/presentationml/2006/main" xmlns:r="http://schemas.openxmlformats.org/officeDocument/2006/relationships">
+<p:sld xmlns:a="http://schemas.openxmlformats.org/drawingml/2006/main" xmlns:r="http://schemas.openxmlformats.org/officeDocument/2006/relationships" xmlns:p="http://schemas.openxmlformats.org/presentationml/2006/main">
   <p:cSld>
     <p:spTree>
       <p:nvGrpSpPr>
@@ -11678,7 +11979,14 @@
         <p:cNvGrpSpPr/>
         <p:nvPr/>
       </p:nvGrpSpPr>
-      <p:grpSpPr/>
+      <p:grpSpPr>
+        <a:xfrm>
+          <a:off x="0" y="0"/>
+          <a:ext cx="0" cy="0"/>
+          <a:chOff x="0" y="0"/>
+          <a:chExt cx="0" cy="0"/>
+        </a:xfrm>
+      </p:grpSpPr>
       <p:pic>
         <p:nvPicPr>
           <p:cNvPr id="2" name="Picture 1" descr="logo-ituniversity.png"/>
@@ -11827,7 +12135,7 @@
           <a:noFill/>
         </p:spPr>
         <p:txBody>
-          <a:bodyPr wrap="square" anchor="t" lIns="0" rIns="0" tIns="0" bIns="0">
+          <a:bodyPr wrap="square" lIns="0" tIns="0" rIns="0" bIns="0" anchor="t">
             <a:spAutoFit/>
           </a:bodyPr>
           <a:lstStyle/>
@@ -11838,7 +12146,7 @@
               </a:spcAft>
             </a:pPr>
             <a:r>
-              <a:rPr b="0" sz="3200" i="0">
+              <a:rPr sz="3200" b="0" i="0">
                 <a:solidFill>
                   <a:srgbClr val="106D8E"/>
                 </a:solidFill>
@@ -11866,7 +12174,7 @@
           <a:noFill/>
         </p:spPr>
         <p:txBody>
-          <a:bodyPr wrap="square" anchor="t" lIns="0" rIns="0" tIns="0" bIns="0">
+          <a:bodyPr wrap="square" lIns="0" tIns="0" rIns="0" bIns="0" anchor="t">
             <a:spAutoFit/>
           </a:bodyPr>
           <a:lstStyle/>
@@ -11877,7 +12185,7 @@
               </a:spcAft>
             </a:pPr>
             <a:r>
-              <a:rPr b="0" sz="2000" i="0">
+              <a:rPr sz="2000" b="0" i="0">
                 <a:solidFill>
                   <a:srgbClr val="5A6B79"/>
                 </a:solidFill>
@@ -11940,7 +12248,7 @@
           <a:noFill/>
         </p:spPr>
         <p:txBody>
-          <a:bodyPr wrap="square" anchor="t" lIns="0" rIns="0" tIns="0" bIns="0">
+          <a:bodyPr wrap="square" lIns="0" tIns="0" rIns="0" bIns="0" anchor="t">
             <a:spAutoFit/>
           </a:bodyPr>
           <a:lstStyle/>
@@ -11951,7 +12259,7 @@
               </a:spcAft>
             </a:pPr>
             <a:r>
-              <a:rPr b="0" sz="1100" i="0">
+              <a:rPr sz="1100" b="0" i="0">
                 <a:solidFill>
                   <a:srgbClr val="106D8E"/>
                 </a:solidFill>
@@ -11979,7 +12287,7 @@
           <a:noFill/>
         </p:spPr>
         <p:txBody>
-          <a:bodyPr wrap="square" anchor="t" lIns="0" rIns="0" tIns="0" bIns="0">
+          <a:bodyPr wrap="square" lIns="0" tIns="0" rIns="0" bIns="0" anchor="t">
             <a:spAutoFit/>
           </a:bodyPr>
           <a:lstStyle/>
@@ -11990,7 +12298,7 @@
               </a:spcAft>
             </a:pPr>
             <a:r>
-              <a:rPr b="0" sz="1100" i="0">
+              <a:rPr sz="1100" b="0" i="0">
                 <a:solidFill>
                   <a:srgbClr val="106D8E"/>
                 </a:solidFill>
@@ -12020,9 +12328,27 @@
                 <a:tableStyleId>{5C22544A-7EE6-4342-B048-85BDC9FD1C3A}</a:tableStyleId>
               </a:tblPr>
               <a:tblGrid>
-                <a:gridCol w="1280160"/>
-                <a:gridCol w="8321040"/>
-                <a:gridCol w="1371600"/>
+                <a:gridCol w="1280160">
+                  <a:extLst>
+                    <a:ext uri="{9D8B030D-6E8A-4147-A177-3AD203B41FA5}">
+                      <a16:colId xmlns:a16="http://schemas.microsoft.com/office/drawing/2014/main" val="20000"/>
+                    </a:ext>
+                  </a:extLst>
+                </a:gridCol>
+                <a:gridCol w="8321040">
+                  <a:extLst>
+                    <a:ext uri="{9D8B030D-6E8A-4147-A177-3AD203B41FA5}">
+                      <a16:colId xmlns:a16="http://schemas.microsoft.com/office/drawing/2014/main" val="20001"/>
+                    </a:ext>
+                  </a:extLst>
+                </a:gridCol>
+                <a:gridCol w="1371600">
+                  <a:extLst>
+                    <a:ext uri="{9D8B030D-6E8A-4147-A177-3AD203B41FA5}">
+                      <a16:colId xmlns:a16="http://schemas.microsoft.com/office/drawing/2014/main" val="20002"/>
+                    </a:ext>
+                  </a:extLst>
+                </a:gridCol>
               </a:tblGrid>
               <a:tr h="658368">
                 <a:tc>
@@ -12032,7 +12358,7 @@
                     <a:p>
                       <a:pPr algn="l"/>
                       <a:r>
-                        <a:rPr b="1" sz="1600" i="0">
+                        <a:rPr sz="1600" b="1" i="0">
                           <a:solidFill>
                             <a:srgbClr val="FFFFFF"/>
                           </a:solidFill>
@@ -12042,7 +12368,7 @@
                       </a:r>
                     </a:p>
                   </a:txBody>
-                  <a:tcPr marL="91440" marR="91440" marT="45720" marB="45720" anchor="ctr">
+                  <a:tcPr anchor="ctr">
                     <a:solidFill>
                       <a:srgbClr val="106D8E"/>
                     </a:solidFill>
@@ -12055,7 +12381,7 @@
                     <a:p>
                       <a:pPr algn="l"/>
                       <a:r>
-                        <a:rPr b="1" sz="1600" i="0">
+                        <a:rPr sz="1600" b="1" i="0">
                           <a:solidFill>
                             <a:srgbClr val="FFFFFF"/>
                           </a:solidFill>
@@ -12065,7 +12391,7 @@
                       </a:r>
                     </a:p>
                   </a:txBody>
-                  <a:tcPr marL="91440" marR="91440" marT="45720" marB="45720" anchor="ctr">
+                  <a:tcPr anchor="ctr">
                     <a:solidFill>
                       <a:srgbClr val="106D8E"/>
                     </a:solidFill>
@@ -12078,7 +12404,7 @@
                     <a:p>
                       <a:pPr algn="l"/>
                       <a:r>
-                        <a:rPr b="1" sz="1600" i="0">
+                        <a:rPr sz="1600" b="1" i="0">
                           <a:solidFill>
                             <a:srgbClr val="FFFFFF"/>
                           </a:solidFill>
@@ -12088,12 +12414,17 @@
                       </a:r>
                     </a:p>
                   </a:txBody>
-                  <a:tcPr marL="91440" marR="91440" marT="45720" marB="45720" anchor="ctr">
+                  <a:tcPr anchor="ctr">
                     <a:solidFill>
                       <a:srgbClr val="106D8E"/>
                     </a:solidFill>
                   </a:tcPr>
                 </a:tc>
+                <a:extLst>
+                  <a:ext uri="{0D108BD9-81ED-4DB2-BD59-A6C34878D82A}">
+                    <a16:rowId xmlns:a16="http://schemas.microsoft.com/office/drawing/2014/main" val="10000"/>
+                  </a:ext>
+                </a:extLst>
               </a:tr>
               <a:tr h="658368">
                 <a:tc>
@@ -12103,7 +12434,7 @@
                     <a:p>
                       <a:pPr algn="l"/>
                       <a:r>
-                        <a:rPr b="0" sz="1600" i="0">
+                        <a:rPr sz="1600" b="0" i="0">
                           <a:solidFill>
                             <a:srgbClr val="20303C"/>
                           </a:solidFill>
@@ -12113,7 +12444,7 @@
                       </a:r>
                     </a:p>
                   </a:txBody>
-                  <a:tcPr marL="91440" marR="91440" marT="45720" marB="45720" anchor="ctr">
+                  <a:tcPr anchor="ctr">
                     <a:solidFill>
                       <a:srgbClr val="FFFFFF"/>
                     </a:solidFill>
@@ -12126,7 +12457,7 @@
                     <a:p>
                       <a:pPr algn="l"/>
                       <a:r>
-                        <a:rPr b="0" sz="1472" i="0">
+                        <a:rPr sz="1472" b="0" i="0">
                           <a:solidFill>
                             <a:srgbClr val="20303C"/>
                           </a:solidFill>
@@ -12135,7 +12466,7 @@
                         <a:t>pytest projet/code-source/tests</a:t>
                       </a:r>
                       <a:r>
-                        <a:rPr b="0" sz="1600" i="0">
+                        <a:rPr sz="1600" b="0" i="0">
                           <a:solidFill>
                             <a:srgbClr val="20303C"/>
                           </a:solidFill>
@@ -12144,7 +12475,7 @@
                         <a:t> — moteur, gouvernance, planification </a:t>
                       </a:r>
                       <a:r>
-                        <a:rPr b="1" sz="1600" i="0">
+                        <a:rPr sz="1600" b="1" i="0">
                           <a:solidFill>
                             <a:srgbClr val="20303C"/>
                           </a:solidFill>
@@ -12154,7 +12485,7 @@
                       </a:r>
                     </a:p>
                   </a:txBody>
-                  <a:tcPr marL="91440" marR="91440" marT="45720" marB="45720" anchor="ctr">
+                  <a:tcPr anchor="ctr">
                     <a:solidFill>
                       <a:srgbClr val="FFFFFF"/>
                     </a:solidFill>
@@ -12167,7 +12498,7 @@
                     <a:p>
                       <a:pPr algn="l"/>
                       <a:r>
-                        <a:rPr b="0" sz="1600" i="0">
+                        <a:rPr sz="1600" b="0" i="0">
                           <a:solidFill>
                             <a:srgbClr val="20303C"/>
                           </a:solidFill>
@@ -12177,12 +12508,17 @@
                       </a:r>
                     </a:p>
                   </a:txBody>
-                  <a:tcPr marL="91440" marR="91440" marT="45720" marB="45720" anchor="ctr">
+                  <a:tcPr anchor="ctr">
                     <a:solidFill>
                       <a:srgbClr val="FFFFFF"/>
                     </a:solidFill>
                   </a:tcPr>
                 </a:tc>
+                <a:extLst>
+                  <a:ext uri="{0D108BD9-81ED-4DB2-BD59-A6C34878D82A}">
+                    <a16:rowId xmlns:a16="http://schemas.microsoft.com/office/drawing/2014/main" val="10001"/>
+                  </a:ext>
+                </a:extLst>
               </a:tr>
               <a:tr h="658368">
                 <a:tc>
@@ -12192,7 +12528,7 @@
                     <a:p>
                       <a:pPr algn="l"/>
                       <a:r>
-                        <a:rPr b="0" sz="1600" i="0">
+                        <a:rPr sz="1600" b="0" i="0">
                           <a:solidFill>
                             <a:srgbClr val="20303C"/>
                           </a:solidFill>
@@ -12202,7 +12538,7 @@
                       </a:r>
                     </a:p>
                   </a:txBody>
-                  <a:tcPr marL="91440" marR="91440" marT="45720" marB="45720" anchor="ctr">
+                  <a:tcPr anchor="ctr">
                     <a:solidFill>
                       <a:srgbClr val="F1F7FA"/>
                     </a:solidFill>
@@ -12215,7 +12551,7 @@
                     <a:p>
                       <a:pPr algn="l"/>
                       <a:r>
-                        <a:rPr b="0" sz="1600" i="0">
+                        <a:rPr sz="1600" b="0" i="0">
                           <a:solidFill>
                             <a:srgbClr val="20303C"/>
                           </a:solidFill>
@@ -12225,7 +12561,7 @@
                       </a:r>
                     </a:p>
                   </a:txBody>
-                  <a:tcPr marL="91440" marR="91440" marT="45720" marB="45720" anchor="ctr">
+                  <a:tcPr anchor="ctr">
                     <a:solidFill>
                       <a:srgbClr val="F1F7FA"/>
                     </a:solidFill>
@@ -12238,7 +12574,7 @@
                     <a:p>
                       <a:pPr algn="l"/>
                       <a:r>
-                        <a:rPr b="0" sz="1600" i="0">
+                        <a:rPr sz="1600" b="0" i="0">
                           <a:solidFill>
                             <a:srgbClr val="20303C"/>
                           </a:solidFill>
@@ -12248,12 +12584,17 @@
                       </a:r>
                     </a:p>
                   </a:txBody>
-                  <a:tcPr marL="91440" marR="91440" marT="45720" marB="45720" anchor="ctr">
+                  <a:tcPr anchor="ctr">
                     <a:solidFill>
                       <a:srgbClr val="F1F7FA"/>
                     </a:solidFill>
                   </a:tcPr>
                 </a:tc>
+                <a:extLst>
+                  <a:ext uri="{0D108BD9-81ED-4DB2-BD59-A6C34878D82A}">
+                    <a16:rowId xmlns:a16="http://schemas.microsoft.com/office/drawing/2014/main" val="10002"/>
+                  </a:ext>
+                </a:extLst>
               </a:tr>
               <a:tr h="658368">
                 <a:tc>
@@ -12263,7 +12604,7 @@
                     <a:p>
                       <a:pPr algn="l"/>
                       <a:r>
-                        <a:rPr b="0" sz="1600" i="0">
+                        <a:rPr sz="1600" b="0" i="0">
                           <a:solidFill>
                             <a:srgbClr val="20303C"/>
                           </a:solidFill>
@@ -12273,7 +12614,7 @@
                       </a:r>
                     </a:p>
                   </a:txBody>
-                  <a:tcPr marL="91440" marR="91440" marT="45720" marB="45720" anchor="ctr">
+                  <a:tcPr anchor="ctr">
                     <a:solidFill>
                       <a:srgbClr val="FFFFFF"/>
                     </a:solidFill>
@@ -12286,7 +12627,7 @@
                     <a:p>
                       <a:pPr algn="l"/>
                       <a:r>
-                        <a:rPr b="0" sz="1472" i="0">
+                        <a:rPr sz="1472" b="0" i="0">
                           <a:solidFill>
                             <a:srgbClr val="20303C"/>
                           </a:solidFill>
@@ -12295,7 +12636,7 @@
                         <a:t>run_pipeline.sh</a:t>
                       </a:r>
                       <a:r>
-                        <a:rPr b="0" sz="1600" i="0">
+                        <a:rPr sz="1600" b="0" i="0">
                           <a:solidFill>
                             <a:srgbClr val="20303C"/>
                           </a:solidFill>
@@ -12305,7 +12646,7 @@
                       </a:r>
                     </a:p>
                   </a:txBody>
-                  <a:tcPr marL="91440" marR="91440" marT="45720" marB="45720" anchor="ctr">
+                  <a:tcPr anchor="ctr">
                     <a:solidFill>
                       <a:srgbClr val="FFFFFF"/>
                     </a:solidFill>
@@ -12318,7 +12659,7 @@
                     <a:p>
                       <a:pPr algn="l"/>
                       <a:r>
-                        <a:rPr b="0" sz="1600" i="0">
+                        <a:rPr sz="1600" b="0" i="0">
                           <a:solidFill>
                             <a:srgbClr val="20303C"/>
                           </a:solidFill>
@@ -12328,12 +12669,17 @@
                       </a:r>
                     </a:p>
                   </a:txBody>
-                  <a:tcPr marL="91440" marR="91440" marT="45720" marB="45720" anchor="ctr">
+                  <a:tcPr anchor="ctr">
                     <a:solidFill>
                       <a:srgbClr val="FFFFFF"/>
                     </a:solidFill>
                   </a:tcPr>
                 </a:tc>
+                <a:extLst>
+                  <a:ext uri="{0D108BD9-81ED-4DB2-BD59-A6C34878D82A}">
+                    <a16:rowId xmlns:a16="http://schemas.microsoft.com/office/drawing/2014/main" val="10003"/>
+                  </a:ext>
+                </a:extLst>
               </a:tr>
               <a:tr h="658368">
                 <a:tc>
@@ -12343,7 +12689,7 @@
                     <a:p>
                       <a:pPr algn="l"/>
                       <a:r>
-                        <a:rPr b="0" sz="1600" i="0">
+                        <a:rPr sz="1600" b="0" i="0">
                           <a:solidFill>
                             <a:srgbClr val="20303C"/>
                           </a:solidFill>
@@ -12353,7 +12699,7 @@
                       </a:r>
                     </a:p>
                   </a:txBody>
-                  <a:tcPr marL="91440" marR="91440" marT="45720" marB="45720" anchor="ctr">
+                  <a:tcPr anchor="ctr">
                     <a:solidFill>
                       <a:srgbClr val="F1F7FA"/>
                     </a:solidFill>
@@ -12366,7 +12712,7 @@
                     <a:p>
                       <a:pPr algn="l"/>
                       <a:r>
-                        <a:rPr b="0" sz="1600" i="0">
+                        <a:rPr sz="1600" b="0" i="0">
                           <a:solidFill>
                             <a:srgbClr val="20303C"/>
                           </a:solidFill>
@@ -12376,7 +12722,7 @@
                       </a:r>
                     </a:p>
                   </a:txBody>
-                  <a:tcPr marL="91440" marR="91440" marT="45720" marB="45720" anchor="ctr">
+                  <a:tcPr anchor="ctr">
                     <a:solidFill>
                       <a:srgbClr val="F1F7FA"/>
                     </a:solidFill>
@@ -12389,7 +12735,7 @@
                     <a:p>
                       <a:pPr algn="l"/>
                       <a:r>
-                        <a:rPr b="0" sz="1600" i="0">
+                        <a:rPr sz="1600" b="0" i="0">
                           <a:solidFill>
                             <a:srgbClr val="20303C"/>
                           </a:solidFill>
@@ -12399,12 +12745,17 @@
                       </a:r>
                     </a:p>
                   </a:txBody>
-                  <a:tcPr marL="91440" marR="91440" marT="45720" marB="45720" anchor="ctr">
+                  <a:tcPr anchor="ctr">
                     <a:solidFill>
                       <a:srgbClr val="F1F7FA"/>
                     </a:solidFill>
                   </a:tcPr>
                 </a:tc>
+                <a:extLst>
+                  <a:ext uri="{0D108BD9-81ED-4DB2-BD59-A6C34878D82A}">
+                    <a16:rowId xmlns:a16="http://schemas.microsoft.com/office/drawing/2014/main" val="10004"/>
+                  </a:ext>
+                </a:extLst>
               </a:tr>
             </a:tbl>
           </a:graphicData>
@@ -12427,7 +12778,7 @@
           <a:noFill/>
         </p:spPr>
         <p:txBody>
-          <a:bodyPr wrap="square" anchor="t" lIns="0" rIns="0" tIns="0" bIns="0">
+          <a:bodyPr wrap="square" lIns="0" tIns="0" rIns="0" bIns="0" anchor="t">
             <a:spAutoFit/>
           </a:bodyPr>
           <a:lstStyle/>
@@ -12438,7 +12789,7 @@
               </a:spcAft>
             </a:pPr>
             <a:r>
-              <a:rPr b="0" sz="1500" i="1">
+              <a:rPr sz="1500" b="0" i="1">
                 <a:solidFill>
                   <a:srgbClr val="5A6B79"/>
                 </a:solidFill>
@@ -12458,7 +12809,7 @@
 </file>
 
 <file path=ppt/slides/slide19.xml><?xml version="1.0" encoding="utf-8"?>
-<p:sld xmlns:a="http://schemas.openxmlformats.org/drawingml/2006/main" xmlns:p="http://schemas.openxmlformats.org/presentationml/2006/main" xmlns:r="http://schemas.openxmlformats.org/officeDocument/2006/relationships">
+<p:sld xmlns:a="http://schemas.openxmlformats.org/drawingml/2006/main" xmlns:r="http://schemas.openxmlformats.org/officeDocument/2006/relationships" xmlns:p="http://schemas.openxmlformats.org/presentationml/2006/main">
   <p:cSld>
     <p:spTree>
       <p:nvGrpSpPr>
@@ -12466,7 +12817,14 @@
         <p:cNvGrpSpPr/>
         <p:nvPr/>
       </p:nvGrpSpPr>
-      <p:grpSpPr/>
+      <p:grpSpPr>
+        <a:xfrm>
+          <a:off x="0" y="0"/>
+          <a:ext cx="0" cy="0"/>
+          <a:chOff x="0" y="0"/>
+          <a:chExt cx="0" cy="0"/>
+        </a:xfrm>
+      </p:grpSpPr>
       <p:pic>
         <p:nvPicPr>
           <p:cNvPr id="2" name="Picture 1" descr="logo-ituniversity.png"/>
@@ -12615,7 +12973,7 @@
           <a:noFill/>
         </p:spPr>
         <p:txBody>
-          <a:bodyPr wrap="square" anchor="t" lIns="0" rIns="0" tIns="0" bIns="0">
+          <a:bodyPr wrap="square" lIns="0" tIns="0" rIns="0" bIns="0" anchor="t">
             <a:spAutoFit/>
           </a:bodyPr>
           <a:lstStyle/>
@@ -12626,7 +12984,7 @@
               </a:spcAft>
             </a:pPr>
             <a:r>
-              <a:rPr b="0" sz="3200" i="0">
+              <a:rPr sz="3200" b="0" i="0">
                 <a:solidFill>
                   <a:srgbClr val="106D8E"/>
                 </a:solidFill>
@@ -12689,7 +13047,7 @@
           <a:noFill/>
         </p:spPr>
         <p:txBody>
-          <a:bodyPr wrap="square" anchor="t" lIns="0" rIns="0" tIns="0" bIns="0">
+          <a:bodyPr wrap="square" lIns="0" tIns="0" rIns="0" bIns="0" anchor="t">
             <a:spAutoFit/>
           </a:bodyPr>
           <a:lstStyle/>
@@ -12700,7 +13058,7 @@
               </a:spcAft>
             </a:pPr>
             <a:r>
-              <a:rPr b="0" sz="1100" i="0">
+              <a:rPr sz="1100" b="0" i="0">
                 <a:solidFill>
                   <a:srgbClr val="106D8E"/>
                 </a:solidFill>
@@ -12728,7 +13086,7 @@
           <a:noFill/>
         </p:spPr>
         <p:txBody>
-          <a:bodyPr wrap="square" anchor="t" lIns="0" rIns="0" tIns="0" bIns="0">
+          <a:bodyPr wrap="square" lIns="0" tIns="0" rIns="0" bIns="0" anchor="t">
             <a:spAutoFit/>
           </a:bodyPr>
           <a:lstStyle/>
@@ -12739,7 +13097,7 @@
               </a:spcAft>
             </a:pPr>
             <a:r>
-              <a:rPr b="0" sz="1100" i="0">
+              <a:rPr sz="1100" b="0" i="0">
                 <a:solidFill>
                   <a:srgbClr val="106D8E"/>
                 </a:solidFill>
@@ -12789,12 +13147,12 @@
           </a:fontRef>
         </p:style>
         <p:txBody>
-          <a:bodyPr rtlCol="0" anchor="ctr" wrap="square" lIns="109728" rIns="109728" tIns="109728" bIns="109728"/>
+          <a:bodyPr wrap="square" lIns="109728" tIns="109728" rIns="109728" bIns="109728" rtlCol="0" anchor="ctr"/>
           <a:lstStyle/>
           <a:p>
             <a:pPr algn="ctr"/>
             <a:r>
-              <a:rPr b="1" sz="1700" i="0">
+              <a:rPr sz="1700" b="1" i="0">
                 <a:solidFill>
                   <a:srgbClr val="0B2E4F"/>
                 </a:solidFill>
@@ -12803,7 +13161,7 @@
               <a:t>Enrichir le mapping FHIR → </a:t>
             </a:r>
             <a:r>
-              <a:rPr b="1" sz="1564" i="0">
+              <a:rPr sz="1564" b="1" i="0">
                 <a:solidFill>
                   <a:srgbClr val="0B2E4F"/>
                 </a:solidFill>
@@ -12853,12 +13211,12 @@
           </a:fontRef>
         </p:style>
         <p:txBody>
-          <a:bodyPr rtlCol="0" anchor="ctr" wrap="square" lIns="109728" rIns="109728" tIns="109728" bIns="109728"/>
+          <a:bodyPr wrap="square" lIns="109728" tIns="109728" rIns="109728" bIns="109728" rtlCol="0" anchor="ctr"/>
           <a:lstStyle/>
           <a:p>
             <a:pPr algn="ctr"/>
             <a:r>
-              <a:rPr b="1" sz="1700" i="0">
+              <a:rPr sz="1700" b="1" i="0">
                 <a:solidFill>
                   <a:srgbClr val="0B2E4F"/>
                 </a:solidFill>
@@ -12908,12 +13266,12 @@
           </a:fontRef>
         </p:style>
         <p:txBody>
-          <a:bodyPr rtlCol="0" anchor="ctr" wrap="square" lIns="109728" rIns="109728" tIns="109728" bIns="109728"/>
+          <a:bodyPr wrap="square" lIns="109728" tIns="109728" rIns="109728" bIns="109728" rtlCol="0" anchor="ctr"/>
           <a:lstStyle/>
           <a:p>
             <a:pPr algn="ctr"/>
             <a:r>
-              <a:rPr b="1" sz="1700" i="0">
+              <a:rPr sz="1700" b="1" i="0">
                 <a:solidFill>
                   <a:srgbClr val="0B2E4F"/>
                 </a:solidFill>
@@ -12963,12 +13321,12 @@
           </a:fontRef>
         </p:style>
         <p:txBody>
-          <a:bodyPr rtlCol="0" anchor="ctr" wrap="square" lIns="109728" rIns="109728" tIns="109728" bIns="109728"/>
+          <a:bodyPr wrap="square" lIns="109728" tIns="109728" rIns="109728" bIns="109728" rtlCol="0" anchor="ctr"/>
           <a:lstStyle/>
           <a:p>
             <a:pPr algn="ctr"/>
             <a:r>
-              <a:rPr b="1" sz="1700" i="0">
+              <a:rPr sz="1700" b="1" i="0">
                 <a:solidFill>
                   <a:srgbClr val="0B2E4F"/>
                 </a:solidFill>
@@ -13018,12 +13376,12 @@
           </a:fontRef>
         </p:style>
         <p:txBody>
-          <a:bodyPr rtlCol="0" anchor="ctr" wrap="square" lIns="109728" rIns="109728" tIns="109728" bIns="109728"/>
+          <a:bodyPr wrap="square" lIns="109728" tIns="109728" rIns="109728" bIns="109728" rtlCol="0" anchor="ctr"/>
           <a:lstStyle/>
           <a:p>
             <a:pPr algn="ctr"/>
             <a:r>
-              <a:rPr b="1" sz="1700" i="0">
+              <a:rPr sz="1700" b="1" i="0">
                 <a:solidFill>
                   <a:srgbClr val="0B2E4F"/>
                 </a:solidFill>
@@ -13073,12 +13431,12 @@
           </a:fontRef>
         </p:style>
         <p:txBody>
-          <a:bodyPr rtlCol="0" anchor="ctr" wrap="square" lIns="109728" rIns="109728" tIns="109728" bIns="109728"/>
+          <a:bodyPr wrap="square" lIns="109728" tIns="109728" rIns="109728" bIns="109728" rtlCol="0" anchor="ctr"/>
           <a:lstStyle/>
           <a:p>
             <a:pPr algn="ctr"/>
             <a:r>
-              <a:rPr b="1" sz="1700" i="0">
+              <a:rPr sz="1700" b="1" i="0">
                 <a:solidFill>
                   <a:srgbClr val="0B2E4F"/>
                 </a:solidFill>
@@ -13128,12 +13486,12 @@
           </a:fontRef>
         </p:style>
         <p:txBody>
-          <a:bodyPr rtlCol="0" anchor="ctr" wrap="square" lIns="274320" rIns="274320" tIns="274320" bIns="274320"/>
+          <a:bodyPr wrap="square" lIns="274320" tIns="274320" rIns="274320" bIns="274320" rtlCol="0" anchor="ctr"/>
           <a:lstStyle/>
           <a:p>
             <a:pPr algn="ctr"/>
             <a:r>
-              <a:rPr b="0" sz="1600" i="0">
+              <a:rPr sz="1600" b="0" i="0">
                 <a:solidFill>
                   <a:srgbClr val="0B2E4F"/>
                 </a:solidFill>
@@ -13142,7 +13500,7 @@
               <a:t>Et avant toute mise en production : vérifier le </a:t>
             </a:r>
             <a:r>
-              <a:rPr b="1" sz="1600" i="0">
+              <a:rPr sz="1600" b="1" i="0">
                 <a:solidFill>
                   <a:srgbClr val="0B2E4F"/>
                 </a:solidFill>
@@ -13151,7 +13509,7 @@
               <a:t>droit malgache</a:t>
             </a:r>
             <a:r>
-              <a:rPr b="0" sz="1600" i="0">
+              <a:rPr sz="1600" b="0" i="0">
                 <a:solidFill>
                   <a:srgbClr val="0B2E4F"/>
                 </a:solidFill>
@@ -13171,7 +13529,7 @@
 </file>
 
 <file path=ppt/slides/slide2.xml><?xml version="1.0" encoding="utf-8"?>
-<p:sld xmlns:a="http://schemas.openxmlformats.org/drawingml/2006/main" xmlns:p="http://schemas.openxmlformats.org/presentationml/2006/main" xmlns:r="http://schemas.openxmlformats.org/officeDocument/2006/relationships">
+<p:sld xmlns:a="http://schemas.openxmlformats.org/drawingml/2006/main" xmlns:r="http://schemas.openxmlformats.org/officeDocument/2006/relationships" xmlns:p="http://schemas.openxmlformats.org/presentationml/2006/main">
   <p:cSld>
     <p:spTree>
       <p:nvGrpSpPr>
@@ -13179,7 +13537,14 @@
         <p:cNvGrpSpPr/>
         <p:nvPr/>
       </p:nvGrpSpPr>
-      <p:grpSpPr/>
+      <p:grpSpPr>
+        <a:xfrm>
+          <a:off x="0" y="0"/>
+          <a:ext cx="0" cy="0"/>
+          <a:chOff x="0" y="0"/>
+          <a:chExt cx="0" cy="0"/>
+        </a:xfrm>
+      </p:grpSpPr>
       <p:pic>
         <p:nvPicPr>
           <p:cNvPr id="2" name="Picture 1" descr="logo-ituniversity.png"/>
@@ -13328,7 +13693,7 @@
           <a:noFill/>
         </p:spPr>
         <p:txBody>
-          <a:bodyPr wrap="square" anchor="t" lIns="0" rIns="0" tIns="0" bIns="0">
+          <a:bodyPr wrap="square" lIns="0" tIns="0" rIns="0" bIns="0" anchor="t">
             <a:spAutoFit/>
           </a:bodyPr>
           <a:lstStyle/>
@@ -13339,7 +13704,7 @@
               </a:spcAft>
             </a:pPr>
             <a:r>
-              <a:rPr b="0" sz="3200" i="0">
+              <a:rPr sz="3200" b="0" i="0">
                 <a:solidFill>
                   <a:srgbClr val="106D8E"/>
                 </a:solidFill>
@@ -13402,7 +13767,7 @@
           <a:noFill/>
         </p:spPr>
         <p:txBody>
-          <a:bodyPr wrap="square" anchor="t" lIns="0" rIns="0" tIns="0" bIns="0">
+          <a:bodyPr wrap="square" lIns="0" tIns="0" rIns="0" bIns="0" anchor="t">
             <a:spAutoFit/>
           </a:bodyPr>
           <a:lstStyle/>
@@ -13413,7 +13778,7 @@
               </a:spcAft>
             </a:pPr>
             <a:r>
-              <a:rPr b="0" sz="1100" i="0">
+              <a:rPr sz="1100" b="0" i="0">
                 <a:solidFill>
                   <a:srgbClr val="106D8E"/>
                 </a:solidFill>
@@ -13441,7 +13806,7 @@
           <a:noFill/>
         </p:spPr>
         <p:txBody>
-          <a:bodyPr wrap="square" anchor="t" lIns="0" rIns="0" tIns="0" bIns="0">
+          <a:bodyPr wrap="square" lIns="0" tIns="0" rIns="0" bIns="0" anchor="t">
             <a:spAutoFit/>
           </a:bodyPr>
           <a:lstStyle/>
@@ -13452,7 +13817,7 @@
               </a:spcAft>
             </a:pPr>
             <a:r>
-              <a:rPr b="0" sz="1100" i="0">
+              <a:rPr sz="1100" b="0" i="0">
                 <a:solidFill>
                   <a:srgbClr val="106D8E"/>
                 </a:solidFill>
@@ -13502,12 +13867,12 @@
           </a:fontRef>
         </p:style>
         <p:txBody>
-          <a:bodyPr rtlCol="0" anchor="ctr" wrap="square" lIns="109728" rIns="109728" tIns="109728" bIns="109728"/>
+          <a:bodyPr wrap="square" lIns="109728" tIns="109728" rIns="109728" bIns="109728" rtlCol="0" anchor="ctr"/>
           <a:lstStyle/>
           <a:p>
             <a:pPr algn="ctr"/>
             <a:r>
-              <a:rPr b="1" sz="1600" i="0">
+              <a:rPr sz="1600" b="1" i="0">
                 <a:solidFill>
                   <a:srgbClr val="0B2E4F"/>
                 </a:solidFill>
@@ -13557,12 +13922,12 @@
           </a:fontRef>
         </p:style>
         <p:txBody>
-          <a:bodyPr rtlCol="0" anchor="ctr" wrap="square" lIns="109728" rIns="109728" tIns="109728" bIns="109728"/>
+          <a:bodyPr wrap="square" lIns="109728" tIns="109728" rIns="109728" bIns="109728" rtlCol="0" anchor="ctr"/>
           <a:lstStyle/>
           <a:p>
             <a:pPr algn="ctr"/>
             <a:r>
-              <a:rPr b="1" sz="1600" i="0">
+              <a:rPr sz="1600" b="1" i="0">
                 <a:solidFill>
                   <a:srgbClr val="0B2E4F"/>
                 </a:solidFill>
@@ -13612,12 +13977,12 @@
           </a:fontRef>
         </p:style>
         <p:txBody>
-          <a:bodyPr rtlCol="0" anchor="ctr" wrap="square" lIns="109728" rIns="109728" tIns="109728" bIns="109728"/>
+          <a:bodyPr wrap="square" lIns="109728" tIns="109728" rIns="109728" bIns="109728" rtlCol="0" anchor="ctr"/>
           <a:lstStyle/>
           <a:p>
             <a:pPr algn="ctr"/>
             <a:r>
-              <a:rPr b="1" sz="1800" i="0">
+              <a:rPr sz="1800" b="1" i="0">
                 <a:solidFill>
                   <a:srgbClr val="0B2E4F"/>
                 </a:solidFill>
@@ -13667,12 +14032,12 @@
           </a:fontRef>
         </p:style>
         <p:txBody>
-          <a:bodyPr rtlCol="0" anchor="ctr" wrap="square" lIns="109728" rIns="109728" tIns="109728" bIns="109728"/>
+          <a:bodyPr wrap="square" lIns="109728" tIns="109728" rIns="109728" bIns="109728" rtlCol="0" anchor="ctr"/>
           <a:lstStyle/>
           <a:p>
             <a:pPr algn="ctr"/>
             <a:r>
-              <a:rPr b="1" sz="1700" i="0">
+              <a:rPr sz="1700" b="1" i="0">
                 <a:solidFill>
                   <a:srgbClr val="FFFFFF"/>
                 </a:solidFill>
@@ -13700,7 +14065,7 @@
           <a:noFill/>
         </p:spPr>
         <p:txBody>
-          <a:bodyPr wrap="square" anchor="t" lIns="0" rIns="0" tIns="0" bIns="0">
+          <a:bodyPr wrap="square" lIns="0" tIns="0" rIns="0" bIns="0" anchor="t">
             <a:spAutoFit/>
           </a:bodyPr>
           <a:lstStyle/>
@@ -13711,7 +14076,7 @@
               </a:spcAft>
             </a:pPr>
             <a:r>
-              <a:rPr b="1" sz="1800" i="0">
+              <a:rPr sz="1800" b="1" i="0">
                 <a:solidFill>
                   <a:srgbClr val="0B2E4F"/>
                 </a:solidFill>
@@ -13739,19 +14104,19 @@
           <a:noFill/>
         </p:spPr>
         <p:txBody>
-          <a:bodyPr wrap="square" anchor="t" lIns="0" rIns="0" tIns="0" bIns="0">
+          <a:bodyPr wrap="square" lIns="0" tIns="0" rIns="0" bIns="0" anchor="t">
             <a:spAutoFit/>
           </a:bodyPr>
           <a:lstStyle/>
           <a:p>
-            <a:pPr algn="l" marL="223520" indent="-223520">
+            <a:pPr marL="223520" indent="-223520" algn="l">
               <a:spcAft>
                 <a:spcPts val="600"/>
               </a:spcAft>
               <a:buChar char="•"/>
             </a:pPr>
             <a:r>
-              <a:rPr b="0" sz="1600" i="0">
+              <a:rPr sz="1600" b="0" i="0">
                 <a:solidFill>
                   <a:srgbClr val="20303C"/>
                 </a:solidFill>
@@ -13761,14 +14126,14 @@
             </a:r>
           </a:p>
           <a:p>
-            <a:pPr algn="l" marL="223520" indent="-223520">
+            <a:pPr marL="223520" indent="-223520" algn="l">
               <a:spcAft>
                 <a:spcPts val="600"/>
               </a:spcAft>
               <a:buChar char="•"/>
             </a:pPr>
             <a:r>
-              <a:rPr b="0" sz="1600" i="0">
+              <a:rPr sz="1600" b="0" i="0">
                 <a:solidFill>
                   <a:srgbClr val="20303C"/>
                 </a:solidFill>
@@ -13778,14 +14143,14 @@
             </a:r>
           </a:p>
           <a:p>
-            <a:pPr algn="l" marL="223520" indent="-223520">
+            <a:pPr marL="223520" indent="-223520" algn="l">
               <a:spcAft>
                 <a:spcPts val="600"/>
               </a:spcAft>
               <a:buChar char="•"/>
             </a:pPr>
             <a:r>
-              <a:rPr b="0" sz="1600" i="0">
+              <a:rPr sz="1600" b="0" i="0">
                 <a:solidFill>
                   <a:srgbClr val="20303C"/>
                 </a:solidFill>
@@ -13795,14 +14160,14 @@
             </a:r>
           </a:p>
           <a:p>
-            <a:pPr algn="l" marL="223520" indent="-223520">
+            <a:pPr marL="223520" indent="-223520" algn="l">
               <a:spcAft>
                 <a:spcPts val="600"/>
               </a:spcAft>
               <a:buChar char="•"/>
             </a:pPr>
             <a:r>
-              <a:rPr b="0" sz="1600" i="0">
+              <a:rPr sz="1600" b="0" i="0">
                 <a:solidFill>
                   <a:srgbClr val="20303C"/>
                 </a:solidFill>
@@ -13811,7 +14176,7 @@
               <a:t>Business Partner </a:t>
             </a:r>
             <a:r>
-              <a:rPr b="1" sz="1600" i="0">
+              <a:rPr sz="1600" b="1" i="0">
                 <a:solidFill>
                   <a:srgbClr val="20303C"/>
                 </a:solidFill>
@@ -13820,7 +14185,7 @@
               <a:t>Siemens Healthineers</a:t>
             </a:r>
             <a:r>
-              <a:rPr b="0" sz="1600" i="0">
+              <a:rPr sz="1600" b="0" i="0">
                 <a:solidFill>
                   <a:srgbClr val="20303C"/>
                 </a:solidFill>
@@ -13876,6 +14241,7 @@
           <a:lstStyle/>
           <a:p>
             <a:pPr algn="ctr"/>
+            <a:endParaRPr/>
           </a:p>
         </p:txBody>
       </p:sp>
@@ -13946,6 +14312,7 @@
           <a:lstStyle/>
           <a:p>
             <a:pPr algn="ctr"/>
+            <a:endParaRPr/>
           </a:p>
         </p:txBody>
       </p:sp>
@@ -13966,7 +14333,7 @@
           <a:noFill/>
         </p:spPr>
         <p:txBody>
-          <a:bodyPr wrap="square" anchor="t" lIns="0" rIns="0" tIns="0" bIns="0">
+          <a:bodyPr wrap="square" lIns="0" tIns="0" rIns="0" bIns="0" anchor="t">
             <a:spAutoFit/>
           </a:bodyPr>
           <a:lstStyle/>
@@ -13977,7 +14344,7 @@
               </a:spcAft>
             </a:pPr>
             <a:r>
-              <a:rPr b="1" sz="1700" i="0">
+              <a:rPr sz="1700" b="1" i="0">
                 <a:solidFill>
                   <a:srgbClr val="0B2E4F"/>
                 </a:solidFill>
@@ -14005,7 +14372,7 @@
           <a:noFill/>
         </p:spPr>
         <p:txBody>
-          <a:bodyPr wrap="square" anchor="t" lIns="0" rIns="0" tIns="0" bIns="0">
+          <a:bodyPr wrap="square" lIns="0" tIns="0" rIns="0" bIns="0" anchor="t">
             <a:spAutoFit/>
           </a:bodyPr>
           <a:lstStyle/>
@@ -14016,7 +14383,7 @@
               </a:spcAft>
             </a:pPr>
             <a:r>
-              <a:rPr b="0" sz="1500" i="0">
+              <a:rPr sz="1500" b="0" i="0">
                 <a:solidFill>
                   <a:srgbClr val="20303C"/>
                 </a:solidFill>
@@ -14032,7 +14399,7 @@
               </a:spcAft>
             </a:pPr>
             <a:r>
-              <a:rPr b="1" sz="1500" i="0">
+              <a:rPr sz="1500" b="1" i="0">
                 <a:solidFill>
                   <a:srgbClr val="20303C"/>
                 </a:solidFill>
@@ -14041,7 +14408,7 @@
               <a:t>Lieu du stage</a:t>
             </a:r>
             <a:r>
-              <a:rPr b="0" sz="1500" i="0">
+              <a:rPr sz="1500" b="0" i="0">
                 <a:solidFill>
                   <a:srgbClr val="20303C"/>
                 </a:solidFill>
@@ -14061,7 +14428,7 @@
 </file>
 
 <file path=ppt/slides/slide20.xml><?xml version="1.0" encoding="utf-8"?>
-<p:sld xmlns:a="http://schemas.openxmlformats.org/drawingml/2006/main" xmlns:p="http://schemas.openxmlformats.org/presentationml/2006/main" xmlns:r="http://schemas.openxmlformats.org/officeDocument/2006/relationships">
+<p:sld xmlns:a="http://schemas.openxmlformats.org/drawingml/2006/main" xmlns:r="http://schemas.openxmlformats.org/officeDocument/2006/relationships" xmlns:p="http://schemas.openxmlformats.org/presentationml/2006/main">
   <p:cSld>
     <p:spTree>
       <p:nvGrpSpPr>
@@ -14069,7 +14436,14 @@
         <p:cNvGrpSpPr/>
         <p:nvPr/>
       </p:nvGrpSpPr>
-      <p:grpSpPr/>
+      <p:grpSpPr>
+        <a:xfrm>
+          <a:off x="0" y="0"/>
+          <a:ext cx="0" cy="0"/>
+          <a:chOff x="0" y="0"/>
+          <a:chExt cx="0" cy="0"/>
+        </a:xfrm>
+      </p:grpSpPr>
       <p:pic>
         <p:nvPicPr>
           <p:cNvPr id="2" name="Picture 1" descr="logo-ituniversity.png"/>
@@ -14218,7 +14592,7 @@
           <a:noFill/>
         </p:spPr>
         <p:txBody>
-          <a:bodyPr wrap="square" anchor="t" lIns="0" rIns="0" tIns="0" bIns="0">
+          <a:bodyPr wrap="square" lIns="0" tIns="0" rIns="0" bIns="0" anchor="t">
             <a:spAutoFit/>
           </a:bodyPr>
           <a:lstStyle/>
@@ -14229,7 +14603,7 @@
               </a:spcAft>
             </a:pPr>
             <a:r>
-              <a:rPr b="0" sz="3200" i="0">
+              <a:rPr sz="3200" b="0" i="0">
                 <a:solidFill>
                   <a:srgbClr val="106D8E"/>
                 </a:solidFill>
@@ -14292,7 +14666,7 @@
           <a:noFill/>
         </p:spPr>
         <p:txBody>
-          <a:bodyPr wrap="square" anchor="t" lIns="0" rIns="0" tIns="0" bIns="0">
+          <a:bodyPr wrap="square" lIns="0" tIns="0" rIns="0" bIns="0" anchor="t">
             <a:spAutoFit/>
           </a:bodyPr>
           <a:lstStyle/>
@@ -14303,7 +14677,7 @@
               </a:spcAft>
             </a:pPr>
             <a:r>
-              <a:rPr b="0" sz="1100" i="0">
+              <a:rPr sz="1100" b="0" i="0">
                 <a:solidFill>
                   <a:srgbClr val="106D8E"/>
                 </a:solidFill>
@@ -14331,7 +14705,7 @@
           <a:noFill/>
         </p:spPr>
         <p:txBody>
-          <a:bodyPr wrap="square" anchor="t" lIns="0" rIns="0" tIns="0" bIns="0">
+          <a:bodyPr wrap="square" lIns="0" tIns="0" rIns="0" bIns="0" anchor="t">
             <a:spAutoFit/>
           </a:bodyPr>
           <a:lstStyle/>
@@ -14342,7 +14716,7 @@
               </a:spcAft>
             </a:pPr>
             <a:r>
-              <a:rPr b="0" sz="1100" i="0">
+              <a:rPr sz="1100" b="0" i="0">
                 <a:solidFill>
                   <a:srgbClr val="106D8E"/>
                 </a:solidFill>
@@ -14392,12 +14766,12 @@
           </a:fontRef>
         </p:style>
         <p:txBody>
-          <a:bodyPr rtlCol="0" anchor="ctr" wrap="square" lIns="109728" rIns="109728" tIns="109728" bIns="109728"/>
+          <a:bodyPr wrap="square" lIns="109728" tIns="109728" rIns="109728" bIns="109728" rtlCol="0" anchor="ctr"/>
           <a:lstStyle/>
           <a:p>
             <a:pPr algn="ctr"/>
             <a:r>
-              <a:rPr b="1" sz="1700" i="0">
+              <a:rPr sz="1700" b="1" i="0">
                 <a:solidFill>
                   <a:srgbClr val="0B2E4F"/>
                 </a:solidFill>
@@ -14406,7 +14780,7 @@
               <a:t>Centraliser</a:t>
             </a:r>
             <a:r>
-              <a:rPr b="0" sz="1700" i="0">
+              <a:rPr sz="1700" b="0" i="0">
                 <a:solidFill>
                   <a:srgbClr val="0B2E4F"/>
                 </a:solidFill>
@@ -14456,12 +14830,12 @@
           </a:fontRef>
         </p:style>
         <p:txBody>
-          <a:bodyPr rtlCol="0" anchor="ctr" wrap="square" lIns="109728" rIns="109728" tIns="109728" bIns="109728"/>
+          <a:bodyPr wrap="square" lIns="109728" tIns="109728" rIns="109728" bIns="109728" rtlCol="0" anchor="ctr"/>
           <a:lstStyle/>
           <a:p>
             <a:pPr algn="ctr"/>
             <a:r>
-              <a:rPr b="1" sz="1700" i="0">
+              <a:rPr sz="1700" b="1" i="0">
                 <a:solidFill>
                   <a:srgbClr val="0B2E4F"/>
                 </a:solidFill>
@@ -14470,7 +14844,7 @@
               <a:t>Normaliser</a:t>
             </a:r>
             <a:r>
-              <a:rPr b="0" sz="1700" i="0">
+              <a:rPr sz="1700" b="0" i="0">
                 <a:solidFill>
                   <a:srgbClr val="0B2E4F"/>
                 </a:solidFill>
@@ -14520,12 +14894,12 @@
           </a:fontRef>
         </p:style>
         <p:txBody>
-          <a:bodyPr rtlCol="0" anchor="ctr" wrap="square" lIns="109728" rIns="109728" tIns="109728" bIns="109728"/>
+          <a:bodyPr wrap="square" lIns="109728" tIns="109728" rIns="109728" bIns="109728" rtlCol="0" anchor="ctr"/>
           <a:lstStyle/>
           <a:p>
             <a:pPr algn="ctr"/>
             <a:r>
-              <a:rPr b="1" sz="1700" i="0">
+              <a:rPr sz="1700" b="1" i="0">
                 <a:solidFill>
                   <a:srgbClr val="0B2E4F"/>
                 </a:solidFill>
@@ -14534,7 +14908,7 @@
               <a:t>Dédupliquer</a:t>
             </a:r>
             <a:r>
-              <a:rPr b="0" sz="1700" i="0">
+              <a:rPr sz="1700" b="0" i="0">
                 <a:solidFill>
                   <a:srgbClr val="0B2E4F"/>
                 </a:solidFill>
@@ -14584,12 +14958,12 @@
           </a:fontRef>
         </p:style>
         <p:txBody>
-          <a:bodyPr rtlCol="0" anchor="ctr" wrap="square" lIns="109728" rIns="109728" tIns="109728" bIns="109728"/>
+          <a:bodyPr wrap="square" lIns="109728" tIns="109728" rIns="109728" bIns="109728" rtlCol="0" anchor="ctr"/>
           <a:lstStyle/>
           <a:p>
             <a:pPr algn="ctr"/>
             <a:r>
-              <a:rPr b="1" sz="1700" i="0">
+              <a:rPr sz="1700" b="1" i="0">
                 <a:solidFill>
                   <a:srgbClr val="0B2E4F"/>
                 </a:solidFill>
@@ -14598,7 +14972,7 @@
               <a:t>Gouverner</a:t>
             </a:r>
             <a:r>
-              <a:rPr b="0" sz="1700" i="0">
+              <a:rPr sz="1700" b="0" i="0">
                 <a:solidFill>
                   <a:srgbClr val="0B2E4F"/>
                 </a:solidFill>
@@ -14648,12 +15022,12 @@
           </a:fontRef>
         </p:style>
         <p:txBody>
-          <a:bodyPr rtlCol="0" anchor="ctr" wrap="square" lIns="274320" rIns="274320" tIns="274320" bIns="274320"/>
+          <a:bodyPr wrap="square" lIns="274320" tIns="274320" rIns="274320" bIns="274320" rtlCol="0" anchor="ctr"/>
           <a:lstStyle/>
           <a:p>
             <a:pPr algn="ctr"/>
             <a:r>
-              <a:rPr b="0" sz="1800" i="0">
+              <a:rPr sz="1800" b="0" i="0">
                 <a:solidFill>
                   <a:srgbClr val="FFFFFF"/>
                 </a:solidFill>
@@ -14662,7 +15036,7 @@
               <a:t>Une démarche progressive — </a:t>
             </a:r>
             <a:r>
-              <a:rPr b="1" sz="1800" i="0">
+              <a:rPr sz="1800" b="1" i="0">
                 <a:solidFill>
                   <a:srgbClr val="FFFFFF"/>
                 </a:solidFill>
@@ -14671,7 +15045,7 @@
               <a:t>MVP → Spark → Big Data</a:t>
             </a:r>
             <a:r>
-              <a:rPr b="0" sz="1800" i="0">
+              <a:rPr sz="1800" b="0" i="0">
                 <a:solidFill>
                   <a:srgbClr val="FFFFFF"/>
                 </a:solidFill>
@@ -14691,7 +15065,7 @@
 </file>
 
 <file path=ppt/slides/slide21.xml><?xml version="1.0" encoding="utf-8"?>
-<p:sld xmlns:a="http://schemas.openxmlformats.org/drawingml/2006/main" xmlns:p="http://schemas.openxmlformats.org/presentationml/2006/main" xmlns:r="http://schemas.openxmlformats.org/officeDocument/2006/relationships">
+<p:sld xmlns:a="http://schemas.openxmlformats.org/drawingml/2006/main" xmlns:r="http://schemas.openxmlformats.org/officeDocument/2006/relationships" xmlns:p="http://schemas.openxmlformats.org/presentationml/2006/main">
   <p:cSld>
     <p:spTree>
       <p:nvGrpSpPr>
@@ -14699,7 +15073,14 @@
         <p:cNvGrpSpPr/>
         <p:nvPr/>
       </p:nvGrpSpPr>
-      <p:grpSpPr/>
+      <p:grpSpPr>
+        <a:xfrm>
+          <a:off x="0" y="0"/>
+          <a:ext cx="0" cy="0"/>
+          <a:chOff x="0" y="0"/>
+          <a:chExt cx="0" cy="0"/>
+        </a:xfrm>
+      </p:grpSpPr>
       <p:pic>
         <p:nvPicPr>
           <p:cNvPr id="2" name="Picture 1" descr="logo-ituniversity.png"/>
@@ -14883,7 +15264,7 @@
           <a:noFill/>
         </p:spPr>
         <p:txBody>
-          <a:bodyPr wrap="square" anchor="t" lIns="0" rIns="0" tIns="0" bIns="0">
+          <a:bodyPr wrap="square" lIns="0" tIns="0" rIns="0" bIns="0" anchor="t">
             <a:spAutoFit/>
           </a:bodyPr>
           <a:lstStyle/>
@@ -14894,7 +15275,7 @@
               </a:spcAft>
             </a:pPr>
             <a:r>
-              <a:rPr b="0" sz="1100" i="0">
+              <a:rPr sz="1100" b="0" i="0">
                 <a:solidFill>
                   <a:srgbClr val="106D8E"/>
                 </a:solidFill>
@@ -14922,7 +15303,7 @@
           <a:noFill/>
         </p:spPr>
         <p:txBody>
-          <a:bodyPr wrap="square" anchor="t" lIns="0" rIns="0" tIns="0" bIns="0">
+          <a:bodyPr wrap="square" lIns="0" tIns="0" rIns="0" bIns="0" anchor="t">
             <a:spAutoFit/>
           </a:bodyPr>
           <a:lstStyle/>
@@ -14933,7 +15314,7 @@
               </a:spcAft>
             </a:pPr>
             <a:r>
-              <a:rPr b="0" sz="1100" i="0">
+              <a:rPr sz="1100" b="0" i="0">
                 <a:solidFill>
                   <a:srgbClr val="106D8E"/>
                 </a:solidFill>
@@ -14961,7 +15342,7 @@
           <a:noFill/>
         </p:spPr>
         <p:txBody>
-          <a:bodyPr wrap="square" anchor="t" lIns="0" rIns="0" tIns="0" bIns="0">
+          <a:bodyPr wrap="square" lIns="0" tIns="0" rIns="0" bIns="0" anchor="t">
             <a:spAutoFit/>
           </a:bodyPr>
           <a:lstStyle/>
@@ -14972,7 +15353,7 @@
               </a:spcAft>
             </a:pPr>
             <a:r>
-              <a:rPr b="0" sz="5400" i="0">
+              <a:rPr sz="5400" b="0" i="0">
                 <a:solidFill>
                   <a:srgbClr val="106D8E"/>
                 </a:solidFill>
@@ -15000,7 +15381,7 @@
           <a:noFill/>
         </p:spPr>
         <p:txBody>
-          <a:bodyPr wrap="square" anchor="t" lIns="0" rIns="0" tIns="0" bIns="0">
+          <a:bodyPr wrap="square" lIns="0" tIns="0" rIns="0" bIns="0" anchor="t">
             <a:spAutoFit/>
           </a:bodyPr>
           <a:lstStyle/>
@@ -15011,7 +15392,7 @@
               </a:spcAft>
             </a:pPr>
             <a:r>
-              <a:rPr b="0" sz="2200" i="1">
+              <a:rPr sz="2200" b="0" i="1">
                 <a:solidFill>
                   <a:srgbClr val="5A6B79"/>
                 </a:solidFill>
@@ -15031,7 +15412,7 @@
 </file>
 
 <file path=ppt/slides/slide3.xml><?xml version="1.0" encoding="utf-8"?>
-<p:sld xmlns:a="http://schemas.openxmlformats.org/drawingml/2006/main" xmlns:p="http://schemas.openxmlformats.org/presentationml/2006/main" xmlns:r="http://schemas.openxmlformats.org/officeDocument/2006/relationships">
+<p:sld xmlns:a="http://schemas.openxmlformats.org/drawingml/2006/main" xmlns:r="http://schemas.openxmlformats.org/officeDocument/2006/relationships" xmlns:p="http://schemas.openxmlformats.org/presentationml/2006/main">
   <p:cSld>
     <p:spTree>
       <p:nvGrpSpPr>
@@ -15039,7 +15420,14 @@
         <p:cNvGrpSpPr/>
         <p:nvPr/>
       </p:nvGrpSpPr>
-      <p:grpSpPr/>
+      <p:grpSpPr>
+        <a:xfrm>
+          <a:off x="0" y="0"/>
+          <a:ext cx="0" cy="0"/>
+          <a:chOff x="0" y="0"/>
+          <a:chExt cx="0" cy="0"/>
+        </a:xfrm>
+      </p:grpSpPr>
       <p:pic>
         <p:nvPicPr>
           <p:cNvPr id="2" name="Picture 1" descr="logo-ituniversity.png"/>
@@ -15188,7 +15576,7 @@
           <a:noFill/>
         </p:spPr>
         <p:txBody>
-          <a:bodyPr wrap="square" anchor="t" lIns="0" rIns="0" tIns="0" bIns="0">
+          <a:bodyPr wrap="square" lIns="0" tIns="0" rIns="0" bIns="0" anchor="t">
             <a:spAutoFit/>
           </a:bodyPr>
           <a:lstStyle/>
@@ -15199,7 +15587,7 @@
               </a:spcAft>
             </a:pPr>
             <a:r>
-              <a:rPr b="0" sz="3200" i="0">
+              <a:rPr sz="3200" b="0" i="0">
                 <a:solidFill>
                   <a:srgbClr val="106D8E"/>
                 </a:solidFill>
@@ -15262,7 +15650,7 @@
           <a:noFill/>
         </p:spPr>
         <p:txBody>
-          <a:bodyPr wrap="square" anchor="t" lIns="0" rIns="0" tIns="0" bIns="0">
+          <a:bodyPr wrap="square" lIns="0" tIns="0" rIns="0" bIns="0" anchor="t">
             <a:spAutoFit/>
           </a:bodyPr>
           <a:lstStyle/>
@@ -15273,7 +15661,7 @@
               </a:spcAft>
             </a:pPr>
             <a:r>
-              <a:rPr b="0" sz="1100" i="0">
+              <a:rPr sz="1100" b="0" i="0">
                 <a:solidFill>
                   <a:srgbClr val="106D8E"/>
                 </a:solidFill>
@@ -15301,7 +15689,7 @@
           <a:noFill/>
         </p:spPr>
         <p:txBody>
-          <a:bodyPr wrap="square" anchor="t" lIns="0" rIns="0" tIns="0" bIns="0">
+          <a:bodyPr wrap="square" lIns="0" tIns="0" rIns="0" bIns="0" anchor="t">
             <a:spAutoFit/>
           </a:bodyPr>
           <a:lstStyle/>
@@ -15312,7 +15700,7 @@
               </a:spcAft>
             </a:pPr>
             <a:r>
-              <a:rPr b="0" sz="1100" i="0">
+              <a:rPr sz="1100" b="0" i="0">
                 <a:solidFill>
                   <a:srgbClr val="106D8E"/>
                 </a:solidFill>
@@ -15362,12 +15750,12 @@
           </a:fontRef>
         </p:style>
         <p:txBody>
-          <a:bodyPr rtlCol="0" anchor="ctr" wrap="square" lIns="109728" rIns="109728" tIns="109728" bIns="109728"/>
+          <a:bodyPr wrap="square" lIns="109728" tIns="109728" rIns="109728" bIns="109728" rtlCol="0" anchor="ctr"/>
           <a:lstStyle/>
           <a:p>
             <a:pPr algn="ctr"/>
             <a:r>
-              <a:rPr b="1" sz="1700" i="0">
+              <a:rPr sz="1700" b="1" i="0">
                 <a:solidFill>
                   <a:srgbClr val="0B2E4F"/>
                 </a:solidFill>
@@ -15417,12 +15805,12 @@
           </a:fontRef>
         </p:style>
         <p:txBody>
-          <a:bodyPr rtlCol="0" anchor="ctr" wrap="square" lIns="109728" rIns="109728" tIns="109728" bIns="109728"/>
+          <a:bodyPr wrap="square" lIns="109728" tIns="109728" rIns="109728" bIns="109728" rtlCol="0" anchor="ctr"/>
           <a:lstStyle/>
           <a:p>
             <a:pPr algn="ctr"/>
             <a:r>
-              <a:rPr b="1" sz="1700" i="0">
+              <a:rPr sz="1700" b="1" i="0">
                 <a:solidFill>
                   <a:srgbClr val="0B2E4F"/>
                 </a:solidFill>
@@ -15472,12 +15860,12 @@
           </a:fontRef>
         </p:style>
         <p:txBody>
-          <a:bodyPr rtlCol="0" anchor="ctr" wrap="square" lIns="274320" rIns="274320" tIns="274320" bIns="274320"/>
+          <a:bodyPr wrap="square" lIns="274320" tIns="274320" rIns="274320" bIns="274320" rtlCol="0" anchor="ctr"/>
           <a:lstStyle/>
           <a:p>
             <a:pPr algn="ctr"/>
             <a:r>
-              <a:rPr b="1" sz="2000" i="0">
+              <a:rPr sz="2000" b="1" i="0">
                 <a:solidFill>
                   <a:srgbClr val="0B2E4F"/>
                 </a:solidFill>
@@ -15529,7 +15917,7 @@
           </a:fontRef>
         </p:style>
         <p:txBody>
-          <a:bodyPr rtlCol="0" anchor="ctr" wrap="square" lIns="320040" rIns="320040" tIns="320040" bIns="320040"/>
+          <a:bodyPr wrap="square" lIns="320040" tIns="320040" rIns="320040" bIns="320040" rtlCol="0" anchor="ctr"/>
           <a:lstStyle/>
           <a:p>
             <a:pPr algn="l"/>
@@ -15586,7 +15974,7 @@
           <a:noFill/>
         </p:spPr>
         <p:txBody>
-          <a:bodyPr wrap="square" anchor="t" lIns="0" rIns="0" tIns="0" bIns="0">
+          <a:bodyPr wrap="square" lIns="0" tIns="0" rIns="0" bIns="0" anchor="t">
             <a:spAutoFit/>
           </a:bodyPr>
           <a:lstStyle/>
@@ -15597,7 +15985,7 @@
               </a:spcAft>
             </a:pPr>
             <a:r>
-              <a:rPr b="0" sz="1600" i="1">
+              <a:rPr sz="1600" b="0" i="1">
                 <a:solidFill>
                   <a:srgbClr val="5A6B79"/>
                 </a:solidFill>
@@ -15606,7 +15994,7 @@
               <a:t>Trois fiches, trois formats… </a:t>
             </a:r>
             <a:r>
-              <a:rPr b="1" sz="1600" i="1">
+              <a:rPr sz="1600" b="1" i="1">
                 <a:solidFill>
                   <a:srgbClr val="5A6B79"/>
                 </a:solidFill>
@@ -15615,7 +16003,7 @@
               <a:t>une seule personne</a:t>
             </a:r>
             <a:r>
-              <a:rPr b="0" sz="1600" i="1">
+              <a:rPr sz="1600" b="0" i="1">
                 <a:solidFill>
                   <a:srgbClr val="5A6B79"/>
                 </a:solidFill>
@@ -15635,7 +16023,7 @@
 </file>
 
 <file path=ppt/slides/slide4.xml><?xml version="1.0" encoding="utf-8"?>
-<p:sld xmlns:a="http://schemas.openxmlformats.org/drawingml/2006/main" xmlns:p="http://schemas.openxmlformats.org/presentationml/2006/main" xmlns:r="http://schemas.openxmlformats.org/officeDocument/2006/relationships">
+<p:sld xmlns:a="http://schemas.openxmlformats.org/drawingml/2006/main" xmlns:r="http://schemas.openxmlformats.org/officeDocument/2006/relationships" xmlns:p="http://schemas.openxmlformats.org/presentationml/2006/main">
   <p:cSld>
     <p:spTree>
       <p:nvGrpSpPr>
@@ -15643,7 +16031,14 @@
         <p:cNvGrpSpPr/>
         <p:nvPr/>
       </p:nvGrpSpPr>
-      <p:grpSpPr/>
+      <p:grpSpPr>
+        <a:xfrm>
+          <a:off x="0" y="0"/>
+          <a:ext cx="0" cy="0"/>
+          <a:chOff x="0" y="0"/>
+          <a:chExt cx="0" cy="0"/>
+        </a:xfrm>
+      </p:grpSpPr>
       <p:pic>
         <p:nvPicPr>
           <p:cNvPr id="2" name="Picture 1" descr="logo-ituniversity.png"/>
@@ -15792,7 +16187,7 @@
           <a:noFill/>
         </p:spPr>
         <p:txBody>
-          <a:bodyPr wrap="square" anchor="t" lIns="0" rIns="0" tIns="0" bIns="0">
+          <a:bodyPr wrap="square" lIns="0" tIns="0" rIns="0" bIns="0" anchor="t">
             <a:spAutoFit/>
           </a:bodyPr>
           <a:lstStyle/>
@@ -15803,7 +16198,7 @@
               </a:spcAft>
             </a:pPr>
             <a:r>
-              <a:rPr b="0" sz="3200" i="0">
+              <a:rPr sz="3200" b="0" i="0">
                 <a:solidFill>
                   <a:srgbClr val="106D8E"/>
                 </a:solidFill>
@@ -15866,7 +16261,7 @@
           <a:noFill/>
         </p:spPr>
         <p:txBody>
-          <a:bodyPr wrap="square" anchor="t" lIns="0" rIns="0" tIns="0" bIns="0">
+          <a:bodyPr wrap="square" lIns="0" tIns="0" rIns="0" bIns="0" anchor="t">
             <a:spAutoFit/>
           </a:bodyPr>
           <a:lstStyle/>
@@ -15877,7 +16272,7 @@
               </a:spcAft>
             </a:pPr>
             <a:r>
-              <a:rPr b="0" sz="1100" i="0">
+              <a:rPr sz="1100" b="0" i="0">
                 <a:solidFill>
                   <a:srgbClr val="106D8E"/>
                 </a:solidFill>
@@ -15905,7 +16300,7 @@
           <a:noFill/>
         </p:spPr>
         <p:txBody>
-          <a:bodyPr wrap="square" anchor="t" lIns="0" rIns="0" tIns="0" bIns="0">
+          <a:bodyPr wrap="square" lIns="0" tIns="0" rIns="0" bIns="0" anchor="t">
             <a:spAutoFit/>
           </a:bodyPr>
           <a:lstStyle/>
@@ -15916,7 +16311,7 @@
               </a:spcAft>
             </a:pPr>
             <a:r>
-              <a:rPr b="0" sz="1100" i="0">
+              <a:rPr sz="1100" b="0" i="0">
                 <a:solidFill>
                   <a:srgbClr val="106D8E"/>
                 </a:solidFill>
@@ -15970,6 +16365,7 @@
           <a:lstStyle/>
           <a:p>
             <a:pPr algn="ctr"/>
+            <a:endParaRPr/>
           </a:p>
         </p:txBody>
       </p:sp>
@@ -15990,7 +16386,7 @@
           <a:noFill/>
         </p:spPr>
         <p:txBody>
-          <a:bodyPr wrap="square" anchor="t" lIns="0" rIns="0" tIns="0" bIns="0">
+          <a:bodyPr wrap="square" lIns="0" tIns="0" rIns="0" bIns="0" anchor="t">
             <a:spAutoFit/>
           </a:bodyPr>
           <a:lstStyle/>
@@ -16001,7 +16397,7 @@
               </a:spcAft>
             </a:pPr>
             <a:r>
-              <a:rPr b="1" sz="1700" i="0">
+              <a:rPr sz="1700" b="1" i="0">
                 <a:solidFill>
                   <a:srgbClr val="0B2E4F"/>
                 </a:solidFill>
@@ -16029,7 +16425,7 @@
           <a:noFill/>
         </p:spPr>
         <p:txBody>
-          <a:bodyPr wrap="square" anchor="t" lIns="0" rIns="0" tIns="0" bIns="0">
+          <a:bodyPr wrap="square" lIns="0" tIns="0" rIns="0" bIns="0" anchor="t">
             <a:spAutoFit/>
           </a:bodyPr>
           <a:lstStyle/>
@@ -16040,7 +16436,7 @@
               </a:spcAft>
             </a:pPr>
             <a:r>
-              <a:rPr b="0" sz="1500" i="0">
+              <a:rPr sz="1500" b="0" i="0">
                 <a:solidFill>
                   <a:srgbClr val="20303C"/>
                 </a:solidFill>
@@ -16094,6 +16490,7 @@
           <a:lstStyle/>
           <a:p>
             <a:pPr algn="ctr"/>
+            <a:endParaRPr/>
           </a:p>
         </p:txBody>
       </p:sp>
@@ -16114,7 +16511,7 @@
           <a:noFill/>
         </p:spPr>
         <p:txBody>
-          <a:bodyPr wrap="square" anchor="t" lIns="0" rIns="0" tIns="0" bIns="0">
+          <a:bodyPr wrap="square" lIns="0" tIns="0" rIns="0" bIns="0" anchor="t">
             <a:spAutoFit/>
           </a:bodyPr>
           <a:lstStyle/>
@@ -16125,7 +16522,7 @@
               </a:spcAft>
             </a:pPr>
             <a:r>
-              <a:rPr b="1" sz="1700" i="0">
+              <a:rPr sz="1700" b="1" i="0">
                 <a:solidFill>
                   <a:srgbClr val="0B2E4F"/>
                 </a:solidFill>
@@ -16153,7 +16550,7 @@
           <a:noFill/>
         </p:spPr>
         <p:txBody>
-          <a:bodyPr wrap="square" anchor="t" lIns="0" rIns="0" tIns="0" bIns="0">
+          <a:bodyPr wrap="square" lIns="0" tIns="0" rIns="0" bIns="0" anchor="t">
             <a:spAutoFit/>
           </a:bodyPr>
           <a:lstStyle/>
@@ -16164,7 +16561,7 @@
               </a:spcAft>
             </a:pPr>
             <a:r>
-              <a:rPr b="0" sz="1500" i="0">
+              <a:rPr sz="1500" b="0" i="0">
                 <a:solidFill>
                   <a:srgbClr val="20303C"/>
                 </a:solidFill>
@@ -16173,7 +16570,7 @@
               <a:t>Genre </a:t>
             </a:r>
             <a:r>
-              <a:rPr b="0" sz="1380" i="0">
+              <a:rPr sz="1380" b="0" i="0">
                 <a:solidFill>
                   <a:srgbClr val="20303C"/>
                 </a:solidFill>
@@ -16182,7 +16579,7 @@
               <a:t>H/F</a:t>
             </a:r>
             <a:r>
-              <a:rPr b="0" sz="1500" i="0">
+              <a:rPr sz="1500" b="0" i="0">
                 <a:solidFill>
                   <a:srgbClr val="20303C"/>
                 </a:solidFill>
@@ -16191,7 +16588,7 @@
               <a:t>, </a:t>
             </a:r>
             <a:r>
-              <a:rPr b="0" sz="1380" i="0">
+              <a:rPr sz="1380" b="0" i="0">
                 <a:solidFill>
                   <a:srgbClr val="20303C"/>
                 </a:solidFill>
@@ -16200,7 +16597,7 @@
               <a:t>male/female</a:t>
             </a:r>
             <a:r>
-              <a:rPr b="0" sz="1500" i="0">
+              <a:rPr sz="1500" b="0" i="0">
                 <a:solidFill>
                   <a:srgbClr val="20303C"/>
                 </a:solidFill>
@@ -16209,7 +16606,7 @@
               <a:t>, </a:t>
             </a:r>
             <a:r>
-              <a:rPr b="0" sz="1380" i="0">
+              <a:rPr sz="1380" b="0" i="0">
                 <a:solidFill>
                   <a:srgbClr val="20303C"/>
                 </a:solidFill>
@@ -16218,7 +16615,7 @@
               <a:t>Homme/femme</a:t>
             </a:r>
             <a:r>
-              <a:rPr b="0" sz="1500" i="0">
+              <a:rPr sz="1500" b="0" i="0">
                 <a:solidFill>
                   <a:srgbClr val="20303C"/>
                 </a:solidFill>
@@ -16272,6 +16669,7 @@
           <a:lstStyle/>
           <a:p>
             <a:pPr algn="ctr"/>
+            <a:endParaRPr/>
           </a:p>
         </p:txBody>
       </p:sp>
@@ -16292,7 +16690,7 @@
           <a:noFill/>
         </p:spPr>
         <p:txBody>
-          <a:bodyPr wrap="square" anchor="t" lIns="0" rIns="0" tIns="0" bIns="0">
+          <a:bodyPr wrap="square" lIns="0" tIns="0" rIns="0" bIns="0" anchor="t">
             <a:spAutoFit/>
           </a:bodyPr>
           <a:lstStyle/>
@@ -16303,7 +16701,7 @@
               </a:spcAft>
             </a:pPr>
             <a:r>
-              <a:rPr b="1" sz="1700" i="0">
+              <a:rPr sz="1700" b="1" i="0">
                 <a:solidFill>
                   <a:srgbClr val="0B2E4F"/>
                 </a:solidFill>
@@ -16331,7 +16729,7 @@
           <a:noFill/>
         </p:spPr>
         <p:txBody>
-          <a:bodyPr wrap="square" anchor="t" lIns="0" rIns="0" tIns="0" bIns="0">
+          <a:bodyPr wrap="square" lIns="0" tIns="0" rIns="0" bIns="0" anchor="t">
             <a:spAutoFit/>
           </a:bodyPr>
           <a:lstStyle/>
@@ -16342,7 +16740,7 @@
               </a:spcAft>
             </a:pPr>
             <a:r>
-              <a:rPr b="0" sz="1500" i="0">
+              <a:rPr sz="1500" b="0" i="0">
                 <a:solidFill>
                   <a:srgbClr val="20303C"/>
                 </a:solidFill>
@@ -16396,6 +16794,7 @@
           <a:lstStyle/>
           <a:p>
             <a:pPr algn="ctr"/>
+            <a:endParaRPr/>
           </a:p>
         </p:txBody>
       </p:sp>
@@ -16416,7 +16815,7 @@
           <a:noFill/>
         </p:spPr>
         <p:txBody>
-          <a:bodyPr wrap="square" anchor="t" lIns="0" rIns="0" tIns="0" bIns="0">
+          <a:bodyPr wrap="square" lIns="0" tIns="0" rIns="0" bIns="0" anchor="t">
             <a:spAutoFit/>
           </a:bodyPr>
           <a:lstStyle/>
@@ -16427,7 +16826,7 @@
               </a:spcAft>
             </a:pPr>
             <a:r>
-              <a:rPr b="1" sz="1700" i="0">
+              <a:rPr sz="1700" b="1" i="0">
                 <a:solidFill>
                   <a:srgbClr val="0B2E4F"/>
                 </a:solidFill>
@@ -16455,7 +16854,7 @@
           <a:noFill/>
         </p:spPr>
         <p:txBody>
-          <a:bodyPr wrap="square" anchor="t" lIns="0" rIns="0" tIns="0" bIns="0">
+          <a:bodyPr wrap="square" lIns="0" tIns="0" rIns="0" bIns="0" anchor="t">
             <a:spAutoFit/>
           </a:bodyPr>
           <a:lstStyle/>
@@ -16466,7 +16865,7 @@
               </a:spcAft>
             </a:pPr>
             <a:r>
-              <a:rPr b="0" sz="1500" i="0">
+              <a:rPr sz="1500" b="0" i="0">
                 <a:solidFill>
                   <a:srgbClr val="20303C"/>
                 </a:solidFill>
@@ -16540,12 +16939,12 @@
           </a:fontRef>
         </p:style>
         <p:txBody>
-          <a:bodyPr rtlCol="0" anchor="ctr" wrap="square" lIns="274320" rIns="274320" tIns="274320" bIns="274320"/>
+          <a:bodyPr wrap="square" lIns="274320" tIns="274320" rIns="274320" bIns="274320" rtlCol="0" anchor="ctr"/>
           <a:lstStyle/>
           <a:p>
             <a:pPr algn="ctr"/>
             <a:r>
-              <a:rPr b="1" sz="1600" i="0">
+              <a:rPr sz="1600" b="1" i="0">
                 <a:solidFill>
                   <a:srgbClr val="FFFFFF"/>
                 </a:solidFill>
@@ -16554,7 +16953,7 @@
               <a:t>Problématique</a:t>
             </a:r>
             <a:r>
-              <a:rPr b="0" sz="1600" i="0">
+              <a:rPr sz="1600" b="0" i="0">
                 <a:solidFill>
                   <a:srgbClr val="FFFFFF"/>
                 </a:solidFill>
@@ -16574,7 +16973,7 @@
 </file>
 
 <file path=ppt/slides/slide5.xml><?xml version="1.0" encoding="utf-8"?>
-<p:sld xmlns:a="http://schemas.openxmlformats.org/drawingml/2006/main" xmlns:p="http://schemas.openxmlformats.org/presentationml/2006/main" xmlns:r="http://schemas.openxmlformats.org/officeDocument/2006/relationships">
+<p:sld xmlns:a="http://schemas.openxmlformats.org/drawingml/2006/main" xmlns:r="http://schemas.openxmlformats.org/officeDocument/2006/relationships" xmlns:p="http://schemas.openxmlformats.org/presentationml/2006/main">
   <p:cSld>
     <p:spTree>
       <p:nvGrpSpPr>
@@ -16582,7 +16981,14 @@
         <p:cNvGrpSpPr/>
         <p:nvPr/>
       </p:nvGrpSpPr>
-      <p:grpSpPr/>
+      <p:grpSpPr>
+        <a:xfrm>
+          <a:off x="0" y="0"/>
+          <a:ext cx="0" cy="0"/>
+          <a:chOff x="0" y="0"/>
+          <a:chExt cx="0" cy="0"/>
+        </a:xfrm>
+      </p:grpSpPr>
       <p:pic>
         <p:nvPicPr>
           <p:cNvPr id="2" name="Picture 1" descr="logo-ituniversity.png"/>
@@ -16731,7 +17137,7 @@
           <a:noFill/>
         </p:spPr>
         <p:txBody>
-          <a:bodyPr wrap="square" anchor="t" lIns="0" rIns="0" tIns="0" bIns="0">
+          <a:bodyPr wrap="square" lIns="0" tIns="0" rIns="0" bIns="0" anchor="t">
             <a:spAutoFit/>
           </a:bodyPr>
           <a:lstStyle/>
@@ -16742,7 +17148,7 @@
               </a:spcAft>
             </a:pPr>
             <a:r>
-              <a:rPr b="0" sz="3200" i="0">
+              <a:rPr sz="3200" b="0" i="0">
                 <a:solidFill>
                   <a:srgbClr val="106D8E"/>
                 </a:solidFill>
@@ -16805,7 +17211,7 @@
           <a:noFill/>
         </p:spPr>
         <p:txBody>
-          <a:bodyPr wrap="square" anchor="t" lIns="0" rIns="0" tIns="0" bIns="0">
+          <a:bodyPr wrap="square" lIns="0" tIns="0" rIns="0" bIns="0" anchor="t">
             <a:spAutoFit/>
           </a:bodyPr>
           <a:lstStyle/>
@@ -16816,7 +17222,7 @@
               </a:spcAft>
             </a:pPr>
             <a:r>
-              <a:rPr b="0" sz="1100" i="0">
+              <a:rPr sz="1100" b="0" i="0">
                 <a:solidFill>
                   <a:srgbClr val="106D8E"/>
                 </a:solidFill>
@@ -16844,7 +17250,7 @@
           <a:noFill/>
         </p:spPr>
         <p:txBody>
-          <a:bodyPr wrap="square" anchor="t" lIns="0" rIns="0" tIns="0" bIns="0">
+          <a:bodyPr wrap="square" lIns="0" tIns="0" rIns="0" bIns="0" anchor="t">
             <a:spAutoFit/>
           </a:bodyPr>
           <a:lstStyle/>
@@ -16855,7 +17261,7 @@
               </a:spcAft>
             </a:pPr>
             <a:r>
-              <a:rPr b="0" sz="1100" i="0">
+              <a:rPr sz="1100" b="0" i="0">
                 <a:solidFill>
                   <a:srgbClr val="106D8E"/>
                 </a:solidFill>
@@ -16909,6 +17315,7 @@
           <a:lstStyle/>
           <a:p>
             <a:pPr algn="ctr"/>
+            <a:endParaRPr/>
           </a:p>
         </p:txBody>
       </p:sp>
@@ -16949,12 +17356,12 @@
           </a:fontRef>
         </p:style>
         <p:txBody>
-          <a:bodyPr rtlCol="0" anchor="ctr" wrap="square" lIns="0" rIns="0" tIns="0" bIns="0"/>
+          <a:bodyPr wrap="square" lIns="0" tIns="0" rIns="0" bIns="0" rtlCol="0" anchor="ctr"/>
           <a:lstStyle/>
           <a:p>
             <a:pPr algn="ctr"/>
             <a:r>
-              <a:rPr b="1" sz="1600" i="0">
+              <a:rPr sz="1600" b="1" i="0">
                 <a:solidFill>
                   <a:srgbClr val="FFFFFF"/>
                 </a:solidFill>
@@ -16982,7 +17389,7 @@
           <a:noFill/>
         </p:spPr>
         <p:txBody>
-          <a:bodyPr wrap="square" anchor="t" lIns="0" rIns="0" tIns="0" bIns="0">
+          <a:bodyPr wrap="square" lIns="0" tIns="0" rIns="0" bIns="0" anchor="t">
             <a:spAutoFit/>
           </a:bodyPr>
           <a:lstStyle/>
@@ -16993,7 +17400,7 @@
               </a:spcAft>
             </a:pPr>
             <a:r>
-              <a:rPr b="1" sz="1900" i="0">
+              <a:rPr sz="1900" b="1" i="0">
                 <a:solidFill>
                   <a:srgbClr val="0B2E4F"/>
                 </a:solidFill>
@@ -17021,7 +17428,7 @@
           <a:noFill/>
         </p:spPr>
         <p:txBody>
-          <a:bodyPr wrap="square" anchor="t" lIns="0" rIns="0" tIns="0" bIns="0">
+          <a:bodyPr wrap="square" lIns="0" tIns="0" rIns="0" bIns="0" anchor="t">
             <a:spAutoFit/>
           </a:bodyPr>
           <a:lstStyle/>
@@ -17032,7 +17439,7 @@
               </a:spcAft>
             </a:pPr>
             <a:r>
-              <a:rPr b="0" sz="1700" i="0">
+              <a:rPr sz="1700" b="0" i="0">
                 <a:solidFill>
                   <a:srgbClr val="20303C"/>
                 </a:solidFill>
@@ -17041,7 +17448,7 @@
               <a:t>Data Lake Medallion : zones </a:t>
             </a:r>
             <a:r>
-              <a:rPr b="1" sz="1700" i="0">
+              <a:rPr sz="1700" b="1" i="0">
                 <a:solidFill>
                   <a:srgbClr val="20303C"/>
                 </a:solidFill>
@@ -17050,7 +17457,7 @@
               <a:t>RAW → SILVER → GOLD</a:t>
             </a:r>
             <a:r>
-              <a:rPr b="0" sz="1700" i="0">
+              <a:rPr sz="1700" b="0" i="0">
                 <a:solidFill>
                   <a:srgbClr val="20303C"/>
                 </a:solidFill>
@@ -17104,6 +17511,7 @@
           <a:lstStyle/>
           <a:p>
             <a:pPr algn="ctr"/>
+            <a:endParaRPr/>
           </a:p>
         </p:txBody>
       </p:sp>
@@ -17144,12 +17552,12 @@
           </a:fontRef>
         </p:style>
         <p:txBody>
-          <a:bodyPr rtlCol="0" anchor="ctr" wrap="square" lIns="0" rIns="0" tIns="0" bIns="0"/>
+          <a:bodyPr wrap="square" lIns="0" tIns="0" rIns="0" bIns="0" rtlCol="0" anchor="ctr"/>
           <a:lstStyle/>
           <a:p>
             <a:pPr algn="ctr"/>
             <a:r>
-              <a:rPr b="1" sz="1600" i="0">
+              <a:rPr sz="1600" b="1" i="0">
                 <a:solidFill>
                   <a:srgbClr val="FFFFFF"/>
                 </a:solidFill>
@@ -17177,7 +17585,7 @@
           <a:noFill/>
         </p:spPr>
         <p:txBody>
-          <a:bodyPr wrap="square" anchor="t" lIns="0" rIns="0" tIns="0" bIns="0">
+          <a:bodyPr wrap="square" lIns="0" tIns="0" rIns="0" bIns="0" anchor="t">
             <a:spAutoFit/>
           </a:bodyPr>
           <a:lstStyle/>
@@ -17188,7 +17596,7 @@
               </a:spcAft>
             </a:pPr>
             <a:r>
-              <a:rPr b="1" sz="1900" i="0">
+              <a:rPr sz="1900" b="1" i="0">
                 <a:solidFill>
                   <a:srgbClr val="0B2E4F"/>
                 </a:solidFill>
@@ -17216,7 +17624,7 @@
           <a:noFill/>
         </p:spPr>
         <p:txBody>
-          <a:bodyPr wrap="square" anchor="t" lIns="0" rIns="0" tIns="0" bIns="0">
+          <a:bodyPr wrap="square" lIns="0" tIns="0" rIns="0" bIns="0" anchor="t">
             <a:spAutoFit/>
           </a:bodyPr>
           <a:lstStyle/>
@@ -17227,7 +17635,7 @@
               </a:spcAft>
             </a:pPr>
             <a:r>
-              <a:rPr b="0" sz="1700" i="0">
+              <a:rPr sz="1700" b="0" i="0">
                 <a:solidFill>
                   <a:srgbClr val="20303C"/>
                 </a:solidFill>
@@ -17236,7 +17644,7 @@
               <a:t>Modèle canonique </a:t>
             </a:r>
             <a:r>
-              <a:rPr b="0" sz="1564" i="0">
+              <a:rPr sz="1564" b="0" i="0">
                 <a:solidFill>
                   <a:srgbClr val="20303C"/>
                 </a:solidFill>
@@ -17245,7 +17653,7 @@
               <a:t>CanonicalPatient</a:t>
             </a:r>
             <a:r>
-              <a:rPr b="0" sz="1700" i="0">
+              <a:rPr sz="1700" b="0" i="0">
                 <a:solidFill>
                   <a:srgbClr val="20303C"/>
                 </a:solidFill>
@@ -17254,7 +17662,7 @@
               <a:t> + pivot </a:t>
             </a:r>
             <a:r>
-              <a:rPr b="1" sz="1700" i="0">
+              <a:rPr sz="1700" b="1" i="0">
                 <a:solidFill>
                   <a:srgbClr val="20303C"/>
                 </a:solidFill>
@@ -17263,7 +17671,7 @@
               <a:t>FHIR</a:t>
             </a:r>
             <a:r>
-              <a:rPr b="0" sz="1700" i="0">
+              <a:rPr sz="1700" b="0" i="0">
                 <a:solidFill>
                   <a:srgbClr val="20303C"/>
                 </a:solidFill>
@@ -17317,6 +17725,7 @@
           <a:lstStyle/>
           <a:p>
             <a:pPr algn="ctr"/>
+            <a:endParaRPr/>
           </a:p>
         </p:txBody>
       </p:sp>
@@ -17357,12 +17766,12 @@
           </a:fontRef>
         </p:style>
         <p:txBody>
-          <a:bodyPr rtlCol="0" anchor="ctr" wrap="square" lIns="0" rIns="0" tIns="0" bIns="0"/>
+          <a:bodyPr wrap="square" lIns="0" tIns="0" rIns="0" bIns="0" rtlCol="0" anchor="ctr"/>
           <a:lstStyle/>
           <a:p>
             <a:pPr algn="ctr"/>
             <a:r>
-              <a:rPr b="1" sz="1600" i="0">
+              <a:rPr sz="1600" b="1" i="0">
                 <a:solidFill>
                   <a:srgbClr val="FFFFFF"/>
                 </a:solidFill>
@@ -17390,7 +17799,7 @@
           <a:noFill/>
         </p:spPr>
         <p:txBody>
-          <a:bodyPr wrap="square" anchor="t" lIns="0" rIns="0" tIns="0" bIns="0">
+          <a:bodyPr wrap="square" lIns="0" tIns="0" rIns="0" bIns="0" anchor="t">
             <a:spAutoFit/>
           </a:bodyPr>
           <a:lstStyle/>
@@ -17401,7 +17810,7 @@
               </a:spcAft>
             </a:pPr>
             <a:r>
-              <a:rPr b="1" sz="1900" i="0">
+              <a:rPr sz="1900" b="1" i="0">
                 <a:solidFill>
                   <a:srgbClr val="0B2E4F"/>
                 </a:solidFill>
@@ -17429,7 +17838,7 @@
           <a:noFill/>
         </p:spPr>
         <p:txBody>
-          <a:bodyPr wrap="square" anchor="t" lIns="0" rIns="0" tIns="0" bIns="0">
+          <a:bodyPr wrap="square" lIns="0" tIns="0" rIns="0" bIns="0" anchor="t">
             <a:spAutoFit/>
           </a:bodyPr>
           <a:lstStyle/>
@@ -17440,7 +17849,7 @@
               </a:spcAft>
             </a:pPr>
             <a:r>
-              <a:rPr b="0" sz="1700" i="0">
+              <a:rPr sz="1700" b="0" i="0">
                 <a:solidFill>
                   <a:srgbClr val="20303C"/>
                 </a:solidFill>
@@ -17449,7 +17858,7 @@
               <a:t>Master patient + identity map : chaque fusion justifiée par </a:t>
             </a:r>
             <a:r>
-              <a:rPr b="1" sz="1700" i="0">
+              <a:rPr sz="1700" b="1" i="0">
                 <a:solidFill>
                   <a:srgbClr val="20303C"/>
                 </a:solidFill>
@@ -17458,7 +17867,7 @@
               <a:t>score et méthode</a:t>
             </a:r>
             <a:r>
-              <a:rPr b="0" sz="1700" i="0">
+              <a:rPr sz="1700" b="0" i="0">
                 <a:solidFill>
                   <a:srgbClr val="20303C"/>
                 </a:solidFill>
@@ -17512,6 +17921,7 @@
           <a:lstStyle/>
           <a:p>
             <a:pPr algn="ctr"/>
+            <a:endParaRPr/>
           </a:p>
         </p:txBody>
       </p:sp>
@@ -17552,12 +17962,12 @@
           </a:fontRef>
         </p:style>
         <p:txBody>
-          <a:bodyPr rtlCol="0" anchor="ctr" wrap="square" lIns="0" rIns="0" tIns="0" bIns="0"/>
+          <a:bodyPr wrap="square" lIns="0" tIns="0" rIns="0" bIns="0" rtlCol="0" anchor="ctr"/>
           <a:lstStyle/>
           <a:p>
             <a:pPr algn="ctr"/>
             <a:r>
-              <a:rPr b="1" sz="1600" i="0">
+              <a:rPr sz="1600" b="1" i="0">
                 <a:solidFill>
                   <a:srgbClr val="FFFFFF"/>
                 </a:solidFill>
@@ -17585,7 +17995,7 @@
           <a:noFill/>
         </p:spPr>
         <p:txBody>
-          <a:bodyPr wrap="square" anchor="t" lIns="0" rIns="0" tIns="0" bIns="0">
+          <a:bodyPr wrap="square" lIns="0" tIns="0" rIns="0" bIns="0" anchor="t">
             <a:spAutoFit/>
           </a:bodyPr>
           <a:lstStyle/>
@@ -17596,7 +18006,7 @@
               </a:spcAft>
             </a:pPr>
             <a:r>
-              <a:rPr b="1" sz="1900" i="0">
+              <a:rPr sz="1900" b="1" i="0">
                 <a:solidFill>
                   <a:srgbClr val="0B2E4F"/>
                 </a:solidFill>
@@ -17624,7 +18034,7 @@
           <a:noFill/>
         </p:spPr>
         <p:txBody>
-          <a:bodyPr wrap="square" anchor="t" lIns="0" rIns="0" tIns="0" bIns="0">
+          <a:bodyPr wrap="square" lIns="0" tIns="0" rIns="0" bIns="0" anchor="t">
             <a:spAutoFit/>
           </a:bodyPr>
           <a:lstStyle/>
@@ -17635,7 +18045,7 @@
               </a:spcAft>
             </a:pPr>
             <a:r>
-              <a:rPr b="0" sz="1700" i="0">
+              <a:rPr sz="1700" b="0" i="0">
                 <a:solidFill>
                   <a:srgbClr val="20303C"/>
                 </a:solidFill>
@@ -17644,7 +18054,7 @@
               <a:t>Rôles, </a:t>
             </a:r>
             <a:r>
-              <a:rPr b="1" sz="1700" i="0">
+              <a:rPr sz="1700" b="1" i="0">
                 <a:solidFill>
                   <a:srgbClr val="20303C"/>
                 </a:solidFill>
@@ -17653,7 +18063,7 @@
               <a:t>consentement par finalité</a:t>
             </a:r>
             <a:r>
-              <a:rPr b="0" sz="1700" i="0">
+              <a:rPr sz="1700" b="0" i="0">
                 <a:solidFill>
                   <a:srgbClr val="20303C"/>
                 </a:solidFill>
@@ -17703,12 +18113,12 @@
           </a:fontRef>
         </p:style>
         <p:txBody>
-          <a:bodyPr rtlCol="0" anchor="ctr" wrap="square" lIns="274320" rIns="274320" tIns="274320" bIns="274320"/>
+          <a:bodyPr wrap="square" lIns="274320" tIns="274320" rIns="274320" bIns="274320" rtlCol="0" anchor="ctr"/>
           <a:lstStyle/>
           <a:p>
             <a:pPr algn="ctr"/>
             <a:r>
-              <a:rPr b="0" sz="1800" i="0">
+              <a:rPr sz="1800" b="0" i="0">
                 <a:solidFill>
                   <a:srgbClr val="0B2E4F"/>
                 </a:solidFill>
@@ -17717,7 +18127,7 @@
               <a:t>Données </a:t>
             </a:r>
             <a:r>
-              <a:rPr b="1" sz="1800" i="0">
+              <a:rPr sz="1800" b="1" i="0">
                 <a:solidFill>
                   <a:srgbClr val="0B2E4F"/>
                 </a:solidFill>
@@ -17726,7 +18136,7 @@
               <a:t>exclusivement synthétiques</a:t>
             </a:r>
             <a:r>
-              <a:rPr b="0" sz="1800" i="0">
+              <a:rPr sz="1800" b="0" i="0">
                 <a:solidFill>
                   <a:srgbClr val="0B2E4F"/>
                 </a:solidFill>
@@ -17746,7 +18156,7 @@
 </file>
 
 <file path=ppt/slides/slide6.xml><?xml version="1.0" encoding="utf-8"?>
-<p:sld xmlns:a="http://schemas.openxmlformats.org/drawingml/2006/main" xmlns:p="http://schemas.openxmlformats.org/presentationml/2006/main" xmlns:r="http://schemas.openxmlformats.org/officeDocument/2006/relationships">
+<p:sld xmlns:a="http://schemas.openxmlformats.org/drawingml/2006/main" xmlns:r="http://schemas.openxmlformats.org/officeDocument/2006/relationships" xmlns:p="http://schemas.openxmlformats.org/presentationml/2006/main">
   <p:cSld>
     <p:spTree>
       <p:nvGrpSpPr>
@@ -17754,7 +18164,14 @@
         <p:cNvGrpSpPr/>
         <p:nvPr/>
       </p:nvGrpSpPr>
-      <p:grpSpPr/>
+      <p:grpSpPr>
+        <a:xfrm>
+          <a:off x="0" y="0"/>
+          <a:ext cx="0" cy="0"/>
+          <a:chOff x="0" y="0"/>
+          <a:chExt cx="0" cy="0"/>
+        </a:xfrm>
+      </p:grpSpPr>
       <p:pic>
         <p:nvPicPr>
           <p:cNvPr id="2" name="Picture 1" descr="logo-ituniversity.png"/>
@@ -17903,7 +18320,7 @@
           <a:noFill/>
         </p:spPr>
         <p:txBody>
-          <a:bodyPr wrap="square" anchor="t" lIns="0" rIns="0" tIns="0" bIns="0">
+          <a:bodyPr wrap="square" lIns="0" tIns="0" rIns="0" bIns="0" anchor="t">
             <a:spAutoFit/>
           </a:bodyPr>
           <a:lstStyle/>
@@ -17914,7 +18331,7 @@
               </a:spcAft>
             </a:pPr>
             <a:r>
-              <a:rPr b="0" sz="3200" i="0">
+              <a:rPr sz="3200" b="0" i="0">
                 <a:solidFill>
                   <a:srgbClr val="106D8E"/>
                 </a:solidFill>
@@ -17977,7 +18394,7 @@
           <a:noFill/>
         </p:spPr>
         <p:txBody>
-          <a:bodyPr wrap="square" anchor="t" lIns="0" rIns="0" tIns="0" bIns="0">
+          <a:bodyPr wrap="square" lIns="0" tIns="0" rIns="0" bIns="0" anchor="t">
             <a:spAutoFit/>
           </a:bodyPr>
           <a:lstStyle/>
@@ -17988,7 +18405,7 @@
               </a:spcAft>
             </a:pPr>
             <a:r>
-              <a:rPr b="0" sz="1100" i="0">
+              <a:rPr sz="1100" b="0" i="0">
                 <a:solidFill>
                   <a:srgbClr val="106D8E"/>
                 </a:solidFill>
@@ -18016,7 +18433,7 @@
           <a:noFill/>
         </p:spPr>
         <p:txBody>
-          <a:bodyPr wrap="square" anchor="t" lIns="0" rIns="0" tIns="0" bIns="0">
+          <a:bodyPr wrap="square" lIns="0" tIns="0" rIns="0" bIns="0" anchor="t">
             <a:spAutoFit/>
           </a:bodyPr>
           <a:lstStyle/>
@@ -18027,7 +18444,7 @@
               </a:spcAft>
             </a:pPr>
             <a:r>
-              <a:rPr b="0" sz="1100" i="0">
+              <a:rPr sz="1100" b="0" i="0">
                 <a:solidFill>
                   <a:srgbClr val="106D8E"/>
                 </a:solidFill>
@@ -18075,12 +18492,12 @@
           </a:fontRef>
         </p:style>
         <p:txBody>
-          <a:bodyPr rtlCol="0" anchor="ctr" wrap="square" lIns="0" rIns="0" tIns="0" bIns="0"/>
+          <a:bodyPr wrap="square" lIns="0" tIns="0" rIns="0" bIns="0" rtlCol="0" anchor="ctr"/>
           <a:lstStyle/>
           <a:p>
             <a:pPr algn="ctr"/>
             <a:r>
-              <a:rPr b="1" sz="2000" i="0">
+              <a:rPr sz="2000" b="1" i="0">
                 <a:solidFill>
                   <a:srgbClr val="FFFFFF"/>
                 </a:solidFill>
@@ -18108,7 +18525,7 @@
           <a:noFill/>
         </p:spPr>
         <p:txBody>
-          <a:bodyPr wrap="square" anchor="t" lIns="0" rIns="0" tIns="0" bIns="0">
+          <a:bodyPr wrap="square" lIns="0" tIns="0" rIns="0" bIns="0" anchor="t">
             <a:spAutoFit/>
           </a:bodyPr>
           <a:lstStyle/>
@@ -18119,7 +18536,7 @@
               </a:spcAft>
             </a:pPr>
             <a:r>
-              <a:rPr b="1" sz="2200" i="0">
+              <a:rPr sz="2200" b="1" i="0">
                 <a:solidFill>
                   <a:srgbClr val="0B2E4F"/>
                 </a:solidFill>
@@ -18147,7 +18564,7 @@
           <a:noFill/>
         </p:spPr>
         <p:txBody>
-          <a:bodyPr wrap="square" anchor="t" lIns="0" rIns="0" tIns="0" bIns="0">
+          <a:bodyPr wrap="square" lIns="0" tIns="0" rIns="0" bIns="0" anchor="t">
             <a:spAutoFit/>
           </a:bodyPr>
           <a:lstStyle/>
@@ -18158,7 +18575,7 @@
               </a:spcAft>
             </a:pPr>
             <a:r>
-              <a:rPr b="0" sz="1500" i="0">
+              <a:rPr sz="1500" b="0" i="0">
                 <a:solidFill>
                   <a:srgbClr val="5A6B79"/>
                 </a:solidFill>
@@ -18206,12 +18623,12 @@
           </a:fontRef>
         </p:style>
         <p:txBody>
-          <a:bodyPr rtlCol="0" anchor="ctr" wrap="square" lIns="0" rIns="0" tIns="0" bIns="0"/>
+          <a:bodyPr wrap="square" lIns="0" tIns="0" rIns="0" bIns="0" rtlCol="0" anchor="ctr"/>
           <a:lstStyle/>
           <a:p>
             <a:pPr algn="ctr"/>
             <a:r>
-              <a:rPr b="1" sz="2000" i="0">
+              <a:rPr sz="2000" b="1" i="0">
                 <a:solidFill>
                   <a:srgbClr val="FFFFFF"/>
                 </a:solidFill>
@@ -18239,7 +18656,7 @@
           <a:noFill/>
         </p:spPr>
         <p:txBody>
-          <a:bodyPr wrap="square" anchor="t" lIns="0" rIns="0" tIns="0" bIns="0">
+          <a:bodyPr wrap="square" lIns="0" tIns="0" rIns="0" bIns="0" anchor="t">
             <a:spAutoFit/>
           </a:bodyPr>
           <a:lstStyle/>
@@ -18250,7 +18667,7 @@
               </a:spcAft>
             </a:pPr>
             <a:r>
-              <a:rPr b="1" sz="2200" i="0">
+              <a:rPr sz="2200" b="1" i="0">
                 <a:solidFill>
                   <a:srgbClr val="0B2E4F"/>
                 </a:solidFill>
@@ -18278,7 +18695,7 @@
           <a:noFill/>
         </p:spPr>
         <p:txBody>
-          <a:bodyPr wrap="square" anchor="t" lIns="0" rIns="0" tIns="0" bIns="0">
+          <a:bodyPr wrap="square" lIns="0" tIns="0" rIns="0" bIns="0" anchor="t">
             <a:spAutoFit/>
           </a:bodyPr>
           <a:lstStyle/>
@@ -18289,7 +18706,7 @@
               </a:spcAft>
             </a:pPr>
             <a:r>
-              <a:rPr b="0" sz="1500" i="0">
+              <a:rPr sz="1500" b="0" i="0">
                 <a:solidFill>
                   <a:srgbClr val="5A6B79"/>
                 </a:solidFill>
@@ -18337,12 +18754,12 @@
           </a:fontRef>
         </p:style>
         <p:txBody>
-          <a:bodyPr rtlCol="0" anchor="ctr" wrap="square" lIns="0" rIns="0" tIns="0" bIns="0"/>
+          <a:bodyPr wrap="square" lIns="0" tIns="0" rIns="0" bIns="0" rtlCol="0" anchor="ctr"/>
           <a:lstStyle/>
           <a:p>
             <a:pPr algn="ctr"/>
             <a:r>
-              <a:rPr b="1" sz="2000" i="0">
+              <a:rPr sz="2000" b="1" i="0">
                 <a:solidFill>
                   <a:srgbClr val="FFFFFF"/>
                 </a:solidFill>
@@ -18370,7 +18787,7 @@
           <a:noFill/>
         </p:spPr>
         <p:txBody>
-          <a:bodyPr wrap="square" anchor="t" lIns="0" rIns="0" tIns="0" bIns="0">
+          <a:bodyPr wrap="square" lIns="0" tIns="0" rIns="0" bIns="0" anchor="t">
             <a:spAutoFit/>
           </a:bodyPr>
           <a:lstStyle/>
@@ -18381,7 +18798,7 @@
               </a:spcAft>
             </a:pPr>
             <a:r>
-              <a:rPr b="1" sz="2200" i="0">
+              <a:rPr sz="2200" b="1" i="0">
                 <a:solidFill>
                   <a:srgbClr val="0B2E4F"/>
                 </a:solidFill>
@@ -18409,7 +18826,7 @@
           <a:noFill/>
         </p:spPr>
         <p:txBody>
-          <a:bodyPr wrap="square" anchor="t" lIns="0" rIns="0" tIns="0" bIns="0">
+          <a:bodyPr wrap="square" lIns="0" tIns="0" rIns="0" bIns="0" anchor="t">
             <a:spAutoFit/>
           </a:bodyPr>
           <a:lstStyle/>
@@ -18420,7 +18837,7 @@
               </a:spcAft>
             </a:pPr>
             <a:r>
-              <a:rPr b="0" sz="1500" i="0">
+              <a:rPr sz="1500" b="0" i="0">
                 <a:solidFill>
                   <a:srgbClr val="5A6B79"/>
                 </a:solidFill>
@@ -18468,12 +18885,12 @@
           </a:fontRef>
         </p:style>
         <p:txBody>
-          <a:bodyPr rtlCol="0" anchor="ctr" wrap="square" lIns="0" rIns="0" tIns="0" bIns="0"/>
+          <a:bodyPr wrap="square" lIns="0" tIns="0" rIns="0" bIns="0" rtlCol="0" anchor="ctr"/>
           <a:lstStyle/>
           <a:p>
             <a:pPr algn="ctr"/>
             <a:r>
-              <a:rPr b="1" sz="2000" i="0">
+              <a:rPr sz="2000" b="1" i="0">
                 <a:solidFill>
                   <a:srgbClr val="FFFFFF"/>
                 </a:solidFill>
@@ -18501,7 +18918,7 @@
           <a:noFill/>
         </p:spPr>
         <p:txBody>
-          <a:bodyPr wrap="square" anchor="t" lIns="0" rIns="0" tIns="0" bIns="0">
+          <a:bodyPr wrap="square" lIns="0" tIns="0" rIns="0" bIns="0" anchor="t">
             <a:spAutoFit/>
           </a:bodyPr>
           <a:lstStyle/>
@@ -18512,7 +18929,7 @@
               </a:spcAft>
             </a:pPr>
             <a:r>
-              <a:rPr b="1" sz="2200" i="0">
+              <a:rPr sz="2200" b="1" i="0">
                 <a:solidFill>
                   <a:srgbClr val="0B2E4F"/>
                 </a:solidFill>
@@ -18540,7 +18957,7 @@
           <a:noFill/>
         </p:spPr>
         <p:txBody>
-          <a:bodyPr wrap="square" anchor="t" lIns="0" rIns="0" tIns="0" bIns="0">
+          <a:bodyPr wrap="square" lIns="0" tIns="0" rIns="0" bIns="0" anchor="t">
             <a:spAutoFit/>
           </a:bodyPr>
           <a:lstStyle/>
@@ -18551,7 +18968,7 @@
               </a:spcAft>
             </a:pPr>
             <a:r>
-              <a:rPr b="0" sz="1500" i="0">
+              <a:rPr sz="1500" b="0" i="0">
                 <a:solidFill>
                   <a:srgbClr val="5A6B79"/>
                 </a:solidFill>
@@ -18599,12 +19016,12 @@
           </a:fontRef>
         </p:style>
         <p:txBody>
-          <a:bodyPr rtlCol="0" anchor="ctr" wrap="square" lIns="0" rIns="0" tIns="0" bIns="0"/>
+          <a:bodyPr wrap="square" lIns="0" tIns="0" rIns="0" bIns="0" rtlCol="0" anchor="ctr"/>
           <a:lstStyle/>
           <a:p>
             <a:pPr algn="ctr"/>
             <a:r>
-              <a:rPr b="1" sz="2000" i="0">
+              <a:rPr sz="2000" b="1" i="0">
                 <a:solidFill>
                   <a:srgbClr val="FFFFFF"/>
                 </a:solidFill>
@@ -18632,7 +19049,7 @@
           <a:noFill/>
         </p:spPr>
         <p:txBody>
-          <a:bodyPr wrap="square" anchor="t" lIns="0" rIns="0" tIns="0" bIns="0">
+          <a:bodyPr wrap="square" lIns="0" tIns="0" rIns="0" bIns="0" anchor="t">
             <a:spAutoFit/>
           </a:bodyPr>
           <a:lstStyle/>
@@ -18643,7 +19060,7 @@
               </a:spcAft>
             </a:pPr>
             <a:r>
-              <a:rPr b="1" sz="2200" i="0">
+              <a:rPr sz="2200" b="1" i="0">
                 <a:solidFill>
                   <a:srgbClr val="0B2E4F"/>
                 </a:solidFill>
@@ -18671,7 +19088,7 @@
           <a:noFill/>
         </p:spPr>
         <p:txBody>
-          <a:bodyPr wrap="square" anchor="t" lIns="0" rIns="0" tIns="0" bIns="0">
+          <a:bodyPr wrap="square" lIns="0" tIns="0" rIns="0" bIns="0" anchor="t">
             <a:spAutoFit/>
           </a:bodyPr>
           <a:lstStyle/>
@@ -18682,7 +19099,7 @@
               </a:spcAft>
             </a:pPr>
             <a:r>
-              <a:rPr b="0" sz="1500" i="0">
+              <a:rPr sz="1500" b="0" i="0">
                 <a:solidFill>
                   <a:srgbClr val="5A6B79"/>
                 </a:solidFill>
@@ -18702,7 +19119,7 @@
 </file>
 
 <file path=ppt/slides/slide7.xml><?xml version="1.0" encoding="utf-8"?>
-<p:sld xmlns:a="http://schemas.openxmlformats.org/drawingml/2006/main" xmlns:p="http://schemas.openxmlformats.org/presentationml/2006/main" xmlns:r="http://schemas.openxmlformats.org/officeDocument/2006/relationships">
+<p:sld xmlns:a="http://schemas.openxmlformats.org/drawingml/2006/main" xmlns:r="http://schemas.openxmlformats.org/officeDocument/2006/relationships" xmlns:p="http://schemas.openxmlformats.org/presentationml/2006/main">
   <p:cSld>
     <p:spTree>
       <p:nvGrpSpPr>
@@ -18710,7 +19127,14 @@
         <p:cNvGrpSpPr/>
         <p:nvPr/>
       </p:nvGrpSpPr>
-      <p:grpSpPr/>
+      <p:grpSpPr>
+        <a:xfrm>
+          <a:off x="0" y="0"/>
+          <a:ext cx="0" cy="0"/>
+          <a:chOff x="0" y="0"/>
+          <a:chExt cx="0" cy="0"/>
+        </a:xfrm>
+      </p:grpSpPr>
       <p:pic>
         <p:nvPicPr>
           <p:cNvPr id="2" name="Picture 1" descr="logo-ituniversity.png"/>
@@ -18859,7 +19283,7 @@
           <a:noFill/>
         </p:spPr>
         <p:txBody>
-          <a:bodyPr wrap="square" anchor="t" lIns="0" rIns="0" tIns="0" bIns="0">
+          <a:bodyPr wrap="square" lIns="0" tIns="0" rIns="0" bIns="0" anchor="t">
             <a:spAutoFit/>
           </a:bodyPr>
           <a:lstStyle/>
@@ -18870,7 +19294,7 @@
               </a:spcAft>
             </a:pPr>
             <a:r>
-              <a:rPr b="0" sz="3200" i="0">
+              <a:rPr sz="3200" b="0" i="0">
                 <a:solidFill>
                   <a:srgbClr val="106D8E"/>
                 </a:solidFill>
@@ -18890,7 +19314,7 @@
         <p:spPr>
           <a:xfrm>
             <a:off x="685800" y="1554480"/>
-            <a:ext cx="13258800" cy="457200"/>
+            <a:ext cx="13258800" cy="307777"/>
           </a:xfrm>
           <a:prstGeom prst="rect">
             <a:avLst/>
@@ -18898,7 +19322,7 @@
           <a:noFill/>
         </p:spPr>
         <p:txBody>
-          <a:bodyPr wrap="square" anchor="t" lIns="0" rIns="0" tIns="0" bIns="0">
+          <a:bodyPr wrap="square" lIns="0" tIns="0" rIns="0" bIns="0" anchor="t">
             <a:spAutoFit/>
           </a:bodyPr>
           <a:lstStyle/>
@@ -18909,13 +19333,13 @@
               </a:spcAft>
             </a:pPr>
             <a:r>
-              <a:rPr b="0" sz="2000" i="0">
+              <a:rPr sz="2000" b="0" i="0">
                 <a:solidFill>
                   <a:srgbClr val="5A6B79"/>
                 </a:solidFill>
                 <a:latin typeface="Calibri"/>
               </a:rPr>
-              <a:t>Six solutions du domaine, étudiées sur documentation</a:t>
+              <a:t>Six solutions du domaine couvrent chacune une partie du besoin, aucune ne le couvre en entier</a:t>
             </a:r>
           </a:p>
         </p:txBody>
@@ -18972,7 +19396,7 @@
           <a:noFill/>
         </p:spPr>
         <p:txBody>
-          <a:bodyPr wrap="square" anchor="t" lIns="0" rIns="0" tIns="0" bIns="0">
+          <a:bodyPr wrap="square" lIns="0" tIns="0" rIns="0" bIns="0" anchor="t">
             <a:spAutoFit/>
           </a:bodyPr>
           <a:lstStyle/>
@@ -18983,7 +19407,7 @@
               </a:spcAft>
             </a:pPr>
             <a:r>
-              <a:rPr b="0" sz="1100" i="0">
+              <a:rPr sz="1100" b="0" i="0">
                 <a:solidFill>
                   <a:srgbClr val="106D8E"/>
                 </a:solidFill>
@@ -19011,7 +19435,7 @@
           <a:noFill/>
         </p:spPr>
         <p:txBody>
-          <a:bodyPr wrap="square" anchor="t" lIns="0" rIns="0" tIns="0" bIns="0">
+          <a:bodyPr wrap="square" lIns="0" tIns="0" rIns="0" bIns="0" anchor="t">
             <a:spAutoFit/>
           </a:bodyPr>
           <a:lstStyle/>
@@ -19022,7 +19446,7 @@
               </a:spcAft>
             </a:pPr>
             <a:r>
-              <a:rPr b="0" sz="1100" i="0">
+              <a:rPr sz="1100" b="0" i="0">
                 <a:solidFill>
                   <a:srgbClr val="106D8E"/>
                 </a:solidFill>
@@ -19039,7 +19463,13 @@
           <p:cNvGraphicFramePr>
             <a:graphicFrameLocks noGrp="1"/>
           </p:cNvGraphicFramePr>
-          <p:nvPr/>
+          <p:nvPr>
+            <p:extLst>
+              <p:ext uri="{D42A27DB-BD31-4B8C-83A1-F6EECF244321}">
+                <p14:modId xmlns:p14="http://schemas.microsoft.com/office/powerpoint/2010/main" val="3877081194"/>
+              </p:ext>
+            </p:extLst>
+          </p:nvPr>
         </p:nvGraphicFramePr>
         <p:xfrm>
           <a:off x="685800" y="2194560"/>
@@ -19052,10 +19482,34 @@
                 <a:tableStyleId>{5C22544A-7EE6-4342-B048-85BDC9FD1C3A}</a:tableStyleId>
               </a:tblPr>
               <a:tblGrid>
-                <a:gridCol w="3291840"/>
-                <a:gridCol w="2011680"/>
-                <a:gridCol w="4114800"/>
-                <a:gridCol w="3840480"/>
+                <a:gridCol w="3291840">
+                  <a:extLst>
+                    <a:ext uri="{9D8B030D-6E8A-4147-A177-3AD203B41FA5}">
+                      <a16:colId xmlns:a16="http://schemas.microsoft.com/office/drawing/2014/main" val="20000"/>
+                    </a:ext>
+                  </a:extLst>
+                </a:gridCol>
+                <a:gridCol w="2011680">
+                  <a:extLst>
+                    <a:ext uri="{9D8B030D-6E8A-4147-A177-3AD203B41FA5}">
+                      <a16:colId xmlns:a16="http://schemas.microsoft.com/office/drawing/2014/main" val="20001"/>
+                    </a:ext>
+                  </a:extLst>
+                </a:gridCol>
+                <a:gridCol w="4114800">
+                  <a:extLst>
+                    <a:ext uri="{9D8B030D-6E8A-4147-A177-3AD203B41FA5}">
+                      <a16:colId xmlns:a16="http://schemas.microsoft.com/office/drawing/2014/main" val="20002"/>
+                    </a:ext>
+                  </a:extLst>
+                </a:gridCol>
+                <a:gridCol w="3840480">
+                  <a:extLst>
+                    <a:ext uri="{9D8B030D-6E8A-4147-A177-3AD203B41FA5}">
+                      <a16:colId xmlns:a16="http://schemas.microsoft.com/office/drawing/2014/main" val="20003"/>
+                    </a:ext>
+                  </a:extLst>
+                </a:gridCol>
               </a:tblGrid>
               <a:tr h="566928">
                 <a:tc>
@@ -19065,7 +19519,7 @@
                     <a:p>
                       <a:pPr algn="l"/>
                       <a:r>
-                        <a:rPr b="1" sz="1500" i="0">
+                        <a:rPr sz="1500" b="1" i="0">
                           <a:solidFill>
                             <a:srgbClr val="FFFFFF"/>
                           </a:solidFill>
@@ -19075,7 +19529,7 @@
                       </a:r>
                     </a:p>
                   </a:txBody>
-                  <a:tcPr marL="91440" marR="91440" marT="45720" marB="45720" anchor="ctr">
+                  <a:tcPr anchor="ctr">
                     <a:solidFill>
                       <a:srgbClr val="106D8E"/>
                     </a:solidFill>
@@ -19088,7 +19542,7 @@
                     <a:p>
                       <a:pPr algn="l"/>
                       <a:r>
-                        <a:rPr b="1" sz="1500" i="0">
+                        <a:rPr sz="1500" b="1" i="0">
                           <a:solidFill>
                             <a:srgbClr val="FFFFFF"/>
                           </a:solidFill>
@@ -19098,7 +19552,7 @@
                       </a:r>
                     </a:p>
                   </a:txBody>
-                  <a:tcPr marL="91440" marR="91440" marT="45720" marB="45720" anchor="ctr">
+                  <a:tcPr anchor="ctr">
                     <a:solidFill>
                       <a:srgbClr val="106D8E"/>
                     </a:solidFill>
@@ -19111,7 +19565,7 @@
                     <a:p>
                       <a:pPr algn="l"/>
                       <a:r>
-                        <a:rPr b="1" sz="1500" i="0">
+                        <a:rPr sz="1500" b="1" i="0">
                           <a:solidFill>
                             <a:srgbClr val="FFFFFF"/>
                           </a:solidFill>
@@ -19121,7 +19575,7 @@
                       </a:r>
                     </a:p>
                   </a:txBody>
-                  <a:tcPr marL="91440" marR="91440" marT="45720" marB="45720" anchor="ctr">
+                  <a:tcPr anchor="ctr">
                     <a:solidFill>
                       <a:srgbClr val="106D8E"/>
                     </a:solidFill>
@@ -19134,7 +19588,7 @@
                     <a:p>
                       <a:pPr algn="l"/>
                       <a:r>
-                        <a:rPr b="1" sz="1500" i="0">
+                        <a:rPr sz="1500" b="1" i="0">
                           <a:solidFill>
                             <a:srgbClr val="FFFFFF"/>
                           </a:solidFill>
@@ -19144,12 +19598,17 @@
                       </a:r>
                     </a:p>
                   </a:txBody>
-                  <a:tcPr marL="91440" marR="91440" marT="45720" marB="45720" anchor="ctr">
+                  <a:tcPr anchor="ctr">
                     <a:solidFill>
                       <a:srgbClr val="106D8E"/>
                     </a:solidFill>
                   </a:tcPr>
                 </a:tc>
+                <a:extLst>
+                  <a:ext uri="{0D108BD9-81ED-4DB2-BD59-A6C34878D82A}">
+                    <a16:rowId xmlns:a16="http://schemas.microsoft.com/office/drawing/2014/main" val="10000"/>
+                  </a:ext>
+                </a:extLst>
               </a:tr>
               <a:tr h="566928">
                 <a:tc>
@@ -19159,7 +19618,7 @@
                     <a:p>
                       <a:pPr algn="l"/>
                       <a:r>
-                        <a:rPr b="1" sz="1400" i="0">
+                        <a:rPr sz="1400" b="1" i="0">
                           <a:solidFill>
                             <a:srgbClr val="20303C"/>
                           </a:solidFill>
@@ -19169,7 +19628,7 @@
                       </a:r>
                     </a:p>
                   </a:txBody>
-                  <a:tcPr marL="91440" marR="91440" marT="45720" marB="45720" anchor="ctr">
+                  <a:tcPr anchor="ctr">
                     <a:solidFill>
                       <a:srgbClr val="FFFFFF"/>
                     </a:solidFill>
@@ -19182,7 +19641,7 @@
                     <a:p>
                       <a:pPr algn="l"/>
                       <a:r>
-                        <a:rPr b="0" sz="1400" i="0">
+                        <a:rPr sz="1400" b="0" i="0">
                           <a:solidFill>
                             <a:srgbClr val="20303C"/>
                           </a:solidFill>
@@ -19192,7 +19651,7 @@
                       </a:r>
                     </a:p>
                   </a:txBody>
-                  <a:tcPr marL="91440" marR="91440" marT="45720" marB="45720" anchor="ctr">
+                  <a:tcPr anchor="ctr">
                     <a:solidFill>
                       <a:srgbClr val="FFFFFF"/>
                     </a:solidFill>
@@ -19205,7 +19664,7 @@
                     <a:p>
                       <a:pPr algn="l"/>
                       <a:r>
-                        <a:rPr b="0" sz="1400" i="0">
+                        <a:rPr sz="1400" b="0" i="0">
                           <a:solidFill>
                             <a:srgbClr val="20303C"/>
                           </a:solidFill>
@@ -19215,7 +19674,7 @@
                       </a:r>
                     </a:p>
                   </a:txBody>
-                  <a:tcPr marL="91440" marR="91440" marT="45720" marB="45720" anchor="ctr">
+                  <a:tcPr anchor="ctr">
                     <a:solidFill>
                       <a:srgbClr val="FFFFFF"/>
                     </a:solidFill>
@@ -19228,7 +19687,7 @@
                     <a:p>
                       <a:pPr algn="l"/>
                       <a:r>
-                        <a:rPr b="0" sz="1400" i="0">
+                        <a:rPr sz="1400" b="0" i="0">
                           <a:solidFill>
                             <a:srgbClr val="20303C"/>
                           </a:solidFill>
@@ -19238,12 +19697,17 @@
                       </a:r>
                     </a:p>
                   </a:txBody>
-                  <a:tcPr marL="91440" marR="91440" marT="45720" marB="45720" anchor="ctr">
+                  <a:tcPr anchor="ctr">
                     <a:solidFill>
                       <a:srgbClr val="FFFFFF"/>
                     </a:solidFill>
                   </a:tcPr>
                 </a:tc>
+                <a:extLst>
+                  <a:ext uri="{0D108BD9-81ED-4DB2-BD59-A6C34878D82A}">
+                    <a16:rowId xmlns:a16="http://schemas.microsoft.com/office/drawing/2014/main" val="10001"/>
+                  </a:ext>
+                </a:extLst>
               </a:tr>
               <a:tr h="566928">
                 <a:tc>
@@ -19253,7 +19717,7 @@
                     <a:p>
                       <a:pPr algn="l"/>
                       <a:r>
-                        <a:rPr b="1" sz="1400" i="0">
+                        <a:rPr sz="1400" b="1" i="0">
                           <a:solidFill>
                             <a:srgbClr val="20303C"/>
                           </a:solidFill>
@@ -19263,7 +19727,7 @@
                       </a:r>
                     </a:p>
                   </a:txBody>
-                  <a:tcPr marL="91440" marR="91440" marT="45720" marB="45720" anchor="ctr">
+                  <a:tcPr anchor="ctr">
                     <a:solidFill>
                       <a:srgbClr val="F1F7FA"/>
                     </a:solidFill>
@@ -19276,7 +19740,7 @@
                     <a:p>
                       <a:pPr algn="l"/>
                       <a:r>
-                        <a:rPr b="0" sz="1400" i="0">
+                        <a:rPr sz="1400" b="0" i="0">
                           <a:solidFill>
                             <a:srgbClr val="20303C"/>
                           </a:solidFill>
@@ -19286,7 +19750,7 @@
                       </a:r>
                     </a:p>
                   </a:txBody>
-                  <a:tcPr marL="91440" marR="91440" marT="45720" marB="45720" anchor="ctr">
+                  <a:tcPr anchor="ctr">
                     <a:solidFill>
                       <a:srgbClr val="F1F7FA"/>
                     </a:solidFill>
@@ -19299,7 +19763,7 @@
                     <a:p>
                       <a:pPr algn="l"/>
                       <a:r>
-                        <a:rPr b="0" sz="1400" i="0">
+                        <a:rPr sz="1400" b="0" i="0">
                           <a:solidFill>
                             <a:srgbClr val="20303C"/>
                           </a:solidFill>
@@ -19309,7 +19773,7 @@
                       </a:r>
                     </a:p>
                   </a:txBody>
-                  <a:tcPr marL="91440" marR="91440" marT="45720" marB="45720" anchor="ctr">
+                  <a:tcPr anchor="ctr">
                     <a:solidFill>
                       <a:srgbClr val="F1F7FA"/>
                     </a:solidFill>
@@ -19322,7 +19786,7 @@
                     <a:p>
                       <a:pPr algn="l"/>
                       <a:r>
-                        <a:rPr b="0" sz="1400" i="0">
+                        <a:rPr sz="1400" b="0" i="0">
                           <a:solidFill>
                             <a:srgbClr val="20303C"/>
                           </a:solidFill>
@@ -19332,12 +19796,17 @@
                       </a:r>
                     </a:p>
                   </a:txBody>
-                  <a:tcPr marL="91440" marR="91440" marT="45720" marB="45720" anchor="ctr">
+                  <a:tcPr anchor="ctr">
                     <a:solidFill>
                       <a:srgbClr val="F1F7FA"/>
                     </a:solidFill>
                   </a:tcPr>
                 </a:tc>
+                <a:extLst>
+                  <a:ext uri="{0D108BD9-81ED-4DB2-BD59-A6C34878D82A}">
+                    <a16:rowId xmlns:a16="http://schemas.microsoft.com/office/drawing/2014/main" val="10002"/>
+                  </a:ext>
+                </a:extLst>
               </a:tr>
               <a:tr h="566928">
                 <a:tc>
@@ -19347,7 +19816,7 @@
                     <a:p>
                       <a:pPr algn="l"/>
                       <a:r>
-                        <a:rPr b="1" sz="1400" i="0">
+                        <a:rPr sz="1400" b="1" i="0">
                           <a:solidFill>
                             <a:srgbClr val="20303C"/>
                           </a:solidFill>
@@ -19357,7 +19826,7 @@
                       </a:r>
                     </a:p>
                   </a:txBody>
-                  <a:tcPr marL="91440" marR="91440" marT="45720" marB="45720" anchor="ctr">
+                  <a:tcPr anchor="ctr">
                     <a:solidFill>
                       <a:srgbClr val="FFFFFF"/>
                     </a:solidFill>
@@ -19370,7 +19839,7 @@
                     <a:p>
                       <a:pPr algn="l"/>
                       <a:r>
-                        <a:rPr b="0" sz="1400" i="0">
+                        <a:rPr sz="1400" b="0" i="0">
                           <a:solidFill>
                             <a:srgbClr val="20303C"/>
                           </a:solidFill>
@@ -19380,7 +19849,7 @@
                       </a:r>
                     </a:p>
                   </a:txBody>
-                  <a:tcPr marL="91440" marR="91440" marT="45720" marB="45720" anchor="ctr">
+                  <a:tcPr anchor="ctr">
                     <a:solidFill>
                       <a:srgbClr val="FFFFFF"/>
                     </a:solidFill>
@@ -19393,7 +19862,7 @@
                     <a:p>
                       <a:pPr algn="l"/>
                       <a:r>
-                        <a:rPr b="0" sz="1400" i="0">
+                        <a:rPr sz="1400" b="0" i="0">
                           <a:solidFill>
                             <a:srgbClr val="20303C"/>
                           </a:solidFill>
@@ -19403,7 +19872,7 @@
                       </a:r>
                     </a:p>
                   </a:txBody>
-                  <a:tcPr marL="91440" marR="91440" marT="45720" marB="45720" anchor="ctr">
+                  <a:tcPr anchor="ctr">
                     <a:solidFill>
                       <a:srgbClr val="FFFFFF"/>
                     </a:solidFill>
@@ -19416,7 +19885,7 @@
                     <a:p>
                       <a:pPr algn="l"/>
                       <a:r>
-                        <a:rPr b="0" sz="1400" i="0">
+                        <a:rPr sz="1400" b="0" i="0">
                           <a:solidFill>
                             <a:srgbClr val="20303C"/>
                           </a:solidFill>
@@ -19426,12 +19895,17 @@
                       </a:r>
                     </a:p>
                   </a:txBody>
-                  <a:tcPr marL="91440" marR="91440" marT="45720" marB="45720" anchor="ctr">
+                  <a:tcPr anchor="ctr">
                     <a:solidFill>
                       <a:srgbClr val="FFFFFF"/>
                     </a:solidFill>
                   </a:tcPr>
                 </a:tc>
+                <a:extLst>
+                  <a:ext uri="{0D108BD9-81ED-4DB2-BD59-A6C34878D82A}">
+                    <a16:rowId xmlns:a16="http://schemas.microsoft.com/office/drawing/2014/main" val="10003"/>
+                  </a:ext>
+                </a:extLst>
               </a:tr>
               <a:tr h="566928">
                 <a:tc>
@@ -19441,7 +19915,7 @@
                     <a:p>
                       <a:pPr algn="l"/>
                       <a:r>
-                        <a:rPr b="1" sz="1400" i="0">
+                        <a:rPr sz="1400" b="1" i="0">
                           <a:solidFill>
                             <a:srgbClr val="20303C"/>
                           </a:solidFill>
@@ -19451,7 +19925,7 @@
                       </a:r>
                     </a:p>
                   </a:txBody>
-                  <a:tcPr marL="91440" marR="91440" marT="45720" marB="45720" anchor="ctr">
+                  <a:tcPr anchor="ctr">
                     <a:solidFill>
                       <a:srgbClr val="F1F7FA"/>
                     </a:solidFill>
@@ -19464,7 +19938,7 @@
                     <a:p>
                       <a:pPr algn="l"/>
                       <a:r>
-                        <a:rPr b="0" sz="1400" i="0">
+                        <a:rPr sz="1400" b="0" i="0">
                           <a:solidFill>
                             <a:srgbClr val="20303C"/>
                           </a:solidFill>
@@ -19474,7 +19948,7 @@
                       </a:r>
                     </a:p>
                   </a:txBody>
-                  <a:tcPr marL="91440" marR="91440" marT="45720" marB="45720" anchor="ctr">
+                  <a:tcPr anchor="ctr">
                     <a:solidFill>
                       <a:srgbClr val="F1F7FA"/>
                     </a:solidFill>
@@ -19487,7 +19961,7 @@
                     <a:p>
                       <a:pPr algn="l"/>
                       <a:r>
-                        <a:rPr b="0" sz="1400" i="0">
+                        <a:rPr sz="1400" b="0" i="0">
                           <a:solidFill>
                             <a:srgbClr val="20303C"/>
                           </a:solidFill>
@@ -19496,7 +19970,7 @@
                         <a:t>serveur FHIR de référence, </a:t>
                       </a:r>
                       <a:r>
-                        <a:rPr b="0" sz="1288" i="0">
+                        <a:rPr sz="1288" b="0" i="0">
                           <a:solidFill>
                             <a:srgbClr val="20303C"/>
                           </a:solidFill>
@@ -19506,7 +19980,7 @@
                       </a:r>
                     </a:p>
                   </a:txBody>
-                  <a:tcPr marL="91440" marR="91440" marT="45720" marB="45720" anchor="ctr">
+                  <a:tcPr anchor="ctr">
                     <a:solidFill>
                       <a:srgbClr val="F1F7FA"/>
                     </a:solidFill>
@@ -19519,7 +19993,7 @@
                     <a:p>
                       <a:pPr algn="l"/>
                       <a:r>
-                        <a:rPr b="0" sz="1400" i="0">
+                        <a:rPr sz="1400" b="0" i="0">
                           <a:solidFill>
                             <a:srgbClr val="20303C"/>
                           </a:solidFill>
@@ -19529,12 +20003,17 @@
                       </a:r>
                     </a:p>
                   </a:txBody>
-                  <a:tcPr marL="91440" marR="91440" marT="45720" marB="45720" anchor="ctr">
+                  <a:tcPr anchor="ctr">
                     <a:solidFill>
                       <a:srgbClr val="F1F7FA"/>
                     </a:solidFill>
                   </a:tcPr>
                 </a:tc>
+                <a:extLst>
+                  <a:ext uri="{0D108BD9-81ED-4DB2-BD59-A6C34878D82A}">
+                    <a16:rowId xmlns:a16="http://schemas.microsoft.com/office/drawing/2014/main" val="10004"/>
+                  </a:ext>
+                </a:extLst>
               </a:tr>
               <a:tr h="566928">
                 <a:tc>
@@ -19544,7 +20023,7 @@
                     <a:p>
                       <a:pPr algn="l"/>
                       <a:r>
-                        <a:rPr b="1" sz="1400" i="0">
+                        <a:rPr sz="1400" b="1" i="0">
                           <a:solidFill>
                             <a:srgbClr val="20303C"/>
                           </a:solidFill>
@@ -19554,7 +20033,7 @@
                       </a:r>
                     </a:p>
                   </a:txBody>
-                  <a:tcPr marL="91440" marR="91440" marT="45720" marB="45720" anchor="ctr">
+                  <a:tcPr anchor="ctr">
                     <a:solidFill>
                       <a:srgbClr val="FFFFFF"/>
                     </a:solidFill>
@@ -19567,7 +20046,7 @@
                     <a:p>
                       <a:pPr algn="l"/>
                       <a:r>
-                        <a:rPr b="0" sz="1400" i="0">
+                        <a:rPr sz="1400" b="0" i="0">
                           <a:solidFill>
                             <a:srgbClr val="20303C"/>
                           </a:solidFill>
@@ -19577,7 +20056,7 @@
                       </a:r>
                     </a:p>
                   </a:txBody>
-                  <a:tcPr marL="91440" marR="91440" marT="45720" marB="45720" anchor="ctr">
+                  <a:tcPr anchor="ctr">
                     <a:solidFill>
                       <a:srgbClr val="FFFFFF"/>
                     </a:solidFill>
@@ -19590,7 +20069,7 @@
                     <a:p>
                       <a:pPr algn="l"/>
                       <a:r>
-                        <a:rPr b="0" sz="1400" i="0">
+                        <a:rPr sz="1400" b="0" i="0">
                           <a:solidFill>
                             <a:srgbClr val="20303C"/>
                           </a:solidFill>
@@ -19600,7 +20079,7 @@
                       </a:r>
                     </a:p>
                   </a:txBody>
-                  <a:tcPr marL="91440" marR="91440" marT="45720" marB="45720" anchor="ctr">
+                  <a:tcPr anchor="ctr">
                     <a:solidFill>
                       <a:srgbClr val="FFFFFF"/>
                     </a:solidFill>
@@ -19613,7 +20092,7 @@
                     <a:p>
                       <a:pPr algn="l"/>
                       <a:r>
-                        <a:rPr b="0" sz="1400" i="0">
+                        <a:rPr sz="1400" b="0" i="0">
                           <a:solidFill>
                             <a:srgbClr val="20303C"/>
                           </a:solidFill>
@@ -19623,12 +20102,17 @@
                       </a:r>
                     </a:p>
                   </a:txBody>
-                  <a:tcPr marL="91440" marR="91440" marT="45720" marB="45720" anchor="ctr">
+                  <a:tcPr anchor="ctr">
                     <a:solidFill>
                       <a:srgbClr val="FFFFFF"/>
                     </a:solidFill>
                   </a:tcPr>
                 </a:tc>
+                <a:extLst>
+                  <a:ext uri="{0D108BD9-81ED-4DB2-BD59-A6C34878D82A}">
+                    <a16:rowId xmlns:a16="http://schemas.microsoft.com/office/drawing/2014/main" val="10005"/>
+                  </a:ext>
+                </a:extLst>
               </a:tr>
               <a:tr h="566928">
                 <a:tc>
@@ -19638,7 +20122,7 @@
                     <a:p>
                       <a:pPr algn="l"/>
                       <a:r>
-                        <a:rPr b="1" sz="1400" i="0">
+                        <a:rPr sz="1400" b="1" i="0">
                           <a:solidFill>
                             <a:srgbClr val="20303C"/>
                           </a:solidFill>
@@ -19648,7 +20132,7 @@
                       </a:r>
                     </a:p>
                   </a:txBody>
-                  <a:tcPr marL="91440" marR="91440" marT="45720" marB="45720" anchor="ctr">
+                  <a:tcPr anchor="ctr">
                     <a:solidFill>
                       <a:srgbClr val="F1F7FA"/>
                     </a:solidFill>
@@ -19661,7 +20145,7 @@
                     <a:p>
                       <a:pPr algn="l"/>
                       <a:r>
-                        <a:rPr b="0" sz="1400" i="0">
+                        <a:rPr sz="1400" b="0" i="0">
                           <a:solidFill>
                             <a:srgbClr val="20303C"/>
                           </a:solidFill>
@@ -19671,7 +20155,7 @@
                       </a:r>
                     </a:p>
                   </a:txBody>
-                  <a:tcPr marL="91440" marR="91440" marT="45720" marB="45720" anchor="ctr">
+                  <a:tcPr anchor="ctr">
                     <a:solidFill>
                       <a:srgbClr val="F1F7FA"/>
                     </a:solidFill>
@@ -19684,7 +20168,7 @@
                     <a:p>
                       <a:pPr algn="l"/>
                       <a:r>
-                        <a:rPr b="0" sz="1400" i="0">
+                        <a:rPr sz="1400" b="0" i="0">
                           <a:solidFill>
                             <a:srgbClr val="20303C"/>
                           </a:solidFill>
@@ -19694,7 +20178,7 @@
                       </a:r>
                     </a:p>
                   </a:txBody>
-                  <a:tcPr marL="91440" marR="91440" marT="45720" marB="45720" anchor="ctr">
+                  <a:tcPr anchor="ctr">
                     <a:solidFill>
                       <a:srgbClr val="F1F7FA"/>
                     </a:solidFill>
@@ -19707,7 +20191,7 @@
                     <a:p>
                       <a:pPr algn="l"/>
                       <a:r>
-                        <a:rPr b="0" sz="1400" i="0">
+                        <a:rPr sz="1400" b="0" i="0">
                           <a:solidFill>
                             <a:srgbClr val="20303C"/>
                           </a:solidFill>
@@ -19717,12 +20201,17 @@
                       </a:r>
                     </a:p>
                   </a:txBody>
-                  <a:tcPr marL="91440" marR="91440" marT="45720" marB="45720" anchor="ctr">
+                  <a:tcPr anchor="ctr">
                     <a:solidFill>
                       <a:srgbClr val="F1F7FA"/>
                     </a:solidFill>
                   </a:tcPr>
                 </a:tc>
+                <a:extLst>
+                  <a:ext uri="{0D108BD9-81ED-4DB2-BD59-A6C34878D82A}">
+                    <a16:rowId xmlns:a16="http://schemas.microsoft.com/office/drawing/2014/main" val="10006"/>
+                  </a:ext>
+                </a:extLst>
               </a:tr>
             </a:tbl>
           </a:graphicData>
@@ -19745,7 +20234,7 @@
           <a:noFill/>
         </p:spPr>
         <p:txBody>
-          <a:bodyPr wrap="square" anchor="t" lIns="0" rIns="0" tIns="0" bIns="0">
+          <a:bodyPr wrap="square" lIns="0" tIns="0" rIns="0" bIns="0" anchor="t">
             <a:spAutoFit/>
           </a:bodyPr>
           <a:lstStyle/>
@@ -19756,7 +20245,7 @@
               </a:spcAft>
             </a:pPr>
             <a:r>
-              <a:rPr b="0" sz="1400" i="1">
+              <a:rPr sz="1400" b="0" i="1">
                 <a:solidFill>
                   <a:srgbClr val="5A6B79"/>
                 </a:solidFill>
@@ -19765,7 +20254,7 @@
               <a:t>Capacités </a:t>
             </a:r>
             <a:r>
-              <a:rPr b="1" sz="1400" i="1">
+              <a:rPr sz="1400" b="1" i="1">
                 <a:solidFill>
                   <a:srgbClr val="5A6B79"/>
                 </a:solidFill>
@@ -19774,7 +20263,7 @@
               <a:t>annoncées</a:t>
             </a:r>
             <a:r>
-              <a:rPr b="0" sz="1400" i="1">
+              <a:rPr sz="1400" b="0" i="1">
                 <a:solidFill>
                   <a:srgbClr val="5A6B79"/>
                 </a:solidFill>
@@ -19786,6 +20275,11 @@
         </p:txBody>
       </p:sp>
     </p:spTree>
+    <p:extLst>
+      <p:ext uri="{BB962C8B-B14F-4D97-AF65-F5344CB8AC3E}">
+        <p14:creationId xmlns:p14="http://schemas.microsoft.com/office/powerpoint/2010/main" val="2733461008"/>
+      </p:ext>
+    </p:extLst>
   </p:cSld>
   <p:clrMapOvr>
     <a:masterClrMapping/>
@@ -19794,7 +20288,7 @@
 </file>
 
 <file path=ppt/slides/slide8.xml><?xml version="1.0" encoding="utf-8"?>
-<p:sld xmlns:a="http://schemas.openxmlformats.org/drawingml/2006/main" xmlns:p="http://schemas.openxmlformats.org/presentationml/2006/main" xmlns:r="http://schemas.openxmlformats.org/officeDocument/2006/relationships">
+<p:sld xmlns:a="http://schemas.openxmlformats.org/drawingml/2006/main" xmlns:r="http://schemas.openxmlformats.org/officeDocument/2006/relationships" xmlns:p="http://schemas.openxmlformats.org/presentationml/2006/main">
   <p:cSld>
     <p:spTree>
       <p:nvGrpSpPr>
@@ -19802,7 +20296,14 @@
         <p:cNvGrpSpPr/>
         <p:nvPr/>
       </p:nvGrpSpPr>
-      <p:grpSpPr/>
+      <p:grpSpPr>
+        <a:xfrm>
+          <a:off x="0" y="0"/>
+          <a:ext cx="0" cy="0"/>
+          <a:chOff x="0" y="0"/>
+          <a:chExt cx="0" cy="0"/>
+        </a:xfrm>
+      </p:grpSpPr>
       <p:pic>
         <p:nvPicPr>
           <p:cNvPr id="2" name="Picture 1" descr="logo-ituniversity.png"/>
@@ -19951,7 +20452,7 @@
           <a:noFill/>
         </p:spPr>
         <p:txBody>
-          <a:bodyPr wrap="square" anchor="t" lIns="0" rIns="0" tIns="0" bIns="0">
+          <a:bodyPr wrap="square" lIns="0" tIns="0" rIns="0" bIns="0" anchor="t">
             <a:spAutoFit/>
           </a:bodyPr>
           <a:lstStyle/>
@@ -19962,7 +20463,7 @@
               </a:spcAft>
             </a:pPr>
             <a:r>
-              <a:rPr b="0" sz="3200" i="0">
+              <a:rPr sz="3200" b="0" i="0">
                 <a:solidFill>
                   <a:srgbClr val="106D8E"/>
                 </a:solidFill>
@@ -19982,7 +20483,7 @@
         <p:spPr>
           <a:xfrm>
             <a:off x="685800" y="1554480"/>
-            <a:ext cx="13258800" cy="457200"/>
+            <a:ext cx="13258800" cy="307777"/>
           </a:xfrm>
           <a:prstGeom prst="rect">
             <a:avLst/>
@@ -19990,7 +20491,7 @@
           <a:noFill/>
         </p:spPr>
         <p:txBody>
-          <a:bodyPr wrap="square" anchor="t" lIns="0" rIns="0" tIns="0" bIns="0">
+          <a:bodyPr wrap="square" lIns="0" tIns="0" rIns="0" bIns="0" anchor="t">
             <a:spAutoFit/>
           </a:bodyPr>
           <a:lstStyle/>
@@ -20001,13 +20502,13 @@
               </a:spcAft>
             </a:pPr>
             <a:r>
-              <a:rPr b="0" sz="2000" i="0">
+              <a:rPr sz="2000" b="0" i="0">
                 <a:solidFill>
                   <a:srgbClr val="5A6B79"/>
                 </a:solidFill>
                 <a:latin typeface="Calibri"/>
               </a:rPr>
-              <a:t>Critères de comparaison</a:t>
+              <a:t>Aucune solution existante ne tient pleinement sur une VM 8 Go sous Python 3.8</a:t>
             </a:r>
           </a:p>
         </p:txBody>
@@ -20064,7 +20565,7 @@
           <a:noFill/>
         </p:spPr>
         <p:txBody>
-          <a:bodyPr wrap="square" anchor="t" lIns="0" rIns="0" tIns="0" bIns="0">
+          <a:bodyPr wrap="square" lIns="0" tIns="0" rIns="0" bIns="0" anchor="t">
             <a:spAutoFit/>
           </a:bodyPr>
           <a:lstStyle/>
@@ -20075,7 +20576,7 @@
               </a:spcAft>
             </a:pPr>
             <a:r>
-              <a:rPr b="0" sz="1100" i="0">
+              <a:rPr sz="1100" b="0" i="0">
                 <a:solidFill>
                   <a:srgbClr val="106D8E"/>
                 </a:solidFill>
@@ -20103,7 +20604,7 @@
           <a:noFill/>
         </p:spPr>
         <p:txBody>
-          <a:bodyPr wrap="square" anchor="t" lIns="0" rIns="0" tIns="0" bIns="0">
+          <a:bodyPr wrap="square" lIns="0" tIns="0" rIns="0" bIns="0" anchor="t">
             <a:spAutoFit/>
           </a:bodyPr>
           <a:lstStyle/>
@@ -20114,7 +20615,7 @@
               </a:spcAft>
             </a:pPr>
             <a:r>
-              <a:rPr b="0" sz="1100" i="0">
+              <a:rPr sz="1100" b="0" i="0">
                 <a:solidFill>
                   <a:srgbClr val="106D8E"/>
                 </a:solidFill>
@@ -20144,14 +20645,62 @@
                 <a:tableStyleId>{5C22544A-7EE6-4342-B048-85BDC9FD1C3A}</a:tableStyleId>
               </a:tblPr>
               <a:tblGrid>
-                <a:gridCol w="4572000"/>
-                <a:gridCol w="1234440"/>
-                <a:gridCol w="1234440"/>
-                <a:gridCol w="1234440"/>
-                <a:gridCol w="1234440"/>
-                <a:gridCol w="1234440"/>
-                <a:gridCol w="1234440"/>
-                <a:gridCol w="1280160"/>
+                <a:gridCol w="4572000">
+                  <a:extLst>
+                    <a:ext uri="{9D8B030D-6E8A-4147-A177-3AD203B41FA5}">
+                      <a16:colId xmlns:a16="http://schemas.microsoft.com/office/drawing/2014/main" val="20000"/>
+                    </a:ext>
+                  </a:extLst>
+                </a:gridCol>
+                <a:gridCol w="1234440">
+                  <a:extLst>
+                    <a:ext uri="{9D8B030D-6E8A-4147-A177-3AD203B41FA5}">
+                      <a16:colId xmlns:a16="http://schemas.microsoft.com/office/drawing/2014/main" val="20001"/>
+                    </a:ext>
+                  </a:extLst>
+                </a:gridCol>
+                <a:gridCol w="1234440">
+                  <a:extLst>
+                    <a:ext uri="{9D8B030D-6E8A-4147-A177-3AD203B41FA5}">
+                      <a16:colId xmlns:a16="http://schemas.microsoft.com/office/drawing/2014/main" val="20002"/>
+                    </a:ext>
+                  </a:extLst>
+                </a:gridCol>
+                <a:gridCol w="1234440">
+                  <a:extLst>
+                    <a:ext uri="{9D8B030D-6E8A-4147-A177-3AD203B41FA5}">
+                      <a16:colId xmlns:a16="http://schemas.microsoft.com/office/drawing/2014/main" val="20003"/>
+                    </a:ext>
+                  </a:extLst>
+                </a:gridCol>
+                <a:gridCol w="1234440">
+                  <a:extLst>
+                    <a:ext uri="{9D8B030D-6E8A-4147-A177-3AD203B41FA5}">
+                      <a16:colId xmlns:a16="http://schemas.microsoft.com/office/drawing/2014/main" val="20004"/>
+                    </a:ext>
+                  </a:extLst>
+                </a:gridCol>
+                <a:gridCol w="1234440">
+                  <a:extLst>
+                    <a:ext uri="{9D8B030D-6E8A-4147-A177-3AD203B41FA5}">
+                      <a16:colId xmlns:a16="http://schemas.microsoft.com/office/drawing/2014/main" val="20005"/>
+                    </a:ext>
+                  </a:extLst>
+                </a:gridCol>
+                <a:gridCol w="1234440">
+                  <a:extLst>
+                    <a:ext uri="{9D8B030D-6E8A-4147-A177-3AD203B41FA5}">
+                      <a16:colId xmlns:a16="http://schemas.microsoft.com/office/drawing/2014/main" val="20006"/>
+                    </a:ext>
+                  </a:extLst>
+                </a:gridCol>
+                <a:gridCol w="1280160">
+                  <a:extLst>
+                    <a:ext uri="{9D8B030D-6E8A-4147-A177-3AD203B41FA5}">
+                      <a16:colId xmlns:a16="http://schemas.microsoft.com/office/drawing/2014/main" val="20007"/>
+                    </a:ext>
+                  </a:extLst>
+                </a:gridCol>
               </a:tblGrid>
               <a:tr h="548640">
                 <a:tc>
@@ -20161,7 +20710,7 @@
                     <a:p>
                       <a:pPr algn="l"/>
                       <a:r>
-                        <a:rPr b="1" sz="1500" i="0">
+                        <a:rPr sz="1500" b="1" i="0">
                           <a:solidFill>
                             <a:srgbClr val="FFFFFF"/>
                           </a:solidFill>
@@ -20171,7 +20720,7 @@
                       </a:r>
                     </a:p>
                   </a:txBody>
-                  <a:tcPr marL="91440" marR="91440" marT="45720" marB="45720" anchor="ctr">
+                  <a:tcPr anchor="ctr">
                     <a:solidFill>
                       <a:srgbClr val="106D8E"/>
                     </a:solidFill>
@@ -20184,7 +20733,7 @@
                     <a:p>
                       <a:pPr algn="ctr"/>
                       <a:r>
-                        <a:rPr b="1" sz="1500" i="0">
+                        <a:rPr sz="1500" b="1" i="0">
                           <a:solidFill>
                             <a:srgbClr val="FFFFFF"/>
                           </a:solidFill>
@@ -20194,7 +20743,7 @@
                       </a:r>
                     </a:p>
                   </a:txBody>
-                  <a:tcPr marL="91440" marR="91440" marT="45720" marB="45720" anchor="ctr">
+                  <a:tcPr anchor="ctr">
                     <a:solidFill>
                       <a:srgbClr val="106D8E"/>
                     </a:solidFill>
@@ -20207,7 +20756,7 @@
                     <a:p>
                       <a:pPr algn="ctr"/>
                       <a:r>
-                        <a:rPr b="1" sz="1500" i="0">
+                        <a:rPr sz="1500" b="1" i="0">
                           <a:solidFill>
                             <a:srgbClr val="FFFFFF"/>
                           </a:solidFill>
@@ -20217,7 +20766,7 @@
                       </a:r>
                     </a:p>
                   </a:txBody>
-                  <a:tcPr marL="91440" marR="91440" marT="45720" marB="45720" anchor="ctr">
+                  <a:tcPr anchor="ctr">
                     <a:solidFill>
                       <a:srgbClr val="106D8E"/>
                     </a:solidFill>
@@ -20230,7 +20779,7 @@
                     <a:p>
                       <a:pPr algn="ctr"/>
                       <a:r>
-                        <a:rPr b="1" sz="1500" i="0">
+                        <a:rPr sz="1500" b="1" i="0">
                           <a:solidFill>
                             <a:srgbClr val="FFFFFF"/>
                           </a:solidFill>
@@ -20240,7 +20789,7 @@
                       </a:r>
                     </a:p>
                   </a:txBody>
-                  <a:tcPr marL="91440" marR="91440" marT="45720" marB="45720" anchor="ctr">
+                  <a:tcPr anchor="ctr">
                     <a:solidFill>
                       <a:srgbClr val="106D8E"/>
                     </a:solidFill>
@@ -20253,7 +20802,7 @@
                     <a:p>
                       <a:pPr algn="ctr"/>
                       <a:r>
-                        <a:rPr b="1" sz="1500" i="0">
+                        <a:rPr sz="1500" b="1" i="0">
                           <a:solidFill>
                             <a:srgbClr val="FFFFFF"/>
                           </a:solidFill>
@@ -20263,7 +20812,7 @@
                       </a:r>
                     </a:p>
                   </a:txBody>
-                  <a:tcPr marL="91440" marR="91440" marT="45720" marB="45720" anchor="ctr">
+                  <a:tcPr anchor="ctr">
                     <a:solidFill>
                       <a:srgbClr val="106D8E"/>
                     </a:solidFill>
@@ -20276,7 +20825,7 @@
                     <a:p>
                       <a:pPr algn="ctr"/>
                       <a:r>
-                        <a:rPr b="1" sz="1500" i="0">
+                        <a:rPr sz="1500" b="1" i="0">
                           <a:solidFill>
                             <a:srgbClr val="FFFFFF"/>
                           </a:solidFill>
@@ -20286,7 +20835,7 @@
                       </a:r>
                     </a:p>
                   </a:txBody>
-                  <a:tcPr marL="91440" marR="91440" marT="45720" marB="45720" anchor="ctr">
+                  <a:tcPr anchor="ctr">
                     <a:solidFill>
                       <a:srgbClr val="106D8E"/>
                     </a:solidFill>
@@ -20299,7 +20848,7 @@
                     <a:p>
                       <a:pPr algn="ctr"/>
                       <a:r>
-                        <a:rPr b="1" sz="1500" i="0">
+                        <a:rPr sz="1500" b="1" i="0">
                           <a:solidFill>
                             <a:srgbClr val="FFFFFF"/>
                           </a:solidFill>
@@ -20309,7 +20858,7 @@
                       </a:r>
                     </a:p>
                   </a:txBody>
-                  <a:tcPr marL="91440" marR="91440" marT="45720" marB="45720" anchor="ctr">
+                  <a:tcPr anchor="ctr">
                     <a:solidFill>
                       <a:srgbClr val="106D8E"/>
                     </a:solidFill>
@@ -20322,7 +20871,7 @@
                     <a:p>
                       <a:pPr algn="ctr"/>
                       <a:r>
-                        <a:rPr b="1" sz="1500" i="0">
+                        <a:rPr sz="1500" b="1" i="0">
                           <a:solidFill>
                             <a:srgbClr val="FFFFFF"/>
                           </a:solidFill>
@@ -20332,12 +20881,17 @@
                       </a:r>
                     </a:p>
                   </a:txBody>
-                  <a:tcPr marL="91440" marR="91440" marT="45720" marB="45720" anchor="ctr">
+                  <a:tcPr anchor="ctr">
                     <a:solidFill>
                       <a:srgbClr val="106D8E"/>
                     </a:solidFill>
                   </a:tcPr>
                 </a:tc>
+                <a:extLst>
+                  <a:ext uri="{0D108BD9-81ED-4DB2-BD59-A6C34878D82A}">
+                    <a16:rowId xmlns:a16="http://schemas.microsoft.com/office/drawing/2014/main" val="10000"/>
+                  </a:ext>
+                </a:extLst>
               </a:tr>
               <a:tr h="548640">
                 <a:tc>
@@ -20347,7 +20901,7 @@
                     <a:p>
                       <a:pPr algn="l"/>
                       <a:r>
-                        <a:rPr b="0" sz="1500" i="0">
+                        <a:rPr sz="1500" b="0" i="0">
                           <a:solidFill>
                             <a:srgbClr val="20303C"/>
                           </a:solidFill>
@@ -20357,7 +20911,7 @@
                       </a:r>
                     </a:p>
                   </a:txBody>
-                  <a:tcPr marL="91440" marR="91440" marT="45720" marB="45720" anchor="ctr">
+                  <a:tcPr anchor="ctr">
                     <a:solidFill>
                       <a:srgbClr val="FFFFFF"/>
                     </a:solidFill>
@@ -20370,7 +20924,7 @@
                     <a:p>
                       <a:pPr algn="ctr"/>
                       <a:r>
-                        <a:rPr b="1" sz="1700" i="0">
+                        <a:rPr sz="1700" b="1" i="0">
                           <a:solidFill>
                             <a:srgbClr val="2E8B57"/>
                           </a:solidFill>
@@ -20380,7 +20934,7 @@
                       </a:r>
                     </a:p>
                   </a:txBody>
-                  <a:tcPr marL="91440" marR="91440" marT="45720" marB="45720" anchor="ctr">
+                  <a:tcPr anchor="ctr">
                     <a:solidFill>
                       <a:srgbClr val="FFFFFF"/>
                     </a:solidFill>
@@ -20393,7 +20947,7 @@
                     <a:p>
                       <a:pPr algn="ctr"/>
                       <a:r>
-                        <a:rPr b="1" sz="1700" i="0">
+                        <a:rPr sz="1700" b="1" i="0">
                           <a:solidFill>
                             <a:srgbClr val="2E8B57"/>
                           </a:solidFill>
@@ -20403,7 +20957,7 @@
                       </a:r>
                     </a:p>
                   </a:txBody>
-                  <a:tcPr marL="91440" marR="91440" marT="45720" marB="45720" anchor="ctr">
+                  <a:tcPr anchor="ctr">
                     <a:solidFill>
                       <a:srgbClr val="FFFFFF"/>
                     </a:solidFill>
@@ -20416,7 +20970,7 @@
                     <a:p>
                       <a:pPr algn="ctr"/>
                       <a:r>
-                        <a:rPr b="1" sz="1700" i="0">
+                        <a:rPr sz="1700" b="1" i="0">
                           <a:solidFill>
                             <a:srgbClr val="C0392B"/>
                           </a:solidFill>
@@ -20426,7 +20980,7 @@
                       </a:r>
                     </a:p>
                   </a:txBody>
-                  <a:tcPr marL="91440" marR="91440" marT="45720" marB="45720" anchor="ctr">
+                  <a:tcPr anchor="ctr">
                     <a:solidFill>
                       <a:srgbClr val="FFFFFF"/>
                     </a:solidFill>
@@ -20439,7 +20993,7 @@
                     <a:p>
                       <a:pPr algn="ctr"/>
                       <a:r>
-                        <a:rPr b="1" sz="1700" i="0">
+                        <a:rPr sz="1700" b="1" i="0">
                           <a:solidFill>
                             <a:srgbClr val="C0392B"/>
                           </a:solidFill>
@@ -20449,7 +21003,7 @@
                       </a:r>
                     </a:p>
                   </a:txBody>
-                  <a:tcPr marL="91440" marR="91440" marT="45720" marB="45720" anchor="ctr">
+                  <a:tcPr anchor="ctr">
                     <a:solidFill>
                       <a:srgbClr val="FFFFFF"/>
                     </a:solidFill>
@@ -20462,7 +21016,7 @@
                     <a:p>
                       <a:pPr algn="ctr"/>
                       <a:r>
-                        <a:rPr b="1" sz="1700" i="0">
+                        <a:rPr sz="1700" b="1" i="0">
                           <a:solidFill>
                             <a:srgbClr val="E8A82E"/>
                           </a:solidFill>
@@ -20472,7 +21026,7 @@
                       </a:r>
                     </a:p>
                   </a:txBody>
-                  <a:tcPr marL="91440" marR="91440" marT="45720" marB="45720" anchor="ctr">
+                  <a:tcPr anchor="ctr">
                     <a:solidFill>
                       <a:srgbClr val="FFFFFF"/>
                     </a:solidFill>
@@ -20485,7 +21039,7 @@
                     <a:p>
                       <a:pPr algn="ctr"/>
                       <a:r>
-                        <a:rPr b="1" sz="1700" i="0">
+                        <a:rPr sz="1700" b="1" i="0">
                           <a:solidFill>
                             <a:srgbClr val="C0392B"/>
                           </a:solidFill>
@@ -20495,7 +21049,7 @@
                       </a:r>
                     </a:p>
                   </a:txBody>
-                  <a:tcPr marL="91440" marR="91440" marT="45720" marB="45720" anchor="ctr">
+                  <a:tcPr anchor="ctr">
                     <a:solidFill>
                       <a:srgbClr val="FFFFFF"/>
                     </a:solidFill>
@@ -20508,7 +21062,7 @@
                     <a:p>
                       <a:pPr algn="ctr"/>
                       <a:r>
-                        <a:rPr b="1" sz="1700" i="0">
+                        <a:rPr sz="1700" b="1" i="0">
                           <a:solidFill>
                             <a:srgbClr val="2E8B57"/>
                           </a:solidFill>
@@ -20518,12 +21072,17 @@
                       </a:r>
                     </a:p>
                   </a:txBody>
-                  <a:tcPr marL="91440" marR="91440" marT="45720" marB="45720" anchor="ctr">
+                  <a:tcPr anchor="ctr">
                     <a:solidFill>
                       <a:srgbClr val="FFFFFF"/>
                     </a:solidFill>
                   </a:tcPr>
                 </a:tc>
+                <a:extLst>
+                  <a:ext uri="{0D108BD9-81ED-4DB2-BD59-A6C34878D82A}">
+                    <a16:rowId xmlns:a16="http://schemas.microsoft.com/office/drawing/2014/main" val="10001"/>
+                  </a:ext>
+                </a:extLst>
               </a:tr>
               <a:tr h="548640">
                 <a:tc>
@@ -20533,7 +21092,7 @@
                     <a:p>
                       <a:pPr algn="l"/>
                       <a:r>
-                        <a:rPr b="0" sz="1500" i="0">
+                        <a:rPr sz="1500" b="0" i="0">
                           <a:solidFill>
                             <a:srgbClr val="20303C"/>
                           </a:solidFill>
@@ -20543,7 +21102,7 @@
                       </a:r>
                     </a:p>
                   </a:txBody>
-                  <a:tcPr marL="91440" marR="91440" marT="45720" marB="45720" anchor="ctr">
+                  <a:tcPr anchor="ctr">
                     <a:solidFill>
                       <a:srgbClr val="F1F7FA"/>
                     </a:solidFill>
@@ -20556,7 +21115,7 @@
                     <a:p>
                       <a:pPr algn="ctr"/>
                       <a:r>
-                        <a:rPr b="1" sz="1700" i="0">
+                        <a:rPr sz="1700" b="1" i="0">
                           <a:solidFill>
                             <a:srgbClr val="E8A82E"/>
                           </a:solidFill>
@@ -20566,7 +21125,7 @@
                       </a:r>
                     </a:p>
                   </a:txBody>
-                  <a:tcPr marL="91440" marR="91440" marT="45720" marB="45720" anchor="ctr">
+                  <a:tcPr anchor="ctr">
                     <a:solidFill>
                       <a:srgbClr val="F1F7FA"/>
                     </a:solidFill>
@@ -20579,7 +21138,7 @@
                     <a:p>
                       <a:pPr algn="ctr"/>
                       <a:r>
-                        <a:rPr b="1" sz="1700" i="0">
+                        <a:rPr sz="1700" b="1" i="0">
                           <a:solidFill>
                             <a:srgbClr val="C0392B"/>
                           </a:solidFill>
@@ -20589,7 +21148,7 @@
                       </a:r>
                     </a:p>
                   </a:txBody>
-                  <a:tcPr marL="91440" marR="91440" marT="45720" marB="45720" anchor="ctr">
+                  <a:tcPr anchor="ctr">
                     <a:solidFill>
                       <a:srgbClr val="F1F7FA"/>
                     </a:solidFill>
@@ -20602,7 +21161,7 @@
                     <a:p>
                       <a:pPr algn="ctr"/>
                       <a:r>
-                        <a:rPr b="1" sz="1700" i="0">
+                        <a:rPr sz="1700" b="1" i="0">
                           <a:solidFill>
                             <a:srgbClr val="2E8B57"/>
                           </a:solidFill>
@@ -20612,7 +21171,7 @@
                       </a:r>
                     </a:p>
                   </a:txBody>
-                  <a:tcPr marL="91440" marR="91440" marT="45720" marB="45720" anchor="ctr">
+                  <a:tcPr anchor="ctr">
                     <a:solidFill>
                       <a:srgbClr val="F1F7FA"/>
                     </a:solidFill>
@@ -20625,7 +21184,7 @@
                     <a:p>
                       <a:pPr algn="ctr"/>
                       <a:r>
-                        <a:rPr b="1" sz="1700" i="0">
+                        <a:rPr sz="1700" b="1" i="0">
                           <a:solidFill>
                             <a:srgbClr val="2E8B57"/>
                           </a:solidFill>
@@ -20635,7 +21194,7 @@
                       </a:r>
                     </a:p>
                   </a:txBody>
-                  <a:tcPr marL="91440" marR="91440" marT="45720" marB="45720" anchor="ctr">
+                  <a:tcPr anchor="ctr">
                     <a:solidFill>
                       <a:srgbClr val="F1F7FA"/>
                     </a:solidFill>
@@ -20648,7 +21207,7 @@
                     <a:p>
                       <a:pPr algn="ctr"/>
                       <a:r>
-                        <a:rPr b="1" sz="1700" i="0">
+                        <a:rPr sz="1700" b="1" i="0">
                           <a:solidFill>
                             <a:srgbClr val="C0392B"/>
                           </a:solidFill>
@@ -20658,7 +21217,7 @@
                       </a:r>
                     </a:p>
                   </a:txBody>
-                  <a:tcPr marL="91440" marR="91440" marT="45720" marB="45720" anchor="ctr">
+                  <a:tcPr anchor="ctr">
                     <a:solidFill>
                       <a:srgbClr val="F1F7FA"/>
                     </a:solidFill>
@@ -20671,7 +21230,7 @@
                     <a:p>
                       <a:pPr algn="ctr"/>
                       <a:r>
-                        <a:rPr b="1" sz="1700" i="0">
+                        <a:rPr sz="1700" b="1" i="0">
                           <a:solidFill>
                             <a:srgbClr val="C0392B"/>
                           </a:solidFill>
@@ -20681,7 +21240,7 @@
                       </a:r>
                     </a:p>
                   </a:txBody>
-                  <a:tcPr marL="91440" marR="91440" marT="45720" marB="45720" anchor="ctr">
+                  <a:tcPr anchor="ctr">
                     <a:solidFill>
                       <a:srgbClr val="F1F7FA"/>
                     </a:solidFill>
@@ -20694,7 +21253,7 @@
                     <a:p>
                       <a:pPr algn="ctr"/>
                       <a:r>
-                        <a:rPr b="1" sz="1700" i="0">
+                        <a:rPr sz="1700" b="1" i="0">
                           <a:solidFill>
                             <a:srgbClr val="2E8B57"/>
                           </a:solidFill>
@@ -20704,12 +21263,17 @@
                       </a:r>
                     </a:p>
                   </a:txBody>
-                  <a:tcPr marL="91440" marR="91440" marT="45720" marB="45720" anchor="ctr">
+                  <a:tcPr anchor="ctr">
                     <a:solidFill>
                       <a:srgbClr val="F1F7FA"/>
                     </a:solidFill>
                   </a:tcPr>
                 </a:tc>
+                <a:extLst>
+                  <a:ext uri="{0D108BD9-81ED-4DB2-BD59-A6C34878D82A}">
+                    <a16:rowId xmlns:a16="http://schemas.microsoft.com/office/drawing/2014/main" val="10002"/>
+                  </a:ext>
+                </a:extLst>
               </a:tr>
               <a:tr h="548640">
                 <a:tc>
@@ -20719,7 +21283,7 @@
                     <a:p>
                       <a:pPr algn="l"/>
                       <a:r>
-                        <a:rPr b="0" sz="1500" i="0">
+                        <a:rPr sz="1500" b="0" i="0">
                           <a:solidFill>
                             <a:srgbClr val="20303C"/>
                           </a:solidFill>
@@ -20729,7 +21293,7 @@
                       </a:r>
                     </a:p>
                   </a:txBody>
-                  <a:tcPr marL="91440" marR="91440" marT="45720" marB="45720" anchor="ctr">
+                  <a:tcPr anchor="ctr">
                     <a:solidFill>
                       <a:srgbClr val="FFFFFF"/>
                     </a:solidFill>
@@ -20742,7 +21306,7 @@
                     <a:p>
                       <a:pPr algn="ctr"/>
                       <a:r>
-                        <a:rPr b="1" sz="1700" i="0">
+                        <a:rPr sz="1700" b="1" i="0">
                           <a:solidFill>
                             <a:srgbClr val="E8A82E"/>
                           </a:solidFill>
@@ -20752,7 +21316,7 @@
                       </a:r>
                     </a:p>
                   </a:txBody>
-                  <a:tcPr marL="91440" marR="91440" marT="45720" marB="45720" anchor="ctr">
+                  <a:tcPr anchor="ctr">
                     <a:solidFill>
                       <a:srgbClr val="FFFFFF"/>
                     </a:solidFill>
@@ -20765,7 +21329,7 @@
                     <a:p>
                       <a:pPr algn="ctr"/>
                       <a:r>
-                        <a:rPr b="1" sz="1700" i="0">
+                        <a:rPr sz="1700" b="1" i="0">
                           <a:solidFill>
                             <a:srgbClr val="E8A82E"/>
                           </a:solidFill>
@@ -20775,7 +21339,7 @@
                       </a:r>
                     </a:p>
                   </a:txBody>
-                  <a:tcPr marL="91440" marR="91440" marT="45720" marB="45720" anchor="ctr">
+                  <a:tcPr anchor="ctr">
                     <a:solidFill>
                       <a:srgbClr val="FFFFFF"/>
                     </a:solidFill>
@@ -20788,7 +21352,7 @@
                     <a:p>
                       <a:pPr algn="ctr"/>
                       <a:r>
-                        <a:rPr b="1" sz="1700" i="0">
+                        <a:rPr sz="1700" b="1" i="0">
                           <a:solidFill>
                             <a:srgbClr val="2E8B57"/>
                           </a:solidFill>
@@ -20798,7 +21362,7 @@
                       </a:r>
                     </a:p>
                   </a:txBody>
-                  <a:tcPr marL="91440" marR="91440" marT="45720" marB="45720" anchor="ctr">
+                  <a:tcPr anchor="ctr">
                     <a:solidFill>
                       <a:srgbClr val="FFFFFF"/>
                     </a:solidFill>
@@ -20811,7 +21375,7 @@
                     <a:p>
                       <a:pPr algn="ctr"/>
                       <a:r>
-                        <a:rPr b="1" sz="1700" i="0">
+                        <a:rPr sz="1700" b="1" i="0">
                           <a:solidFill>
                             <a:srgbClr val="C0392B"/>
                           </a:solidFill>
@@ -20821,7 +21385,7 @@
                       </a:r>
                     </a:p>
                   </a:txBody>
-                  <a:tcPr marL="91440" marR="91440" marT="45720" marB="45720" anchor="ctr">
+                  <a:tcPr anchor="ctr">
                     <a:solidFill>
                       <a:srgbClr val="FFFFFF"/>
                     </a:solidFill>
@@ -20834,7 +21398,7 @@
                     <a:p>
                       <a:pPr algn="ctr"/>
                       <a:r>
-                        <a:rPr b="1" sz="1700" i="0">
+                        <a:rPr sz="1700" b="1" i="0">
                           <a:solidFill>
                             <a:srgbClr val="C0392B"/>
                           </a:solidFill>
@@ -20844,7 +21408,7 @@
                       </a:r>
                     </a:p>
                   </a:txBody>
-                  <a:tcPr marL="91440" marR="91440" marT="45720" marB="45720" anchor="ctr">
+                  <a:tcPr anchor="ctr">
                     <a:solidFill>
                       <a:srgbClr val="FFFFFF"/>
                     </a:solidFill>
@@ -20857,7 +21421,7 @@
                     <a:p>
                       <a:pPr algn="ctr"/>
                       <a:r>
-                        <a:rPr b="1" sz="1700" i="0">
+                        <a:rPr sz="1700" b="1" i="0">
                           <a:solidFill>
                             <a:srgbClr val="E8A82E"/>
                           </a:solidFill>
@@ -20867,7 +21431,7 @@
                       </a:r>
                     </a:p>
                   </a:txBody>
-                  <a:tcPr marL="91440" marR="91440" marT="45720" marB="45720" anchor="ctr">
+                  <a:tcPr anchor="ctr">
                     <a:solidFill>
                       <a:srgbClr val="FFFFFF"/>
                     </a:solidFill>
@@ -20880,7 +21444,7 @@
                     <a:p>
                       <a:pPr algn="ctr"/>
                       <a:r>
-                        <a:rPr b="1" sz="1700" i="0">
+                        <a:rPr sz="1700" b="1" i="0">
                           <a:solidFill>
                             <a:srgbClr val="2E8B57"/>
                           </a:solidFill>
@@ -20890,12 +21454,17 @@
                       </a:r>
                     </a:p>
                   </a:txBody>
-                  <a:tcPr marL="91440" marR="91440" marT="45720" marB="45720" anchor="ctr">
+                  <a:tcPr anchor="ctr">
                     <a:solidFill>
                       <a:srgbClr val="FFFFFF"/>
                     </a:solidFill>
                   </a:tcPr>
                 </a:tc>
+                <a:extLst>
+                  <a:ext uri="{0D108BD9-81ED-4DB2-BD59-A6C34878D82A}">
+                    <a16:rowId xmlns:a16="http://schemas.microsoft.com/office/drawing/2014/main" val="10003"/>
+                  </a:ext>
+                </a:extLst>
               </a:tr>
               <a:tr h="548640">
                 <a:tc>
@@ -20905,7 +21474,7 @@
                     <a:p>
                       <a:pPr algn="l"/>
                       <a:r>
-                        <a:rPr b="0" sz="1500" i="0">
+                        <a:rPr sz="1500" b="0" i="0">
                           <a:solidFill>
                             <a:srgbClr val="20303C"/>
                           </a:solidFill>
@@ -20915,7 +21484,7 @@
                       </a:r>
                     </a:p>
                   </a:txBody>
-                  <a:tcPr marL="91440" marR="91440" marT="45720" marB="45720" anchor="ctr">
+                  <a:tcPr anchor="ctr">
                     <a:solidFill>
                       <a:srgbClr val="F1F7FA"/>
                     </a:solidFill>
@@ -20928,7 +21497,7 @@
                     <a:p>
                       <a:pPr algn="ctr"/>
                       <a:r>
-                        <a:rPr b="1" sz="1700" i="0">
+                        <a:rPr sz="1700" b="1" i="0">
                           <a:solidFill>
                             <a:srgbClr val="E8A82E"/>
                           </a:solidFill>
@@ -20938,7 +21507,7 @@
                       </a:r>
                     </a:p>
                   </a:txBody>
-                  <a:tcPr marL="91440" marR="91440" marT="45720" marB="45720" anchor="ctr">
+                  <a:tcPr anchor="ctr">
                     <a:solidFill>
                       <a:srgbClr val="F1F7FA"/>
                     </a:solidFill>
@@ -20951,7 +21520,7 @@
                     <a:p>
                       <a:pPr algn="ctr"/>
                       <a:r>
-                        <a:rPr b="1" sz="1700" i="0">
+                        <a:rPr sz="1700" b="1" i="0">
                           <a:solidFill>
                             <a:srgbClr val="2E8B57"/>
                           </a:solidFill>
@@ -20961,7 +21530,7 @@
                       </a:r>
                     </a:p>
                   </a:txBody>
-                  <a:tcPr marL="91440" marR="91440" marT="45720" marB="45720" anchor="ctr">
+                  <a:tcPr anchor="ctr">
                     <a:solidFill>
                       <a:srgbClr val="F1F7FA"/>
                     </a:solidFill>
@@ -20974,7 +21543,7 @@
                     <a:p>
                       <a:pPr algn="ctr"/>
                       <a:r>
-                        <a:rPr b="1" sz="1700" i="0">
+                        <a:rPr sz="1700" b="1" i="0">
                           <a:solidFill>
                             <a:srgbClr val="2E8B57"/>
                           </a:solidFill>
@@ -20984,7 +21553,7 @@
                       </a:r>
                     </a:p>
                   </a:txBody>
-                  <a:tcPr marL="91440" marR="91440" marT="45720" marB="45720" anchor="ctr">
+                  <a:tcPr anchor="ctr">
                     <a:solidFill>
                       <a:srgbClr val="F1F7FA"/>
                     </a:solidFill>
@@ -20997,7 +21566,7 @@
                     <a:p>
                       <a:pPr algn="ctr"/>
                       <a:r>
-                        <a:rPr b="1" sz="1700" i="0">
+                        <a:rPr sz="1700" b="1" i="0">
                           <a:solidFill>
                             <a:srgbClr val="C0392B"/>
                           </a:solidFill>
@@ -21007,7 +21576,7 @@
                       </a:r>
                     </a:p>
                   </a:txBody>
-                  <a:tcPr marL="91440" marR="91440" marT="45720" marB="45720" anchor="ctr">
+                  <a:tcPr anchor="ctr">
                     <a:solidFill>
                       <a:srgbClr val="F1F7FA"/>
                     </a:solidFill>
@@ -21020,7 +21589,7 @@
                     <a:p>
                       <a:pPr algn="ctr"/>
                       <a:r>
-                        <a:rPr b="1" sz="1700" i="0">
+                        <a:rPr sz="1700" b="1" i="0">
                           <a:solidFill>
                             <a:srgbClr val="2E8B57"/>
                           </a:solidFill>
@@ -21030,7 +21599,7 @@
                       </a:r>
                     </a:p>
                   </a:txBody>
-                  <a:tcPr marL="91440" marR="91440" marT="45720" marB="45720" anchor="ctr">
+                  <a:tcPr anchor="ctr">
                     <a:solidFill>
                       <a:srgbClr val="F1F7FA"/>
                     </a:solidFill>
@@ -21043,7 +21612,7 @@
                     <a:p>
                       <a:pPr algn="ctr"/>
                       <a:r>
-                        <a:rPr b="1" sz="1700" i="0">
+                        <a:rPr sz="1700" b="1" i="0">
                           <a:solidFill>
                             <a:srgbClr val="2E8B57"/>
                           </a:solidFill>
@@ -21053,7 +21622,7 @@
                       </a:r>
                     </a:p>
                   </a:txBody>
-                  <a:tcPr marL="91440" marR="91440" marT="45720" marB="45720" anchor="ctr">
+                  <a:tcPr anchor="ctr">
                     <a:solidFill>
                       <a:srgbClr val="F1F7FA"/>
                     </a:solidFill>
@@ -21066,7 +21635,7 @@
                     <a:p>
                       <a:pPr algn="ctr"/>
                       <a:r>
-                        <a:rPr b="1" sz="1700" i="0">
+                        <a:rPr sz="1700" b="1" i="0">
                           <a:solidFill>
                             <a:srgbClr val="2E8B57"/>
                           </a:solidFill>
@@ -21076,12 +21645,17 @@
                       </a:r>
                     </a:p>
                   </a:txBody>
-                  <a:tcPr marL="91440" marR="91440" marT="45720" marB="45720" anchor="ctr">
+                  <a:tcPr anchor="ctr">
                     <a:solidFill>
                       <a:srgbClr val="F1F7FA"/>
                     </a:solidFill>
                   </a:tcPr>
                 </a:tc>
+                <a:extLst>
+                  <a:ext uri="{0D108BD9-81ED-4DB2-BD59-A6C34878D82A}">
+                    <a16:rowId xmlns:a16="http://schemas.microsoft.com/office/drawing/2014/main" val="10004"/>
+                  </a:ext>
+                </a:extLst>
               </a:tr>
               <a:tr h="548640">
                 <a:tc>
@@ -21091,7 +21665,7 @@
                     <a:p>
                       <a:pPr algn="l"/>
                       <a:r>
-                        <a:rPr b="0" sz="1500" i="0">
+                        <a:rPr sz="1500" b="0" i="0">
                           <a:solidFill>
                             <a:srgbClr val="20303C"/>
                           </a:solidFill>
@@ -21101,7 +21675,7 @@
                       </a:r>
                     </a:p>
                   </a:txBody>
-                  <a:tcPr marL="91440" marR="91440" marT="45720" marB="45720" anchor="ctr">
+                  <a:tcPr anchor="ctr">
                     <a:solidFill>
                       <a:srgbClr val="FFFFFF"/>
                     </a:solidFill>
@@ -21114,7 +21688,7 @@
                     <a:p>
                       <a:pPr algn="ctr"/>
                       <a:r>
-                        <a:rPr b="1" sz="1700" i="0">
+                        <a:rPr sz="1700" b="1" i="0">
                           <a:solidFill>
                             <a:srgbClr val="2E8B57"/>
                           </a:solidFill>
@@ -21124,7 +21698,7 @@
                       </a:r>
                     </a:p>
                   </a:txBody>
-                  <a:tcPr marL="91440" marR="91440" marT="45720" marB="45720" anchor="ctr">
+                  <a:tcPr anchor="ctr">
                     <a:solidFill>
                       <a:srgbClr val="FFFFFF"/>
                     </a:solidFill>
@@ -21137,7 +21711,7 @@
                     <a:p>
                       <a:pPr algn="ctr"/>
                       <a:r>
-                        <a:rPr b="1" sz="1700" i="0">
+                        <a:rPr sz="1700" b="1" i="0">
                           <a:solidFill>
                             <a:srgbClr val="2E8B57"/>
                           </a:solidFill>
@@ -21147,7 +21721,7 @@
                       </a:r>
                     </a:p>
                   </a:txBody>
-                  <a:tcPr marL="91440" marR="91440" marT="45720" marB="45720" anchor="ctr">
+                  <a:tcPr anchor="ctr">
                     <a:solidFill>
                       <a:srgbClr val="FFFFFF"/>
                     </a:solidFill>
@@ -21160,7 +21734,7 @@
                     <a:p>
                       <a:pPr algn="ctr"/>
                       <a:r>
-                        <a:rPr b="1" sz="1700" i="0">
+                        <a:rPr sz="1700" b="1" i="0">
                           <a:solidFill>
                             <a:srgbClr val="C0392B"/>
                           </a:solidFill>
@@ -21170,7 +21744,7 @@
                       </a:r>
                     </a:p>
                   </a:txBody>
-                  <a:tcPr marL="91440" marR="91440" marT="45720" marB="45720" anchor="ctr">
+                  <a:tcPr anchor="ctr">
                     <a:solidFill>
                       <a:srgbClr val="FFFFFF"/>
                     </a:solidFill>
@@ -21183,7 +21757,7 @@
                     <a:p>
                       <a:pPr algn="ctr"/>
                       <a:r>
-                        <a:rPr b="1" sz="1700" i="0">
+                        <a:rPr sz="1700" b="1" i="0">
                           <a:solidFill>
                             <a:srgbClr val="2E8B57"/>
                           </a:solidFill>
@@ -21193,7 +21767,7 @@
                       </a:r>
                     </a:p>
                   </a:txBody>
-                  <a:tcPr marL="91440" marR="91440" marT="45720" marB="45720" anchor="ctr">
+                  <a:tcPr anchor="ctr">
                     <a:solidFill>
                       <a:srgbClr val="FFFFFF"/>
                     </a:solidFill>
@@ -21206,7 +21780,7 @@
                     <a:p>
                       <a:pPr algn="ctr"/>
                       <a:r>
-                        <a:rPr b="1" sz="1700" i="0">
+                        <a:rPr sz="1700" b="1" i="0">
                           <a:solidFill>
                             <a:srgbClr val="2E8B57"/>
                           </a:solidFill>
@@ -21216,7 +21790,7 @@
                       </a:r>
                     </a:p>
                   </a:txBody>
-                  <a:tcPr marL="91440" marR="91440" marT="45720" marB="45720" anchor="ctr">
+                  <a:tcPr anchor="ctr">
                     <a:solidFill>
                       <a:srgbClr val="FFFFFF"/>
                     </a:solidFill>
@@ -21229,7 +21803,7 @@
                     <a:p>
                       <a:pPr algn="ctr"/>
                       <a:r>
-                        <a:rPr b="1" sz="1700" i="0">
+                        <a:rPr sz="1700" b="1" i="0">
                           <a:solidFill>
                             <a:srgbClr val="2E8B57"/>
                           </a:solidFill>
@@ -21239,7 +21813,7 @@
                       </a:r>
                     </a:p>
                   </a:txBody>
-                  <a:tcPr marL="91440" marR="91440" marT="45720" marB="45720" anchor="ctr">
+                  <a:tcPr anchor="ctr">
                     <a:solidFill>
                       <a:srgbClr val="FFFFFF"/>
                     </a:solidFill>
@@ -21252,7 +21826,7 @@
                     <a:p>
                       <a:pPr algn="ctr"/>
                       <a:r>
-                        <a:rPr b="1" sz="1700" i="0">
+                        <a:rPr sz="1700" b="1" i="0">
                           <a:solidFill>
                             <a:srgbClr val="2E8B57"/>
                           </a:solidFill>
@@ -21262,12 +21836,17 @@
                       </a:r>
                     </a:p>
                   </a:txBody>
-                  <a:tcPr marL="91440" marR="91440" marT="45720" marB="45720" anchor="ctr">
+                  <a:tcPr anchor="ctr">
                     <a:solidFill>
                       <a:srgbClr val="FFFFFF"/>
                     </a:solidFill>
                   </a:tcPr>
                 </a:tc>
+                <a:extLst>
+                  <a:ext uri="{0D108BD9-81ED-4DB2-BD59-A6C34878D82A}">
+                    <a16:rowId xmlns:a16="http://schemas.microsoft.com/office/drawing/2014/main" val="10005"/>
+                  </a:ext>
+                </a:extLst>
               </a:tr>
               <a:tr h="548640">
                 <a:tc>
@@ -21277,7 +21856,7 @@
                     <a:p>
                       <a:pPr algn="l"/>
                       <a:r>
-                        <a:rPr b="0" sz="1500" i="0">
+                        <a:rPr sz="1500" b="0" i="0">
                           <a:solidFill>
                             <a:srgbClr val="20303C"/>
                           </a:solidFill>
@@ -21287,7 +21866,7 @@
                       </a:r>
                     </a:p>
                   </a:txBody>
-                  <a:tcPr marL="91440" marR="91440" marT="45720" marB="45720" anchor="ctr">
+                  <a:tcPr anchor="ctr">
                     <a:solidFill>
                       <a:srgbClr val="F1F7FA"/>
                     </a:solidFill>
@@ -21300,7 +21879,7 @@
                     <a:p>
                       <a:pPr algn="ctr"/>
                       <a:r>
-                        <a:rPr b="1" sz="1700" i="0">
+                        <a:rPr sz="1700" b="1" i="0">
                           <a:solidFill>
                             <a:srgbClr val="C0392B"/>
                           </a:solidFill>
@@ -21310,7 +21889,7 @@
                       </a:r>
                     </a:p>
                   </a:txBody>
-                  <a:tcPr marL="91440" marR="91440" marT="45720" marB="45720" anchor="ctr">
+                  <a:tcPr anchor="ctr">
                     <a:solidFill>
                       <a:srgbClr val="F1F7FA"/>
                     </a:solidFill>
@@ -21323,7 +21902,7 @@
                     <a:p>
                       <a:pPr algn="ctr"/>
                       <a:r>
-                        <a:rPr b="1" sz="1700" i="0">
+                        <a:rPr sz="1700" b="1" i="0">
                           <a:solidFill>
                             <a:srgbClr val="C0392B"/>
                           </a:solidFill>
@@ -21333,7 +21912,7 @@
                       </a:r>
                     </a:p>
                   </a:txBody>
-                  <a:tcPr marL="91440" marR="91440" marT="45720" marB="45720" anchor="ctr">
+                  <a:tcPr anchor="ctr">
                     <a:solidFill>
                       <a:srgbClr val="F1F7FA"/>
                     </a:solidFill>
@@ -21346,7 +21925,7 @@
                     <a:p>
                       <a:pPr algn="ctr"/>
                       <a:r>
-                        <a:rPr b="1" sz="1700" i="0">
+                        <a:rPr sz="1700" b="1" i="0">
                           <a:solidFill>
                             <a:srgbClr val="C0392B"/>
                           </a:solidFill>
@@ -21356,7 +21935,7 @@
                       </a:r>
                     </a:p>
                   </a:txBody>
-                  <a:tcPr marL="91440" marR="91440" marT="45720" marB="45720" anchor="ctr">
+                  <a:tcPr anchor="ctr">
                     <a:solidFill>
                       <a:srgbClr val="F1F7FA"/>
                     </a:solidFill>
@@ -21369,7 +21948,7 @@
                     <a:p>
                       <a:pPr algn="ctr"/>
                       <a:r>
-                        <a:rPr b="1" sz="1700" i="0">
+                        <a:rPr sz="1700" b="1" i="0">
                           <a:solidFill>
                             <a:srgbClr val="C0392B"/>
                           </a:solidFill>
@@ -21379,7 +21958,7 @@
                       </a:r>
                     </a:p>
                   </a:txBody>
-                  <a:tcPr marL="91440" marR="91440" marT="45720" marB="45720" anchor="ctr">
+                  <a:tcPr anchor="ctr">
                     <a:solidFill>
                       <a:srgbClr val="F1F7FA"/>
                     </a:solidFill>
@@ -21392,7 +21971,7 @@
                     <a:p>
                       <a:pPr algn="ctr"/>
                       <a:r>
-                        <a:rPr b="1" sz="1700" i="0">
+                        <a:rPr sz="1700" b="1" i="0">
                           <a:solidFill>
                             <a:srgbClr val="E8A82E"/>
                           </a:solidFill>
@@ -21402,7 +21981,7 @@
                       </a:r>
                     </a:p>
                   </a:txBody>
-                  <a:tcPr marL="91440" marR="91440" marT="45720" marB="45720" anchor="ctr">
+                  <a:tcPr anchor="ctr">
                     <a:solidFill>
                       <a:srgbClr val="F1F7FA"/>
                     </a:solidFill>
@@ -21415,7 +21994,7 @@
                     <a:p>
                       <a:pPr algn="ctr"/>
                       <a:r>
-                        <a:rPr b="1" sz="1700" i="0">
+                        <a:rPr sz="1700" b="1" i="0">
                           <a:solidFill>
                             <a:srgbClr val="C0392B"/>
                           </a:solidFill>
@@ -21425,7 +22004,7 @@
                       </a:r>
                     </a:p>
                   </a:txBody>
-                  <a:tcPr marL="91440" marR="91440" marT="45720" marB="45720" anchor="ctr">
+                  <a:tcPr anchor="ctr">
                     <a:solidFill>
                       <a:srgbClr val="F1F7FA"/>
                     </a:solidFill>
@@ -21438,7 +22017,7 @@
                     <a:p>
                       <a:pPr algn="ctr"/>
                       <a:r>
-                        <a:rPr b="1" sz="1700" i="0">
+                        <a:rPr sz="1700" b="1" i="0">
                           <a:solidFill>
                             <a:srgbClr val="2E8B57"/>
                           </a:solidFill>
@@ -21448,12 +22027,17 @@
                       </a:r>
                     </a:p>
                   </a:txBody>
-                  <a:tcPr marL="91440" marR="91440" marT="45720" marB="45720" anchor="ctr">
+                  <a:tcPr anchor="ctr">
                     <a:solidFill>
                       <a:srgbClr val="F1F7FA"/>
                     </a:solidFill>
                   </a:tcPr>
                 </a:tc>
+                <a:extLst>
+                  <a:ext uri="{0D108BD9-81ED-4DB2-BD59-A6C34878D82A}">
+                    <a16:rowId xmlns:a16="http://schemas.microsoft.com/office/drawing/2014/main" val="10006"/>
+                  </a:ext>
+                </a:extLst>
               </a:tr>
             </a:tbl>
           </a:graphicData>
@@ -21498,12 +22082,12 @@
           </a:fontRef>
         </p:style>
         <p:txBody>
-          <a:bodyPr rtlCol="0" anchor="ctr" wrap="square" lIns="274320" rIns="274320" tIns="274320" bIns="274320"/>
+          <a:bodyPr wrap="square" lIns="274320" tIns="274320" rIns="274320" bIns="274320" rtlCol="0" anchor="ctr"/>
           <a:lstStyle/>
           <a:p>
             <a:pPr algn="ctr"/>
             <a:r>
-              <a:rPr b="1" sz="1700" i="0">
+              <a:rPr sz="1700" b="1" i="0">
                 <a:solidFill>
                   <a:srgbClr val="FFFFFF"/>
                 </a:solidFill>
@@ -21512,7 +22096,7 @@
               <a:t>Aucun produit ne coche les six cases</a:t>
             </a:r>
             <a:r>
-              <a:rPr b="0" sz="1700" i="0">
+              <a:rPr sz="1700" b="0" i="0">
                 <a:solidFill>
                   <a:srgbClr val="FFFFFF"/>
                 </a:solidFill>
@@ -21524,6 +22108,11 @@
         </p:txBody>
       </p:sp>
     </p:spTree>
+    <p:extLst>
+      <p:ext uri="{BB962C8B-B14F-4D97-AF65-F5344CB8AC3E}">
+        <p14:creationId xmlns:p14="http://schemas.microsoft.com/office/powerpoint/2010/main" val="2821228529"/>
+      </p:ext>
+    </p:extLst>
   </p:cSld>
   <p:clrMapOvr>
     <a:masterClrMapping/>
@@ -21532,7 +22121,7 @@
 </file>
 
 <file path=ppt/slides/slide9.xml><?xml version="1.0" encoding="utf-8"?>
-<p:sld xmlns:a="http://schemas.openxmlformats.org/drawingml/2006/main" xmlns:p="http://schemas.openxmlformats.org/presentationml/2006/main" xmlns:r="http://schemas.openxmlformats.org/officeDocument/2006/relationships">
+<p:sld xmlns:a="http://schemas.openxmlformats.org/drawingml/2006/main" xmlns:r="http://schemas.openxmlformats.org/officeDocument/2006/relationships" xmlns:p="http://schemas.openxmlformats.org/presentationml/2006/main">
   <p:cSld>
     <p:spTree>
       <p:nvGrpSpPr>
@@ -21540,7 +22129,14 @@
         <p:cNvGrpSpPr/>
         <p:nvPr/>
       </p:nvGrpSpPr>
-      <p:grpSpPr/>
+      <p:grpSpPr>
+        <a:xfrm>
+          <a:off x="0" y="0"/>
+          <a:ext cx="0" cy="0"/>
+          <a:chOff x="0" y="0"/>
+          <a:chExt cx="0" cy="0"/>
+        </a:xfrm>
+      </p:grpSpPr>
       <p:pic>
         <p:nvPicPr>
           <p:cNvPr id="2" name="Picture 1" descr="logo-ituniversity.png"/>
@@ -21689,7 +22285,7 @@
           <a:noFill/>
         </p:spPr>
         <p:txBody>
-          <a:bodyPr wrap="square" anchor="t" lIns="0" rIns="0" tIns="0" bIns="0">
+          <a:bodyPr wrap="square" lIns="0" tIns="0" rIns="0" bIns="0" anchor="t">
             <a:spAutoFit/>
           </a:bodyPr>
           <a:lstStyle/>
@@ -21700,7 +22296,7 @@
               </a:spcAft>
             </a:pPr>
             <a:r>
-              <a:rPr b="0" sz="3200" i="0">
+              <a:rPr sz="3200" b="0" i="0">
                 <a:solidFill>
                   <a:srgbClr val="106D8E"/>
                 </a:solidFill>
@@ -21720,7 +22316,7 @@
         <p:spPr>
           <a:xfrm>
             <a:off x="685800" y="1554480"/>
-            <a:ext cx="13258800" cy="457200"/>
+            <a:ext cx="13258800" cy="307777"/>
           </a:xfrm>
           <a:prstGeom prst="rect">
             <a:avLst/>
@@ -21728,7 +22324,7 @@
           <a:noFill/>
         </p:spPr>
         <p:txBody>
-          <a:bodyPr wrap="square" anchor="t" lIns="0" rIns="0" tIns="0" bIns="0">
+          <a:bodyPr wrap="square" lIns="0" tIns="0" rIns="0" bIns="0" anchor="t">
             <a:spAutoFit/>
           </a:bodyPr>
           <a:lstStyle/>
@@ -21739,13 +22335,13 @@
               </a:spcAft>
             </a:pPr>
             <a:r>
-              <a:rPr b="0" sz="2000" i="0">
+              <a:rPr sz="2000" b="0" i="0">
                 <a:solidFill>
                   <a:srgbClr val="5A6B79"/>
                 </a:solidFill>
                 <a:latin typeface="Calibri"/>
               </a:rPr>
-              <a:t>Trois briques retenues, chacune introduite par un besoin</a:t>
+              <a:t>Trois briques retenues : stockage réparti, rapprochement explicable, échange standardisé</a:t>
             </a:r>
           </a:p>
         </p:txBody>
@@ -21802,7 +22398,7 @@
           <a:noFill/>
         </p:spPr>
         <p:txBody>
-          <a:bodyPr wrap="square" anchor="t" lIns="0" rIns="0" tIns="0" bIns="0">
+          <a:bodyPr wrap="square" lIns="0" tIns="0" rIns="0" bIns="0" anchor="t">
             <a:spAutoFit/>
           </a:bodyPr>
           <a:lstStyle/>
@@ -21813,7 +22409,7 @@
               </a:spcAft>
             </a:pPr>
             <a:r>
-              <a:rPr b="0" sz="1100" i="0">
+              <a:rPr sz="1100" b="0" i="0">
                 <a:solidFill>
                   <a:srgbClr val="106D8E"/>
                 </a:solidFill>
@@ -21841,7 +22437,7 @@
           <a:noFill/>
         </p:spPr>
         <p:txBody>
-          <a:bodyPr wrap="square" anchor="t" lIns="0" rIns="0" tIns="0" bIns="0">
+          <a:bodyPr wrap="square" lIns="0" tIns="0" rIns="0" bIns="0" anchor="t">
             <a:spAutoFit/>
           </a:bodyPr>
           <a:lstStyle/>
@@ -21852,7 +22448,7 @@
               </a:spcAft>
             </a:pPr>
             <a:r>
-              <a:rPr b="0" sz="1100" i="0">
+              <a:rPr sz="1100" b="0" i="0">
                 <a:solidFill>
                   <a:srgbClr val="106D8E"/>
                 </a:solidFill>
@@ -21906,6 +22502,7 @@
           <a:lstStyle/>
           <a:p>
             <a:pPr algn="ctr"/>
+            <a:endParaRPr/>
           </a:p>
         </p:txBody>
       </p:sp>
@@ -21946,12 +22543,12 @@
           </a:fontRef>
         </p:style>
         <p:txBody>
-          <a:bodyPr rtlCol="0" anchor="ctr" wrap="square" lIns="0" rIns="0" tIns="0" bIns="0"/>
+          <a:bodyPr wrap="square" lIns="0" tIns="0" rIns="0" bIns="0" rtlCol="0" anchor="ctr"/>
           <a:lstStyle/>
           <a:p>
             <a:pPr algn="ctr"/>
             <a:r>
-              <a:rPr b="1" sz="1600" i="0">
+              <a:rPr sz="1600" b="1" i="0">
                 <a:solidFill>
                   <a:srgbClr val="FFFFFF"/>
                 </a:solidFill>
@@ -21979,7 +22576,7 @@
           <a:noFill/>
         </p:spPr>
         <p:txBody>
-          <a:bodyPr wrap="square" anchor="t" lIns="0" rIns="0" tIns="0" bIns="0">
+          <a:bodyPr wrap="square" lIns="0" tIns="0" rIns="0" bIns="0" anchor="t">
             <a:spAutoFit/>
           </a:bodyPr>
           <a:lstStyle/>
@@ -21990,7 +22587,7 @@
               </a:spcAft>
             </a:pPr>
             <a:r>
-              <a:rPr b="1" sz="1700" i="0">
+              <a:rPr sz="1700" b="1" i="0">
                 <a:solidFill>
                   <a:srgbClr val="0B2E4F"/>
                 </a:solidFill>
@@ -22018,7 +22615,7 @@
           <a:noFill/>
         </p:spPr>
         <p:txBody>
-          <a:bodyPr wrap="square" anchor="t" lIns="0" rIns="0" tIns="0" bIns="0">
+          <a:bodyPr wrap="square" lIns="0" tIns="0" rIns="0" bIns="0" anchor="t">
             <a:spAutoFit/>
           </a:bodyPr>
           <a:lstStyle/>
@@ -22029,7 +22626,7 @@
               </a:spcAft>
             </a:pPr>
             <a:r>
-              <a:rPr b="0" sz="1700" i="0">
+              <a:rPr sz="1700" b="0" i="0">
                 <a:solidFill>
                   <a:srgbClr val="20303C"/>
                 </a:solidFill>
@@ -22038,7 +22635,7 @@
               <a:t>Stockage et traitement répartis ; Data Lake Medallion RAW → SILVER → GOLD. Il vient </a:t>
             </a:r>
             <a:r>
-              <a:rPr b="1" sz="1700" i="0">
+              <a:rPr sz="1700" b="1" i="0">
                 <a:solidFill>
                   <a:srgbClr val="20303C"/>
                 </a:solidFill>
@@ -22047,7 +22644,7 @@
               <a:t>après</a:t>
             </a:r>
             <a:r>
-              <a:rPr b="0" sz="1700" i="0">
+              <a:rPr sz="1700" b="0" i="0">
                 <a:solidFill>
                   <a:srgbClr val="20303C"/>
                 </a:solidFill>
@@ -22101,6 +22698,7 @@
           <a:lstStyle/>
           <a:p>
             <a:pPr algn="ctr"/>
+            <a:endParaRPr/>
           </a:p>
         </p:txBody>
       </p:sp>
@@ -22141,12 +22739,12 @@
           </a:fontRef>
         </p:style>
         <p:txBody>
-          <a:bodyPr rtlCol="0" anchor="ctr" wrap="square" lIns="0" rIns="0" tIns="0" bIns="0"/>
+          <a:bodyPr wrap="square" lIns="0" tIns="0" rIns="0" bIns="0" rtlCol="0" anchor="ctr"/>
           <a:lstStyle/>
           <a:p>
             <a:pPr algn="ctr"/>
             <a:r>
-              <a:rPr b="1" sz="1600" i="0">
+              <a:rPr sz="1600" b="1" i="0">
                 <a:solidFill>
                   <a:srgbClr val="FFFFFF"/>
                 </a:solidFill>
@@ -22174,7 +22772,7 @@
           <a:noFill/>
         </p:spPr>
         <p:txBody>
-          <a:bodyPr wrap="square" anchor="t" lIns="0" rIns="0" tIns="0" bIns="0">
+          <a:bodyPr wrap="square" lIns="0" tIns="0" rIns="0" bIns="0" anchor="t">
             <a:spAutoFit/>
           </a:bodyPr>
           <a:lstStyle/>
@@ -22185,7 +22783,7 @@
               </a:spcAft>
             </a:pPr>
             <a:r>
-              <a:rPr b="1" sz="1700" i="0">
+              <a:rPr sz="1700" b="1" i="0">
                 <a:solidFill>
                   <a:srgbClr val="0B2E4F"/>
                 </a:solidFill>
@@ -22213,7 +22811,7 @@
           <a:noFill/>
         </p:spPr>
         <p:txBody>
-          <a:bodyPr wrap="square" anchor="t" lIns="0" rIns="0" tIns="0" bIns="0">
+          <a:bodyPr wrap="square" lIns="0" tIns="0" rIns="0" bIns="0" anchor="t">
             <a:spAutoFit/>
           </a:bodyPr>
           <a:lstStyle/>
@@ -22224,7 +22822,7 @@
               </a:spcAft>
             </a:pPr>
             <a:r>
-              <a:rPr b="0" sz="1700" i="0">
+              <a:rPr sz="1700" b="0" i="0">
                 <a:solidFill>
                   <a:srgbClr val="20303C"/>
                 </a:solidFill>
@@ -22233,7 +22831,7 @@
               <a:t>Fellegi–Sunter : passe exacte puis probabiliste, score pondéré lisible, seuil </a:t>
             </a:r>
             <a:r>
-              <a:rPr b="1" sz="1700" i="0">
+              <a:rPr sz="1700" b="1" i="0">
                 <a:solidFill>
                   <a:srgbClr val="20303C"/>
                 </a:solidFill>
@@ -22242,7 +22840,7 @@
               <a:t>0,80</a:t>
             </a:r>
             <a:r>
-              <a:rPr b="0" sz="1700" i="0">
+              <a:rPr sz="1700" b="0" i="0">
                 <a:solidFill>
                   <a:srgbClr val="20303C"/>
                 </a:solidFill>
@@ -22296,6 +22894,7 @@
           <a:lstStyle/>
           <a:p>
             <a:pPr algn="ctr"/>
+            <a:endParaRPr/>
           </a:p>
         </p:txBody>
       </p:sp>
@@ -22336,12 +22935,12 @@
           </a:fontRef>
         </p:style>
         <p:txBody>
-          <a:bodyPr rtlCol="0" anchor="ctr" wrap="square" lIns="0" rIns="0" tIns="0" bIns="0"/>
+          <a:bodyPr wrap="square" lIns="0" tIns="0" rIns="0" bIns="0" rtlCol="0" anchor="ctr"/>
           <a:lstStyle/>
           <a:p>
             <a:pPr algn="ctr"/>
             <a:r>
-              <a:rPr b="1" sz="1600" i="0">
+              <a:rPr sz="1600" b="1" i="0">
                 <a:solidFill>
                   <a:srgbClr val="FFFFFF"/>
                 </a:solidFill>
@@ -22369,7 +22968,7 @@
           <a:noFill/>
         </p:spPr>
         <p:txBody>
-          <a:bodyPr wrap="square" anchor="t" lIns="0" rIns="0" tIns="0" bIns="0">
+          <a:bodyPr wrap="square" lIns="0" tIns="0" rIns="0" bIns="0" anchor="t">
             <a:spAutoFit/>
           </a:bodyPr>
           <a:lstStyle/>
@@ -22380,7 +22979,7 @@
               </a:spcAft>
             </a:pPr>
             <a:r>
-              <a:rPr b="1" sz="1700" i="0">
+              <a:rPr sz="1700" b="1" i="0">
                 <a:solidFill>
                   <a:srgbClr val="0B2E4F"/>
                 </a:solidFill>
@@ -22408,7 +23007,7 @@
           <a:noFill/>
         </p:spPr>
         <p:txBody>
-          <a:bodyPr wrap="square" anchor="t" lIns="0" rIns="0" tIns="0" bIns="0">
+          <a:bodyPr wrap="square" lIns="0" tIns="0" rIns="0" bIns="0" anchor="t">
             <a:spAutoFit/>
           </a:bodyPr>
           <a:lstStyle/>
@@ -22419,7 +23018,7 @@
               </a:spcAft>
             </a:pPr>
             <a:r>
-              <a:rPr b="0" sz="1700" i="0">
+              <a:rPr sz="1700" b="0" i="0">
                 <a:solidFill>
                   <a:srgbClr val="20303C"/>
                 </a:solidFill>
@@ -22469,12 +23068,12 @@
           </a:fontRef>
         </p:style>
         <p:txBody>
-          <a:bodyPr rtlCol="0" anchor="ctr" wrap="square" lIns="274320" rIns="274320" tIns="274320" bIns="274320"/>
+          <a:bodyPr wrap="square" lIns="274320" tIns="274320" rIns="274320" bIns="274320" rtlCol="0" anchor="ctr"/>
           <a:lstStyle/>
           <a:p>
             <a:pPr algn="ctr"/>
             <a:r>
-              <a:rPr b="1" sz="1600" i="0">
+              <a:rPr sz="1600" b="1" i="0">
                 <a:solidFill>
                   <a:srgbClr val="0B2E4F"/>
                 </a:solidFill>
@@ -22483,7 +23082,7 @@
               <a:t>Choix technologique</a:t>
             </a:r>
             <a:r>
-              <a:rPr b="0" sz="1600" i="0">
+              <a:rPr sz="1600" b="0" i="0">
                 <a:solidFill>
                   <a:srgbClr val="0B2E4F"/>
                 </a:solidFill>
@@ -22492,7 +23091,7 @@
               <a:t> : RapidFuzz plutôt qu'un NLP lourd (crash sous Python 3.8), score explicable plutôt qu'EM, et </a:t>
             </a:r>
             <a:r>
-              <a:rPr b="1" sz="1600" i="0">
+              <a:rPr sz="1600" b="1" i="0">
                 <a:solidFill>
                   <a:srgbClr val="0B2E4F"/>
                 </a:solidFill>
@@ -22501,7 +23100,7 @@
               <a:t>parité Pandas = Spark</a:t>
             </a:r>
             <a:r>
-              <a:rPr b="0" sz="1600" i="0">
+              <a:rPr sz="1600" b="0" i="0">
                 <a:solidFill>
                   <a:srgbClr val="0B2E4F"/>
                 </a:solidFill>
@@ -22513,6 +23112,11 @@
         </p:txBody>
       </p:sp>
     </p:spTree>
+    <p:extLst>
+      <p:ext uri="{BB962C8B-B14F-4D97-AF65-F5344CB8AC3E}">
+        <p14:creationId xmlns:p14="http://schemas.microsoft.com/office/powerpoint/2010/main" val="4006792875"/>
+      </p:ext>
+    </p:extLst>
   </p:cSld>
   <p:clrMapOvr>
     <a:masterClrMapping/>
@@ -22838,4 +23442,26 @@
   </a:objectDefaults>
   <a:extraClrSchemeLst/>
 </a:theme>
+</file>
+
+<file path=ppt/webextensions/taskpanes.xml><?xml version="1.0" encoding="utf-8"?>
+<wetp:taskpanes xmlns:wetp="http://schemas.microsoft.com/office/webextensions/taskpanes/2010/11">
+  <wetp:taskpane dockstate="right" visibility="0" width="438" row="0">
+    <wetp:webextensionref xmlns:r="http://schemas.openxmlformats.org/officeDocument/2006/relationships" r:id="rId1"/>
+  </wetp:taskpane>
+</wetp:taskpanes>
+</file>
+
+<file path=ppt/webextensions/webextension1.xml><?xml version="1.0" encoding="utf-8"?>
+<we:webextension xmlns:we="http://schemas.microsoft.com/office/webextensions/webextension/2010/11" id="{8AA15943-5C73-44B3-97EF-8676D8F01F13}">
+  <we:reference id="wa200010001" version="1.0.0.1" store="en-US" storeType="OMEX"/>
+  <we:alternateReferences>
+    <we:reference id="wa200010001" version="1.0.0.1" store="en-US" storeType="OMEX"/>
+  </we:alternateReferences>
+  <we:properties>
+    <we:property name="claude.fileId" value="&quot;49873076-59fe-498b-872b-34def1a11f49&quot;"/>
+  </we:properties>
+  <we:bindings/>
+  <we:snapshot xmlns:r="http://schemas.openxmlformats.org/officeDocument/2006/relationships"/>
+</we:webextension>
 </file>